--- a/PREZENTACIJA_JB.pptx
+++ b/PREZENTACIJA_JB.pptx
@@ -15,6 +15,12 @@
     <p:sldId id="263" r:id="rId9"/>
     <p:sldId id="264" r:id="rId10"/>
     <p:sldId id="265" r:id="rId11"/>
+    <p:sldId id="266" r:id="rId12"/>
+    <p:sldId id="267" r:id="rId13"/>
+    <p:sldId id="268" r:id="rId14"/>
+    <p:sldId id="269" r:id="rId15"/>
+    <p:sldId id="270" r:id="rId16"/>
+    <p:sldId id="271" r:id="rId17"/>
   </p:sldIdLst>
   <p:sldSz cx="12192000" cy="6858000"/>
   <p:notesSz cx="6858000" cy="9144000"/>
@@ -113,6 +119,11 @@
       </a:defRPr>
     </a:lvl9pPr>
   </p:defaultTextStyle>
+  <p:extLst>
+    <p:ext uri="{EFAFB233-063F-42B5-8137-9DF3F51BA10A}">
+      <p15:sldGuideLst xmlns:p15="http://schemas.microsoft.com/office/powerpoint/2012/main"/>
+    </p:ext>
+  </p:extLst>
 </p:presentation>
 </file>
 
@@ -342,7 +353,7 @@
           <a:p>
             <a:fld id="{96DFF08F-DC6B-4601-B491-B0F83F6DD2DA}" type="datetimeFigureOut">
               <a:rPr lang="en-US" dirty="0"/>
-              <a:t>19. 07. 2026.</a:t>
+              <a:t>20. 07. 2026.</a:t>
             </a:fld>
             <a:endParaRPr lang="en-US" dirty="0"/>
           </a:p>
@@ -545,7 +556,7 @@
           <a:p>
             <a:fld id="{96DFF08F-DC6B-4601-B491-B0F83F6DD2DA}" type="datetimeFigureOut">
               <a:rPr lang="en-US" dirty="0"/>
-              <a:t>19. 07. 2026.</a:t>
+              <a:t>20. 07. 2026.</a:t>
             </a:fld>
             <a:endParaRPr lang="en-US" dirty="0"/>
           </a:p>
@@ -796,7 +807,7 @@
           <a:p>
             <a:fld id="{96DFF08F-DC6B-4601-B491-B0F83F6DD2DA}" type="datetimeFigureOut">
               <a:rPr lang="en-US" dirty="0"/>
-              <a:t>19. 07. 2026.</a:t>
+              <a:t>20. 07. 2026.</a:t>
             </a:fld>
             <a:endParaRPr lang="en-US" dirty="0"/>
           </a:p>
@@ -961,7 +972,7 @@
           <a:p>
             <a:fld id="{D62CEF3B-A037-46D0-B02C-1428F07E9383}" type="datetimeFigureOut">
               <a:rPr lang="en-US" dirty="0"/>
-              <a:t>19. 07. 2026.</a:t>
+              <a:t>20. 07. 2026.</a:t>
             </a:fld>
             <a:endParaRPr lang="en-US" dirty="0"/>
           </a:p>
@@ -1299,7 +1310,7 @@
           <a:p>
             <a:fld id="{96DFF08F-DC6B-4601-B491-B0F83F6DD2DA}" type="datetimeFigureOut">
               <a:rPr lang="en-US" dirty="0"/>
-              <a:t>19. 07. 2026.</a:t>
+              <a:t>20. 07. 2026.</a:t>
             </a:fld>
             <a:endParaRPr lang="en-US" dirty="0"/>
           </a:p>
@@ -1569,7 +1580,7 @@
           <a:p>
             <a:fld id="{96DFF08F-DC6B-4601-B491-B0F83F6DD2DA}" type="datetimeFigureOut">
               <a:rPr lang="en-US" dirty="0"/>
-              <a:t>19. 07. 2026.</a:t>
+              <a:t>20. 07. 2026.</a:t>
             </a:fld>
             <a:endParaRPr lang="en-US" dirty="0"/>
           </a:p>
@@ -1943,7 +1954,7 @@
           <a:p>
             <a:fld id="{96DFF08F-DC6B-4601-B491-B0F83F6DD2DA}" type="datetimeFigureOut">
               <a:rPr lang="en-US" dirty="0"/>
-              <a:t>19. 07. 2026.</a:t>
+              <a:t>20. 07. 2026.</a:t>
             </a:fld>
             <a:endParaRPr lang="en-US" dirty="0"/>
           </a:p>
@@ -2056,7 +2067,7 @@
           <a:p>
             <a:fld id="{96DFF08F-DC6B-4601-B491-B0F83F6DD2DA}" type="datetimeFigureOut">
               <a:rPr lang="en-US" dirty="0"/>
-              <a:t>19. 07. 2026.</a:t>
+              <a:t>20. 07. 2026.</a:t>
             </a:fld>
             <a:endParaRPr lang="en-US" dirty="0"/>
           </a:p>
@@ -2223,7 +2234,7 @@
             <a:fld id="{96DFF08F-DC6B-4601-B491-B0F83F6DD2DA}" type="datetimeFigureOut">
               <a:rPr lang="en-US" dirty="0"/>
               <a:pPr/>
-              <a:t>19. 07. 2026.</a:t>
+              <a:t>20. 07. 2026.</a:t>
             </a:fld>
             <a:endParaRPr lang="en-US" dirty="0"/>
           </a:p>
@@ -2574,7 +2585,7 @@
             <a:fld id="{96DFF08F-DC6B-4601-B491-B0F83F6DD2DA}" type="datetimeFigureOut">
               <a:rPr lang="en-US" dirty="0"/>
               <a:pPr/>
-              <a:t>19. 07. 2026.</a:t>
+              <a:t>20. 07. 2026.</a:t>
             </a:fld>
             <a:endParaRPr lang="en-US" dirty="0"/>
           </a:p>
@@ -2947,7 +2958,7 @@
           <a:p>
             <a:fld id="{96DFF08F-DC6B-4601-B491-B0F83F6DD2DA}" type="datetimeFigureOut">
               <a:rPr lang="en-US" dirty="0"/>
-              <a:t>19. 07. 2026.</a:t>
+              <a:t>20. 07. 2026.</a:t>
             </a:fld>
             <a:endParaRPr lang="en-US" dirty="0"/>
           </a:p>
@@ -3230,7 +3241,7 @@
             <a:fld id="{96DFF08F-DC6B-4601-B491-B0F83F6DD2DA}" type="datetimeFigureOut">
               <a:rPr lang="en-US" dirty="0"/>
               <a:pPr/>
-              <a:t>19. 07. 2026.</a:t>
+              <a:t>20. 07. 2026.</a:t>
             </a:fld>
             <a:endParaRPr lang="en-US" dirty="0"/>
           </a:p>
@@ -3943,6 +3954,2197 @@
 </p:sld>
 </file>
 
+<file path=ppt/slides/slide11.xml><?xml version="1.0" encoding="utf-8"?>
+<p:sld xmlns:a="http://schemas.openxmlformats.org/drawingml/2006/main" xmlns:r="http://schemas.openxmlformats.org/officeDocument/2006/relationships" xmlns:p="http://schemas.openxmlformats.org/presentationml/2006/main">
+  <p:cSld>
+    <p:spTree>
+      <p:nvGrpSpPr>
+        <p:cNvPr id="1" name=""/>
+        <p:cNvGrpSpPr/>
+        <p:nvPr/>
+      </p:nvGrpSpPr>
+      <p:grpSpPr>
+        <a:xfrm>
+          <a:off x="0" y="0"/>
+          <a:ext cx="0" cy="0"/>
+          <a:chOff x="0" y="0"/>
+          <a:chExt cx="0" cy="0"/>
+        </a:xfrm>
+      </p:grpSpPr>
+      <p:sp>
+        <p:nvSpPr>
+          <p:cNvPr id="2" name="Title 1">
+            <a:extLst>
+              <a:ext uri="{FF2B5EF4-FFF2-40B4-BE49-F238E27FC236}">
+                <a16:creationId xmlns:a16="http://schemas.microsoft.com/office/drawing/2014/main" id="{DA485149-B56F-4E04-95BE-F208D4C929E7}"/>
+              </a:ext>
+            </a:extLst>
+          </p:cNvPr>
+          <p:cNvSpPr>
+            <a:spLocks noGrp="1"/>
+          </p:cNvSpPr>
+          <p:nvPr>
+            <p:ph type="title"/>
+          </p:nvPr>
+        </p:nvSpPr>
+        <p:spPr/>
+        <p:txBody>
+          <a:bodyPr/>
+          <a:lstStyle/>
+          <a:p>
+            <a:r>
+              <a:rPr lang="sr-Cyrl-RS" dirty="0"/>
+              <a:t>ИТЕРАЦИЈА СИСТЕМА - Евалуација</a:t>
+            </a:r>
+            <a:endParaRPr lang="en-US" dirty="0"/>
+          </a:p>
+        </p:txBody>
+      </p:sp>
+      <p:pic>
+        <p:nvPicPr>
+          <p:cNvPr id="4" name="Picture 3">
+            <a:extLst>
+              <a:ext uri="{FF2B5EF4-FFF2-40B4-BE49-F238E27FC236}">
+                <a16:creationId xmlns:a16="http://schemas.microsoft.com/office/drawing/2014/main" id="{2283A8D4-8DBE-48EC-A2AE-ED10A572AB34}"/>
+              </a:ext>
+            </a:extLst>
+          </p:cNvPr>
+          <p:cNvPicPr>
+            <a:picLocks noChangeAspect="1"/>
+          </p:cNvPicPr>
+          <p:nvPr/>
+        </p:nvPicPr>
+        <p:blipFill>
+          <a:blip r:embed="rId2"/>
+          <a:stretch>
+            <a:fillRect/>
+          </a:stretch>
+        </p:blipFill>
+        <p:spPr>
+          <a:xfrm>
+            <a:off x="1129581" y="4089800"/>
+            <a:ext cx="1157643" cy="1157643"/>
+          </a:xfrm>
+          <a:prstGeom prst="rect">
+            <a:avLst/>
+          </a:prstGeom>
+        </p:spPr>
+      </p:pic>
+      <p:pic>
+        <p:nvPicPr>
+          <p:cNvPr id="5" name="Picture 4" descr="lemon - download free icon Classic Slot Machine Icons on Artage.io">
+            <a:extLst>
+              <a:ext uri="{FF2B5EF4-FFF2-40B4-BE49-F238E27FC236}">
+                <a16:creationId xmlns:a16="http://schemas.microsoft.com/office/drawing/2014/main" id="{7A7E183C-2294-4398-8107-78D0FF8E0C01}"/>
+              </a:ext>
+            </a:extLst>
+          </p:cNvPr>
+          <p:cNvPicPr>
+            <a:picLocks noChangeAspect="1" noChangeArrowheads="1"/>
+          </p:cNvPicPr>
+          <p:nvPr/>
+        </p:nvPicPr>
+        <p:blipFill>
+          <a:blip r:embed="rId3">
+            <a:extLst>
+              <a:ext uri="{28A0092B-C50C-407E-A947-70E740481C1C}">
+                <a14:useLocalDpi xmlns:a14="http://schemas.microsoft.com/office/drawing/2010/main" val="0"/>
+              </a:ext>
+            </a:extLst>
+          </a:blip>
+          <a:srcRect/>
+          <a:stretch>
+            <a:fillRect/>
+          </a:stretch>
+        </p:blipFill>
+        <p:spPr bwMode="auto">
+          <a:xfrm>
+            <a:off x="3754103" y="4319654"/>
+            <a:ext cx="697934" cy="697934"/>
+          </a:xfrm>
+          <a:prstGeom prst="rect">
+            <a:avLst/>
+          </a:prstGeom>
+          <a:noFill/>
+          <a:extLst>
+            <a:ext uri="{909E8E84-426E-40DD-AFC4-6F175D3DCCD1}">
+              <a14:hiddenFill xmlns:a14="http://schemas.microsoft.com/office/drawing/2010/main">
+                <a:solidFill>
+                  <a:srgbClr val="FFFFFF"/>
+                </a:solidFill>
+              </a14:hiddenFill>
+            </a:ext>
+          </a:extLst>
+        </p:spPr>
+      </p:pic>
+      <p:sp>
+        <p:nvSpPr>
+          <p:cNvPr id="7" name="TextBox 6">
+            <a:extLst>
+              <a:ext uri="{FF2B5EF4-FFF2-40B4-BE49-F238E27FC236}">
+                <a16:creationId xmlns:a16="http://schemas.microsoft.com/office/drawing/2014/main" id="{D19B01B4-49C0-4992-A958-7CFD55DC8D34}"/>
+              </a:ext>
+            </a:extLst>
+          </p:cNvPr>
+          <p:cNvSpPr txBox="1"/>
+          <p:nvPr/>
+        </p:nvSpPr>
+        <p:spPr>
+          <a:xfrm>
+            <a:off x="1349170" y="2126353"/>
+            <a:ext cx="718466" cy="2400657"/>
+          </a:xfrm>
+          <a:prstGeom prst="rect">
+            <a:avLst/>
+          </a:prstGeom>
+          <a:noFill/>
+        </p:spPr>
+        <p:txBody>
+          <a:bodyPr wrap="none" rtlCol="0">
+            <a:spAutoFit/>
+          </a:bodyPr>
+          <a:lstStyle/>
+          <a:p>
+            <a:r>
+              <a:rPr lang="sr-Latn-RS" sz="6600" dirty="0"/>
+              <a:t>B</a:t>
+            </a:r>
+          </a:p>
+          <a:p>
+            <a:r>
+              <a:rPr lang="sr-Latn-RS" sz="6600" dirty="0"/>
+              <a:t>G</a:t>
+            </a:r>
+          </a:p>
+          <a:p>
+            <a:endParaRPr lang="en-US" dirty="0"/>
+          </a:p>
+        </p:txBody>
+      </p:sp>
+      <p:sp>
+        <p:nvSpPr>
+          <p:cNvPr id="8" name="TextBox 7">
+            <a:extLst>
+              <a:ext uri="{FF2B5EF4-FFF2-40B4-BE49-F238E27FC236}">
+                <a16:creationId xmlns:a16="http://schemas.microsoft.com/office/drawing/2014/main" id="{A6A385E5-7FF7-4B75-8475-4CF8EAF7315F}"/>
+              </a:ext>
+            </a:extLst>
+          </p:cNvPr>
+          <p:cNvSpPr txBox="1"/>
+          <p:nvPr/>
+        </p:nvSpPr>
+        <p:spPr>
+          <a:xfrm>
+            <a:off x="2583850" y="2126353"/>
+            <a:ext cx="728084" cy="3139321"/>
+          </a:xfrm>
+          <a:prstGeom prst="rect">
+            <a:avLst/>
+          </a:prstGeom>
+          <a:noFill/>
+        </p:spPr>
+        <p:txBody>
+          <a:bodyPr wrap="none" rtlCol="0">
+            <a:spAutoFit/>
+          </a:bodyPr>
+          <a:lstStyle/>
+          <a:p>
+            <a:r>
+              <a:rPr lang="sr-Latn-RS" sz="6600" dirty="0"/>
+              <a:t>H</a:t>
+            </a:r>
+          </a:p>
+          <a:p>
+            <a:r>
+              <a:rPr lang="sr-Latn-RS" sz="6600" dirty="0"/>
+              <a:t>H</a:t>
+            </a:r>
+          </a:p>
+          <a:p>
+            <a:r>
+              <a:rPr lang="sr-Latn-RS" sz="6600" dirty="0"/>
+              <a:t>U</a:t>
+            </a:r>
+            <a:endParaRPr lang="en-US" sz="6600" dirty="0"/>
+          </a:p>
+        </p:txBody>
+      </p:sp>
+      <p:sp>
+        <p:nvSpPr>
+          <p:cNvPr id="9" name="TextBox 8">
+            <a:extLst>
+              <a:ext uri="{FF2B5EF4-FFF2-40B4-BE49-F238E27FC236}">
+                <a16:creationId xmlns:a16="http://schemas.microsoft.com/office/drawing/2014/main" id="{81299FEF-36E3-4A8A-8D88-F72FD5009FC6}"/>
+              </a:ext>
+            </a:extLst>
+          </p:cNvPr>
+          <p:cNvSpPr txBox="1"/>
+          <p:nvPr/>
+        </p:nvSpPr>
+        <p:spPr>
+          <a:xfrm>
+            <a:off x="3828148" y="2126353"/>
+            <a:ext cx="623889" cy="2123658"/>
+          </a:xfrm>
+          <a:prstGeom prst="rect">
+            <a:avLst/>
+          </a:prstGeom>
+          <a:noFill/>
+        </p:spPr>
+        <p:txBody>
+          <a:bodyPr wrap="none" rtlCol="0">
+            <a:spAutoFit/>
+          </a:bodyPr>
+          <a:lstStyle/>
+          <a:p>
+            <a:r>
+              <a:rPr lang="sr-Latn-RS" sz="6600" dirty="0"/>
+              <a:t>K</a:t>
+            </a:r>
+          </a:p>
+          <a:p>
+            <a:r>
+              <a:rPr lang="sr-Latn-RS" sz="6600" dirty="0"/>
+              <a:t>K</a:t>
+            </a:r>
+            <a:endParaRPr lang="en-US" sz="6600" dirty="0"/>
+          </a:p>
+        </p:txBody>
+      </p:sp>
+      <p:sp>
+        <p:nvSpPr>
+          <p:cNvPr id="12" name="TextBox 11">
+            <a:extLst>
+              <a:ext uri="{FF2B5EF4-FFF2-40B4-BE49-F238E27FC236}">
+                <a16:creationId xmlns:a16="http://schemas.microsoft.com/office/drawing/2014/main" id="{CF5F8EAB-2990-4D9B-A460-5372F5F5AE04}"/>
+              </a:ext>
+            </a:extLst>
+          </p:cNvPr>
+          <p:cNvSpPr txBox="1"/>
+          <p:nvPr/>
+        </p:nvSpPr>
+        <p:spPr>
+          <a:xfrm>
+            <a:off x="5986763" y="3095849"/>
+            <a:ext cx="1146468" cy="923330"/>
+          </a:xfrm>
+          <a:prstGeom prst="rect">
+            <a:avLst/>
+          </a:prstGeom>
+          <a:noFill/>
+        </p:spPr>
+        <p:txBody>
+          <a:bodyPr wrap="none" rtlCol="0">
+            <a:spAutoFit/>
+          </a:bodyPr>
+          <a:lstStyle/>
+          <a:p>
+            <a:r>
+              <a:rPr lang="sr-Latn-RS" sz="5400" i="1" dirty="0"/>
+              <a:t>f(e)</a:t>
+            </a:r>
+            <a:endParaRPr lang="en-US" sz="5400" i="1" dirty="0"/>
+          </a:p>
+        </p:txBody>
+      </p:sp>
+      <p:sp>
+        <p:nvSpPr>
+          <p:cNvPr id="13" name="TextBox 12">
+            <a:extLst>
+              <a:ext uri="{FF2B5EF4-FFF2-40B4-BE49-F238E27FC236}">
+                <a16:creationId xmlns:a16="http://schemas.microsoft.com/office/drawing/2014/main" id="{AF01C1F2-4F17-4181-8EF8-EB0C2FAD3F92}"/>
+              </a:ext>
+            </a:extLst>
+          </p:cNvPr>
+          <p:cNvSpPr txBox="1"/>
+          <p:nvPr/>
+        </p:nvSpPr>
+        <p:spPr>
+          <a:xfrm>
+            <a:off x="8385425" y="2588018"/>
+            <a:ext cx="2445449" cy="1938992"/>
+          </a:xfrm>
+          <a:prstGeom prst="rect">
+            <a:avLst/>
+          </a:prstGeom>
+          <a:noFill/>
+        </p:spPr>
+        <p:txBody>
+          <a:bodyPr wrap="square" rtlCol="0">
+            <a:spAutoFit/>
+          </a:bodyPr>
+          <a:lstStyle/>
+          <a:p>
+            <a:pPr algn="ctr"/>
+            <a:r>
+              <a:rPr lang="sr-Cyrl-RS" sz="4000" dirty="0"/>
+              <a:t>излазна вредност итерације</a:t>
+            </a:r>
+            <a:endParaRPr lang="en-US" sz="4000" dirty="0"/>
+          </a:p>
+        </p:txBody>
+      </p:sp>
+      <p:cxnSp>
+        <p:nvCxnSpPr>
+          <p:cNvPr id="15" name="Straight Arrow Connector 14">
+            <a:extLst>
+              <a:ext uri="{FF2B5EF4-FFF2-40B4-BE49-F238E27FC236}">
+                <a16:creationId xmlns:a16="http://schemas.microsoft.com/office/drawing/2014/main" id="{A5B19B73-1E74-428F-8A7A-90DA99020103}"/>
+              </a:ext>
+            </a:extLst>
+          </p:cNvPr>
+          <p:cNvCxnSpPr>
+            <a:cxnSpLocks/>
+          </p:cNvCxnSpPr>
+          <p:nvPr/>
+        </p:nvCxnSpPr>
+        <p:spPr>
+          <a:xfrm>
+            <a:off x="4754316" y="3557514"/>
+            <a:ext cx="1117978" cy="1"/>
+          </a:xfrm>
+          <a:prstGeom prst="straightConnector1">
+            <a:avLst/>
+          </a:prstGeom>
+          <a:ln w="57150">
+            <a:solidFill>
+              <a:schemeClr val="tx1"/>
+            </a:solidFill>
+            <a:tailEnd type="triangle"/>
+          </a:ln>
+        </p:spPr>
+        <p:style>
+          <a:lnRef idx="1">
+            <a:schemeClr val="accent1"/>
+          </a:lnRef>
+          <a:fillRef idx="0">
+            <a:schemeClr val="accent1"/>
+          </a:fillRef>
+          <a:effectRef idx="0">
+            <a:schemeClr val="accent1"/>
+          </a:effectRef>
+          <a:fontRef idx="minor">
+            <a:schemeClr val="tx1"/>
+          </a:fontRef>
+        </p:style>
+      </p:cxnSp>
+      <p:cxnSp>
+        <p:nvCxnSpPr>
+          <p:cNvPr id="18" name="Straight Arrow Connector 17">
+            <a:extLst>
+              <a:ext uri="{FF2B5EF4-FFF2-40B4-BE49-F238E27FC236}">
+                <a16:creationId xmlns:a16="http://schemas.microsoft.com/office/drawing/2014/main" id="{6C2B0F94-6BCF-4AEE-AF81-3297F25E5E78}"/>
+              </a:ext>
+            </a:extLst>
+          </p:cNvPr>
+          <p:cNvCxnSpPr>
+            <a:cxnSpLocks/>
+          </p:cNvCxnSpPr>
+          <p:nvPr/>
+        </p:nvCxnSpPr>
+        <p:spPr>
+          <a:xfrm>
+            <a:off x="7271673" y="3557514"/>
+            <a:ext cx="1117978" cy="1"/>
+          </a:xfrm>
+          <a:prstGeom prst="straightConnector1">
+            <a:avLst/>
+          </a:prstGeom>
+          <a:ln w="57150">
+            <a:solidFill>
+              <a:schemeClr val="tx1"/>
+            </a:solidFill>
+            <a:tailEnd type="triangle"/>
+          </a:ln>
+        </p:spPr>
+        <p:style>
+          <a:lnRef idx="1">
+            <a:schemeClr val="accent1"/>
+          </a:lnRef>
+          <a:fillRef idx="0">
+            <a:schemeClr val="accent1"/>
+          </a:fillRef>
+          <a:effectRef idx="0">
+            <a:schemeClr val="accent1"/>
+          </a:effectRef>
+          <a:fontRef idx="minor">
+            <a:schemeClr val="tx1"/>
+          </a:fontRef>
+        </p:style>
+      </p:cxnSp>
+    </p:spTree>
+    <p:extLst>
+      <p:ext uri="{BB962C8B-B14F-4D97-AF65-F5344CB8AC3E}">
+        <p14:creationId xmlns:p14="http://schemas.microsoft.com/office/powerpoint/2010/main" val="3988833095"/>
+      </p:ext>
+    </p:extLst>
+  </p:cSld>
+  <p:clrMapOvr>
+    <a:masterClrMapping/>
+  </p:clrMapOvr>
+</p:sld>
+</file>
+
+<file path=ppt/slides/slide12.xml><?xml version="1.0" encoding="utf-8"?>
+<p:sld xmlns:a="http://schemas.openxmlformats.org/drawingml/2006/main" xmlns:r="http://schemas.openxmlformats.org/officeDocument/2006/relationships" xmlns:p="http://schemas.openxmlformats.org/presentationml/2006/main">
+  <p:cSld>
+    <p:spTree>
+      <p:nvGrpSpPr>
+        <p:cNvPr id="1" name=""/>
+        <p:cNvGrpSpPr/>
+        <p:nvPr/>
+      </p:nvGrpSpPr>
+      <p:grpSpPr>
+        <a:xfrm>
+          <a:off x="0" y="0"/>
+          <a:ext cx="0" cy="0"/>
+          <a:chOff x="0" y="0"/>
+          <a:chExt cx="0" cy="0"/>
+        </a:xfrm>
+      </p:grpSpPr>
+      <p:sp>
+        <p:nvSpPr>
+          <p:cNvPr id="2" name="Title 1">
+            <a:extLst>
+              <a:ext uri="{FF2B5EF4-FFF2-40B4-BE49-F238E27FC236}">
+                <a16:creationId xmlns:a16="http://schemas.microsoft.com/office/drawing/2014/main" id="{489732FA-D4BF-4606-9EAD-A9B1548B935C}"/>
+              </a:ext>
+            </a:extLst>
+          </p:cNvPr>
+          <p:cNvSpPr>
+            <a:spLocks noGrp="1"/>
+          </p:cNvSpPr>
+          <p:nvPr>
+            <p:ph type="title"/>
+          </p:nvPr>
+        </p:nvSpPr>
+        <p:spPr/>
+        <p:txBody>
+          <a:bodyPr/>
+          <a:lstStyle/>
+          <a:p>
+            <a:r>
+              <a:rPr lang="sr-Cyrl-RS" dirty="0"/>
+              <a:t>ЕВАЛУАЦИОНА ПУТАЊА</a:t>
+            </a:r>
+            <a:endParaRPr lang="en-US" dirty="0"/>
+          </a:p>
+        </p:txBody>
+      </p:sp>
+      <p:sp>
+        <p:nvSpPr>
+          <p:cNvPr id="3" name="Content Placeholder 2">
+            <a:extLst>
+              <a:ext uri="{FF2B5EF4-FFF2-40B4-BE49-F238E27FC236}">
+                <a16:creationId xmlns:a16="http://schemas.microsoft.com/office/drawing/2014/main" id="{AAF0476C-EFAB-4CF8-8DFC-92571FC0ADCE}"/>
+              </a:ext>
+            </a:extLst>
+          </p:cNvPr>
+          <p:cNvSpPr>
+            <a:spLocks noGrp="1"/>
+          </p:cNvSpPr>
+          <p:nvPr>
+            <p:ph idx="1"/>
+          </p:nvPr>
+        </p:nvSpPr>
+        <p:spPr>
+          <a:xfrm>
+            <a:off x="1097280" y="1845734"/>
+            <a:ext cx="10058400" cy="872299"/>
+          </a:xfrm>
+        </p:spPr>
+        <p:txBody>
+          <a:bodyPr>
+            <a:normAutofit/>
+          </a:bodyPr>
+          <a:lstStyle/>
+          <a:p>
+            <a:pPr>
+              <a:buFont typeface="Arial" panose="020B0604020202020204" pitchFamily="34" charset="0"/>
+              <a:buChar char="•"/>
+            </a:pPr>
+            <a:r>
+              <a:rPr lang="sr-Cyrl-RS" sz="2400" dirty="0"/>
+              <a:t>Дефинише које позиције у видљивом прозору се посматрају заједно приликом провере валидног обрасца.</a:t>
+            </a:r>
+            <a:endParaRPr lang="en-US" sz="2400" dirty="0"/>
+          </a:p>
+        </p:txBody>
+      </p:sp>
+      <p:sp>
+        <p:nvSpPr>
+          <p:cNvPr id="4" name="TextBox 3">
+            <a:extLst>
+              <a:ext uri="{FF2B5EF4-FFF2-40B4-BE49-F238E27FC236}">
+                <a16:creationId xmlns:a16="http://schemas.microsoft.com/office/drawing/2014/main" id="{DC62800E-1FFF-4799-9926-F4E49E1AB209}"/>
+              </a:ext>
+            </a:extLst>
+          </p:cNvPr>
+          <p:cNvSpPr txBox="1"/>
+          <p:nvPr/>
+        </p:nvSpPr>
+        <p:spPr>
+          <a:xfrm>
+            <a:off x="748478" y="3113393"/>
+            <a:ext cx="3900881" cy="2123658"/>
+          </a:xfrm>
+          <a:prstGeom prst="rect">
+            <a:avLst/>
+          </a:prstGeom>
+          <a:noFill/>
+        </p:spPr>
+        <p:txBody>
+          <a:bodyPr wrap="square" rtlCol="0">
+            <a:spAutoFit/>
+          </a:bodyPr>
+          <a:lstStyle/>
+          <a:p>
+            <a:r>
+              <a:rPr lang="sr-Latn-RS" sz="4400" dirty="0"/>
+              <a:t>[x]	 [  ]	  [  ]</a:t>
+            </a:r>
+          </a:p>
+          <a:p>
+            <a:r>
+              <a:rPr lang="sr-Latn-RS" sz="4400" dirty="0"/>
+              <a:t>[  ]	 [x]	  [  ]</a:t>
+            </a:r>
+          </a:p>
+          <a:p>
+            <a:r>
+              <a:rPr lang="sr-Latn-RS" sz="4400" dirty="0"/>
+              <a:t>[  ]	 [  ]	  [x]</a:t>
+            </a:r>
+            <a:endParaRPr lang="en-US" sz="4400" dirty="0"/>
+          </a:p>
+        </p:txBody>
+      </p:sp>
+      <p:sp>
+        <p:nvSpPr>
+          <p:cNvPr id="6" name="TextBox 5">
+            <a:extLst>
+              <a:ext uri="{FF2B5EF4-FFF2-40B4-BE49-F238E27FC236}">
+                <a16:creationId xmlns:a16="http://schemas.microsoft.com/office/drawing/2014/main" id="{462FD4A0-B7A2-4F92-A25A-816AA7222BD3}"/>
+              </a:ext>
+            </a:extLst>
+          </p:cNvPr>
+          <p:cNvSpPr txBox="1"/>
+          <p:nvPr/>
+        </p:nvSpPr>
+        <p:spPr>
+          <a:xfrm>
+            <a:off x="4946762" y="2944536"/>
+            <a:ext cx="718466" cy="2031325"/>
+          </a:xfrm>
+          <a:prstGeom prst="rect">
+            <a:avLst/>
+          </a:prstGeom>
+          <a:noFill/>
+        </p:spPr>
+        <p:txBody>
+          <a:bodyPr wrap="square" rtlCol="0">
+            <a:spAutoFit/>
+          </a:bodyPr>
+          <a:lstStyle/>
+          <a:p>
+            <a:r>
+              <a:rPr lang="sr-Latn-RS" sz="5400" dirty="0"/>
+              <a:t>B</a:t>
+            </a:r>
+          </a:p>
+          <a:p>
+            <a:r>
+              <a:rPr lang="sr-Latn-RS" sz="5400" dirty="0"/>
+              <a:t>G</a:t>
+            </a:r>
+          </a:p>
+          <a:p>
+            <a:endParaRPr lang="en-US" dirty="0"/>
+          </a:p>
+        </p:txBody>
+      </p:sp>
+      <p:pic>
+        <p:nvPicPr>
+          <p:cNvPr id="7" name="Picture 6">
+            <a:extLst>
+              <a:ext uri="{FF2B5EF4-FFF2-40B4-BE49-F238E27FC236}">
+                <a16:creationId xmlns:a16="http://schemas.microsoft.com/office/drawing/2014/main" id="{3EED3E0A-4CB7-41CE-ACBF-60D5498D1F43}"/>
+              </a:ext>
+            </a:extLst>
+          </p:cNvPr>
+          <p:cNvPicPr>
+            <a:picLocks noChangeAspect="1"/>
+          </p:cNvPicPr>
+          <p:nvPr/>
+        </p:nvPicPr>
+        <p:blipFill>
+          <a:blip r:embed="rId2"/>
+          <a:stretch>
+            <a:fillRect/>
+          </a:stretch>
+        </p:blipFill>
+        <p:spPr>
+          <a:xfrm>
+            <a:off x="4865324" y="4618761"/>
+            <a:ext cx="858116" cy="858116"/>
+          </a:xfrm>
+          <a:prstGeom prst="rect">
+            <a:avLst/>
+          </a:prstGeom>
+        </p:spPr>
+      </p:pic>
+      <p:sp>
+        <p:nvSpPr>
+          <p:cNvPr id="8" name="TextBox 7">
+            <a:extLst>
+              <a:ext uri="{FF2B5EF4-FFF2-40B4-BE49-F238E27FC236}">
+                <a16:creationId xmlns:a16="http://schemas.microsoft.com/office/drawing/2014/main" id="{E88DAF1B-CFBF-427F-A712-43674FB89467}"/>
+              </a:ext>
+            </a:extLst>
+          </p:cNvPr>
+          <p:cNvSpPr txBox="1"/>
+          <p:nvPr/>
+        </p:nvSpPr>
+        <p:spPr>
+          <a:xfrm>
+            <a:off x="5781651" y="2944536"/>
+            <a:ext cx="628698" cy="2585323"/>
+          </a:xfrm>
+          <a:prstGeom prst="rect">
+            <a:avLst/>
+          </a:prstGeom>
+          <a:noFill/>
+        </p:spPr>
+        <p:txBody>
+          <a:bodyPr wrap="none" rtlCol="0">
+            <a:spAutoFit/>
+          </a:bodyPr>
+          <a:lstStyle/>
+          <a:p>
+            <a:r>
+              <a:rPr lang="sr-Latn-RS" sz="5400" dirty="0"/>
+              <a:t>H</a:t>
+            </a:r>
+          </a:p>
+          <a:p>
+            <a:r>
+              <a:rPr lang="sr-Latn-RS" sz="5400" dirty="0"/>
+              <a:t>H</a:t>
+            </a:r>
+          </a:p>
+          <a:p>
+            <a:r>
+              <a:rPr lang="sr-Latn-RS" sz="5400" dirty="0"/>
+              <a:t>U</a:t>
+            </a:r>
+            <a:endParaRPr lang="en-US" sz="5400" dirty="0"/>
+          </a:p>
+        </p:txBody>
+      </p:sp>
+      <p:sp>
+        <p:nvSpPr>
+          <p:cNvPr id="9" name="TextBox 8">
+            <a:extLst>
+              <a:ext uri="{FF2B5EF4-FFF2-40B4-BE49-F238E27FC236}">
+                <a16:creationId xmlns:a16="http://schemas.microsoft.com/office/drawing/2014/main" id="{8AC59417-9599-49E7-B57B-C6F32ED94D53}"/>
+              </a:ext>
+            </a:extLst>
+          </p:cNvPr>
+          <p:cNvSpPr txBox="1"/>
+          <p:nvPr/>
+        </p:nvSpPr>
+        <p:spPr>
+          <a:xfrm>
+            <a:off x="6626314" y="2944536"/>
+            <a:ext cx="543739" cy="1754326"/>
+          </a:xfrm>
+          <a:prstGeom prst="rect">
+            <a:avLst/>
+          </a:prstGeom>
+          <a:noFill/>
+        </p:spPr>
+        <p:txBody>
+          <a:bodyPr wrap="none" rtlCol="0">
+            <a:spAutoFit/>
+          </a:bodyPr>
+          <a:lstStyle/>
+          <a:p>
+            <a:r>
+              <a:rPr lang="sr-Latn-RS" sz="5400" dirty="0"/>
+              <a:t>K</a:t>
+            </a:r>
+          </a:p>
+          <a:p>
+            <a:r>
+              <a:rPr lang="sr-Latn-RS" sz="5400" dirty="0"/>
+              <a:t>K</a:t>
+            </a:r>
+            <a:endParaRPr lang="en-US" sz="5400" dirty="0"/>
+          </a:p>
+        </p:txBody>
+      </p:sp>
+      <p:pic>
+        <p:nvPicPr>
+          <p:cNvPr id="10" name="Picture 9" descr="lemon - download free icon Classic Slot Machine Icons on Artage.io">
+            <a:extLst>
+              <a:ext uri="{FF2B5EF4-FFF2-40B4-BE49-F238E27FC236}">
+                <a16:creationId xmlns:a16="http://schemas.microsoft.com/office/drawing/2014/main" id="{44E2A907-4B6D-4D97-98DB-EEC35569FAFC}"/>
+              </a:ext>
+            </a:extLst>
+          </p:cNvPr>
+          <p:cNvPicPr>
+            <a:picLocks noChangeAspect="1" noChangeArrowheads="1"/>
+          </p:cNvPicPr>
+          <p:nvPr/>
+        </p:nvPicPr>
+        <p:blipFill>
+          <a:blip r:embed="rId3">
+            <a:extLst>
+              <a:ext uri="{28A0092B-C50C-407E-A947-70E740481C1C}">
+                <a14:useLocalDpi xmlns:a14="http://schemas.microsoft.com/office/drawing/2010/main" val="0"/>
+              </a:ext>
+            </a:extLst>
+          </a:blip>
+          <a:srcRect/>
+          <a:stretch>
+            <a:fillRect/>
+          </a:stretch>
+        </p:blipFill>
+        <p:spPr bwMode="auto">
+          <a:xfrm>
+            <a:off x="6626314" y="4698862"/>
+            <a:ext cx="620837" cy="620837"/>
+          </a:xfrm>
+          <a:prstGeom prst="rect">
+            <a:avLst/>
+          </a:prstGeom>
+          <a:noFill/>
+          <a:extLst>
+            <a:ext uri="{909E8E84-426E-40DD-AFC4-6F175D3DCCD1}">
+              <a14:hiddenFill xmlns:a14="http://schemas.microsoft.com/office/drawing/2010/main">
+                <a:solidFill>
+                  <a:srgbClr val="FFFFFF"/>
+                </a:solidFill>
+              </a14:hiddenFill>
+            </a:ext>
+          </a:extLst>
+        </p:spPr>
+      </p:pic>
+      <p:sp>
+        <p:nvSpPr>
+          <p:cNvPr id="11" name="Rectangle 10">
+            <a:extLst>
+              <a:ext uri="{FF2B5EF4-FFF2-40B4-BE49-F238E27FC236}">
+                <a16:creationId xmlns:a16="http://schemas.microsoft.com/office/drawing/2014/main" id="{67C168D7-E53A-43E6-9243-1F3812AB470B}"/>
+              </a:ext>
+            </a:extLst>
+          </p:cNvPr>
+          <p:cNvSpPr/>
+          <p:nvPr/>
+        </p:nvSpPr>
+        <p:spPr>
+          <a:xfrm>
+            <a:off x="4944674" y="3113393"/>
+            <a:ext cx="621012" cy="651167"/>
+          </a:xfrm>
+          <a:prstGeom prst="rect">
+            <a:avLst/>
+          </a:prstGeom>
+          <a:noFill/>
+          <a:ln>
+            <a:solidFill>
+              <a:srgbClr val="C00000"/>
+            </a:solidFill>
+          </a:ln>
+        </p:spPr>
+        <p:style>
+          <a:lnRef idx="2">
+            <a:schemeClr val="accent1">
+              <a:shade val="50000"/>
+            </a:schemeClr>
+          </a:lnRef>
+          <a:fillRef idx="1">
+            <a:schemeClr val="accent1"/>
+          </a:fillRef>
+          <a:effectRef idx="0">
+            <a:schemeClr val="accent1"/>
+          </a:effectRef>
+          <a:fontRef idx="minor">
+            <a:schemeClr val="lt1"/>
+          </a:fontRef>
+        </p:style>
+        <p:txBody>
+          <a:bodyPr rtlCol="0" anchor="ctr"/>
+          <a:lstStyle/>
+          <a:p>
+            <a:pPr algn="ctr"/>
+            <a:endParaRPr lang="en-US" dirty="0"/>
+          </a:p>
+        </p:txBody>
+      </p:sp>
+      <p:sp>
+        <p:nvSpPr>
+          <p:cNvPr id="13" name="Rectangle 12">
+            <a:extLst>
+              <a:ext uri="{FF2B5EF4-FFF2-40B4-BE49-F238E27FC236}">
+                <a16:creationId xmlns:a16="http://schemas.microsoft.com/office/drawing/2014/main" id="{221C23E5-0DC3-472D-9DBC-AC308A968E2E}"/>
+              </a:ext>
+            </a:extLst>
+          </p:cNvPr>
+          <p:cNvSpPr/>
+          <p:nvPr/>
+        </p:nvSpPr>
+        <p:spPr>
+          <a:xfrm>
+            <a:off x="5785494" y="3911613"/>
+            <a:ext cx="621012" cy="651167"/>
+          </a:xfrm>
+          <a:prstGeom prst="rect">
+            <a:avLst/>
+          </a:prstGeom>
+          <a:noFill/>
+          <a:ln>
+            <a:solidFill>
+              <a:srgbClr val="C00000"/>
+            </a:solidFill>
+          </a:ln>
+        </p:spPr>
+        <p:style>
+          <a:lnRef idx="2">
+            <a:schemeClr val="accent1">
+              <a:shade val="50000"/>
+            </a:schemeClr>
+          </a:lnRef>
+          <a:fillRef idx="1">
+            <a:schemeClr val="accent1"/>
+          </a:fillRef>
+          <a:effectRef idx="0">
+            <a:schemeClr val="accent1"/>
+          </a:effectRef>
+          <a:fontRef idx="minor">
+            <a:schemeClr val="lt1"/>
+          </a:fontRef>
+        </p:style>
+        <p:txBody>
+          <a:bodyPr rtlCol="0" anchor="ctr"/>
+          <a:lstStyle/>
+          <a:p>
+            <a:pPr algn="ctr"/>
+            <a:endParaRPr lang="en-US" dirty="0"/>
+          </a:p>
+        </p:txBody>
+      </p:sp>
+      <p:sp>
+        <p:nvSpPr>
+          <p:cNvPr id="14" name="Rectangle 13">
+            <a:extLst>
+              <a:ext uri="{FF2B5EF4-FFF2-40B4-BE49-F238E27FC236}">
+                <a16:creationId xmlns:a16="http://schemas.microsoft.com/office/drawing/2014/main" id="{F86016AF-4C27-4A1D-9FAE-61A427DA468E}"/>
+              </a:ext>
+            </a:extLst>
+          </p:cNvPr>
+          <p:cNvSpPr/>
+          <p:nvPr/>
+        </p:nvSpPr>
+        <p:spPr>
+          <a:xfrm>
+            <a:off x="6635353" y="4683696"/>
+            <a:ext cx="621012" cy="651167"/>
+          </a:xfrm>
+          <a:prstGeom prst="rect">
+            <a:avLst/>
+          </a:prstGeom>
+          <a:noFill/>
+          <a:ln>
+            <a:solidFill>
+              <a:srgbClr val="C00000"/>
+            </a:solidFill>
+          </a:ln>
+        </p:spPr>
+        <p:style>
+          <a:lnRef idx="2">
+            <a:schemeClr val="accent1">
+              <a:shade val="50000"/>
+            </a:schemeClr>
+          </a:lnRef>
+          <a:fillRef idx="1">
+            <a:schemeClr val="accent1"/>
+          </a:fillRef>
+          <a:effectRef idx="0">
+            <a:schemeClr val="accent1"/>
+          </a:effectRef>
+          <a:fontRef idx="minor">
+            <a:schemeClr val="lt1"/>
+          </a:fontRef>
+        </p:style>
+        <p:txBody>
+          <a:bodyPr rtlCol="0" anchor="ctr"/>
+          <a:lstStyle/>
+          <a:p>
+            <a:pPr algn="ctr"/>
+            <a:endParaRPr lang="en-US" dirty="0"/>
+          </a:p>
+        </p:txBody>
+      </p:sp>
+      <p:cxnSp>
+        <p:nvCxnSpPr>
+          <p:cNvPr id="15" name="Straight Arrow Connector 14">
+            <a:extLst>
+              <a:ext uri="{FF2B5EF4-FFF2-40B4-BE49-F238E27FC236}">
+                <a16:creationId xmlns:a16="http://schemas.microsoft.com/office/drawing/2014/main" id="{B0606BEA-2617-4CF8-94C6-659B4A080E8B}"/>
+              </a:ext>
+            </a:extLst>
+          </p:cNvPr>
+          <p:cNvCxnSpPr>
+            <a:cxnSpLocks/>
+          </p:cNvCxnSpPr>
+          <p:nvPr/>
+        </p:nvCxnSpPr>
+        <p:spPr>
+          <a:xfrm>
+            <a:off x="3869503" y="4172726"/>
+            <a:ext cx="861294" cy="1"/>
+          </a:xfrm>
+          <a:prstGeom prst="straightConnector1">
+            <a:avLst/>
+          </a:prstGeom>
+          <a:ln w="57150">
+            <a:solidFill>
+              <a:schemeClr val="tx1"/>
+            </a:solidFill>
+            <a:tailEnd type="triangle"/>
+          </a:ln>
+        </p:spPr>
+        <p:style>
+          <a:lnRef idx="1">
+            <a:schemeClr val="accent1"/>
+          </a:lnRef>
+          <a:fillRef idx="0">
+            <a:schemeClr val="accent1"/>
+          </a:fillRef>
+          <a:effectRef idx="0">
+            <a:schemeClr val="accent1"/>
+          </a:effectRef>
+          <a:fontRef idx="minor">
+            <a:schemeClr val="tx1"/>
+          </a:fontRef>
+        </p:style>
+      </p:cxnSp>
+      <p:cxnSp>
+        <p:nvCxnSpPr>
+          <p:cNvPr id="17" name="Straight Arrow Connector 16">
+            <a:extLst>
+              <a:ext uri="{FF2B5EF4-FFF2-40B4-BE49-F238E27FC236}">
+                <a16:creationId xmlns:a16="http://schemas.microsoft.com/office/drawing/2014/main" id="{74467193-7675-4084-883C-DA685EB4B715}"/>
+              </a:ext>
+            </a:extLst>
+          </p:cNvPr>
+          <p:cNvCxnSpPr>
+            <a:cxnSpLocks/>
+          </p:cNvCxnSpPr>
+          <p:nvPr/>
+        </p:nvCxnSpPr>
+        <p:spPr>
+          <a:xfrm>
+            <a:off x="7581406" y="4184513"/>
+            <a:ext cx="866308" cy="1"/>
+          </a:xfrm>
+          <a:prstGeom prst="straightConnector1">
+            <a:avLst/>
+          </a:prstGeom>
+          <a:ln w="57150">
+            <a:solidFill>
+              <a:schemeClr val="tx1"/>
+            </a:solidFill>
+            <a:tailEnd type="triangle"/>
+          </a:ln>
+        </p:spPr>
+        <p:style>
+          <a:lnRef idx="1">
+            <a:schemeClr val="accent1"/>
+          </a:lnRef>
+          <a:fillRef idx="0">
+            <a:schemeClr val="accent1"/>
+          </a:fillRef>
+          <a:effectRef idx="0">
+            <a:schemeClr val="accent1"/>
+          </a:effectRef>
+          <a:fontRef idx="minor">
+            <a:schemeClr val="tx1"/>
+          </a:fontRef>
+        </p:style>
+      </p:cxnSp>
+      <p:sp>
+        <p:nvSpPr>
+          <p:cNvPr id="19" name="TextBox 18">
+            <a:extLst>
+              <a:ext uri="{FF2B5EF4-FFF2-40B4-BE49-F238E27FC236}">
+                <a16:creationId xmlns:a16="http://schemas.microsoft.com/office/drawing/2014/main" id="{7C73FCD2-0010-4998-B3EB-389EB367242A}"/>
+              </a:ext>
+            </a:extLst>
+          </p:cNvPr>
+          <p:cNvSpPr txBox="1"/>
+          <p:nvPr/>
+        </p:nvSpPr>
+        <p:spPr>
+          <a:xfrm>
+            <a:off x="9102055" y="3695431"/>
+            <a:ext cx="1306768" cy="923330"/>
+          </a:xfrm>
+          <a:prstGeom prst="rect">
+            <a:avLst/>
+          </a:prstGeom>
+          <a:noFill/>
+        </p:spPr>
+        <p:txBody>
+          <a:bodyPr wrap="none" rtlCol="0">
+            <a:spAutoFit/>
+          </a:bodyPr>
+          <a:lstStyle/>
+          <a:p>
+            <a:r>
+              <a:rPr lang="sr-Latn-RS" sz="5400" dirty="0"/>
+              <a:t>B H </a:t>
+            </a:r>
+            <a:endParaRPr lang="en-US" sz="5400" dirty="0"/>
+          </a:p>
+        </p:txBody>
+      </p:sp>
+      <p:pic>
+        <p:nvPicPr>
+          <p:cNvPr id="20" name="Picture 19" descr="lemon - download free icon Classic Slot Machine Icons on Artage.io">
+            <a:extLst>
+              <a:ext uri="{FF2B5EF4-FFF2-40B4-BE49-F238E27FC236}">
+                <a16:creationId xmlns:a16="http://schemas.microsoft.com/office/drawing/2014/main" id="{D253F9A0-F975-4C0A-94E8-21ADAAA3A9F1}"/>
+              </a:ext>
+            </a:extLst>
+          </p:cNvPr>
+          <p:cNvPicPr>
+            <a:picLocks noChangeAspect="1" noChangeArrowheads="1"/>
+          </p:cNvPicPr>
+          <p:nvPr/>
+        </p:nvPicPr>
+        <p:blipFill>
+          <a:blip r:embed="rId3">
+            <a:extLst>
+              <a:ext uri="{28A0092B-C50C-407E-A947-70E740481C1C}">
+                <a14:useLocalDpi xmlns:a14="http://schemas.microsoft.com/office/drawing/2010/main" val="0"/>
+              </a:ext>
+            </a:extLst>
+          </a:blip>
+          <a:srcRect/>
+          <a:stretch>
+            <a:fillRect/>
+          </a:stretch>
+        </p:blipFill>
+        <p:spPr bwMode="auto">
+          <a:xfrm>
+            <a:off x="10226589" y="3871656"/>
+            <a:ext cx="620837" cy="620837"/>
+          </a:xfrm>
+          <a:prstGeom prst="rect">
+            <a:avLst/>
+          </a:prstGeom>
+          <a:noFill/>
+          <a:extLst>
+            <a:ext uri="{909E8E84-426E-40DD-AFC4-6F175D3DCCD1}">
+              <a14:hiddenFill xmlns:a14="http://schemas.microsoft.com/office/drawing/2010/main">
+                <a:solidFill>
+                  <a:srgbClr val="FFFFFF"/>
+                </a:solidFill>
+              </a14:hiddenFill>
+            </a:ext>
+          </a:extLst>
+        </p:spPr>
+      </p:pic>
+      <p:sp>
+        <p:nvSpPr>
+          <p:cNvPr id="21" name="TextBox 20">
+            <a:extLst>
+              <a:ext uri="{FF2B5EF4-FFF2-40B4-BE49-F238E27FC236}">
+                <a16:creationId xmlns:a16="http://schemas.microsoft.com/office/drawing/2014/main" id="{CF055770-0A84-499A-B67C-B6DD6688E0FB}"/>
+              </a:ext>
+            </a:extLst>
+          </p:cNvPr>
+          <p:cNvSpPr txBox="1"/>
+          <p:nvPr/>
+        </p:nvSpPr>
+        <p:spPr>
+          <a:xfrm>
+            <a:off x="9297377" y="4724653"/>
+            <a:ext cx="1508341" cy="646331"/>
+          </a:xfrm>
+          <a:prstGeom prst="rect">
+            <a:avLst/>
+          </a:prstGeom>
+          <a:noFill/>
+        </p:spPr>
+        <p:txBody>
+          <a:bodyPr wrap="square" rtlCol="0">
+            <a:spAutoFit/>
+          </a:bodyPr>
+          <a:lstStyle/>
+          <a:p>
+            <a:pPr algn="ctr"/>
+            <a:r>
+              <a:rPr lang="sr-Cyrl-RS" dirty="0"/>
+              <a:t>евалуациона секвенца</a:t>
+            </a:r>
+            <a:endParaRPr lang="en-US" dirty="0"/>
+          </a:p>
+        </p:txBody>
+      </p:sp>
+    </p:spTree>
+    <p:extLst>
+      <p:ext uri="{BB962C8B-B14F-4D97-AF65-F5344CB8AC3E}">
+        <p14:creationId xmlns:p14="http://schemas.microsoft.com/office/powerpoint/2010/main" val="2763947369"/>
+      </p:ext>
+    </p:extLst>
+  </p:cSld>
+  <p:clrMapOvr>
+    <a:masterClrMapping/>
+  </p:clrMapOvr>
+</p:sld>
+</file>
+
+<file path=ppt/slides/slide13.xml><?xml version="1.0" encoding="utf-8"?>
+<p:sld xmlns:a="http://schemas.openxmlformats.org/drawingml/2006/main" xmlns:r="http://schemas.openxmlformats.org/officeDocument/2006/relationships" xmlns:p="http://schemas.openxmlformats.org/presentationml/2006/main">
+  <p:cSld>
+    <p:spTree>
+      <p:nvGrpSpPr>
+        <p:cNvPr id="1" name=""/>
+        <p:cNvGrpSpPr/>
+        <p:nvPr/>
+      </p:nvGrpSpPr>
+      <p:grpSpPr>
+        <a:xfrm>
+          <a:off x="0" y="0"/>
+          <a:ext cx="0" cy="0"/>
+          <a:chOff x="0" y="0"/>
+          <a:chExt cx="0" cy="0"/>
+        </a:xfrm>
+      </p:grpSpPr>
+      <p:sp>
+        <p:nvSpPr>
+          <p:cNvPr id="2" name="Title 1">
+            <a:extLst>
+              <a:ext uri="{FF2B5EF4-FFF2-40B4-BE49-F238E27FC236}">
+                <a16:creationId xmlns:a16="http://schemas.microsoft.com/office/drawing/2014/main" id="{50FB0FBB-5A4C-4BAE-B12A-5F7343E4B49D}"/>
+              </a:ext>
+            </a:extLst>
+          </p:cNvPr>
+          <p:cNvSpPr>
+            <a:spLocks noGrp="1"/>
+          </p:cNvSpPr>
+          <p:nvPr>
+            <p:ph type="title"/>
+          </p:nvPr>
+        </p:nvSpPr>
+        <p:spPr/>
+        <p:txBody>
+          <a:bodyPr/>
+          <a:lstStyle/>
+          <a:p>
+            <a:r>
+              <a:rPr lang="sr-Cyrl-RS" dirty="0"/>
+              <a:t>ЕВАЛУАЦИОНА ПУТАЊА</a:t>
+            </a:r>
+            <a:endParaRPr lang="en-US" dirty="0"/>
+          </a:p>
+        </p:txBody>
+      </p:sp>
+      <p:sp>
+        <p:nvSpPr>
+          <p:cNvPr id="3" name="Content Placeholder 2">
+            <a:extLst>
+              <a:ext uri="{FF2B5EF4-FFF2-40B4-BE49-F238E27FC236}">
+                <a16:creationId xmlns:a16="http://schemas.microsoft.com/office/drawing/2014/main" id="{AE513D87-2B29-451C-BEE1-D391D2D3A6B8}"/>
+              </a:ext>
+            </a:extLst>
+          </p:cNvPr>
+          <p:cNvSpPr>
+            <a:spLocks noGrp="1"/>
+          </p:cNvSpPr>
+          <p:nvPr>
+            <p:ph idx="1"/>
+          </p:nvPr>
+        </p:nvSpPr>
+        <p:spPr/>
+        <p:txBody>
+          <a:bodyPr/>
+          <a:lstStyle/>
+          <a:p>
+            <a:endParaRPr lang="en-US"/>
+          </a:p>
+        </p:txBody>
+      </p:sp>
+      <p:pic>
+        <p:nvPicPr>
+          <p:cNvPr id="5" name="Picture 4">
+            <a:extLst>
+              <a:ext uri="{FF2B5EF4-FFF2-40B4-BE49-F238E27FC236}">
+                <a16:creationId xmlns:a16="http://schemas.microsoft.com/office/drawing/2014/main" id="{CC892B82-5F46-455A-A7B0-78D2EE6D1A00}"/>
+              </a:ext>
+            </a:extLst>
+          </p:cNvPr>
+          <p:cNvPicPr>
+            <a:picLocks noChangeAspect="1"/>
+          </p:cNvPicPr>
+          <p:nvPr/>
+        </p:nvPicPr>
+        <p:blipFill>
+          <a:blip r:embed="rId2"/>
+          <a:stretch>
+            <a:fillRect/>
+          </a:stretch>
+        </p:blipFill>
+        <p:spPr>
+          <a:xfrm>
+            <a:off x="1723415" y="1947168"/>
+            <a:ext cx="8745170" cy="4305901"/>
+          </a:xfrm>
+          <a:prstGeom prst="rect">
+            <a:avLst/>
+          </a:prstGeom>
+        </p:spPr>
+      </p:pic>
+    </p:spTree>
+    <p:extLst>
+      <p:ext uri="{BB962C8B-B14F-4D97-AF65-F5344CB8AC3E}">
+        <p14:creationId xmlns:p14="http://schemas.microsoft.com/office/powerpoint/2010/main" val="2057998374"/>
+      </p:ext>
+    </p:extLst>
+  </p:cSld>
+  <p:clrMapOvr>
+    <a:masterClrMapping/>
+  </p:clrMapOvr>
+</p:sld>
+</file>
+
+<file path=ppt/slides/slide14.xml><?xml version="1.0" encoding="utf-8"?>
+<p:sld xmlns:a="http://schemas.openxmlformats.org/drawingml/2006/main" xmlns:r="http://schemas.openxmlformats.org/officeDocument/2006/relationships" xmlns:p="http://schemas.openxmlformats.org/presentationml/2006/main">
+  <p:cSld>
+    <p:spTree>
+      <p:nvGrpSpPr>
+        <p:cNvPr id="1" name=""/>
+        <p:cNvGrpSpPr/>
+        <p:nvPr/>
+      </p:nvGrpSpPr>
+      <p:grpSpPr>
+        <a:xfrm>
+          <a:off x="0" y="0"/>
+          <a:ext cx="0" cy="0"/>
+          <a:chOff x="0" y="0"/>
+          <a:chExt cx="0" cy="0"/>
+        </a:xfrm>
+      </p:grpSpPr>
+      <p:sp>
+        <p:nvSpPr>
+          <p:cNvPr id="2" name="Title 1">
+            <a:extLst>
+              <a:ext uri="{FF2B5EF4-FFF2-40B4-BE49-F238E27FC236}">
+                <a16:creationId xmlns:a16="http://schemas.microsoft.com/office/drawing/2014/main" id="{4E5CB5EE-E7D3-4CE0-8B47-573AF831DDC7}"/>
+              </a:ext>
+            </a:extLst>
+          </p:cNvPr>
+          <p:cNvSpPr>
+            <a:spLocks noGrp="1"/>
+          </p:cNvSpPr>
+          <p:nvPr>
+            <p:ph type="title"/>
+          </p:nvPr>
+        </p:nvSpPr>
+        <p:spPr/>
+        <p:txBody>
+          <a:bodyPr/>
+          <a:lstStyle/>
+          <a:p>
+            <a:r>
+              <a:rPr lang="sr-Cyrl-RS" dirty="0"/>
+              <a:t>УНИВЕРЗАЛНИ ЗАМЕНСКИ ТОКЕН</a:t>
+            </a:r>
+            <a:endParaRPr lang="en-US" dirty="0"/>
+          </a:p>
+        </p:txBody>
+      </p:sp>
+      <p:sp>
+        <p:nvSpPr>
+          <p:cNvPr id="3" name="Content Placeholder 2">
+            <a:extLst>
+              <a:ext uri="{FF2B5EF4-FFF2-40B4-BE49-F238E27FC236}">
+                <a16:creationId xmlns:a16="http://schemas.microsoft.com/office/drawing/2014/main" id="{61697CE9-F238-4314-AC24-13983547B391}"/>
+              </a:ext>
+            </a:extLst>
+          </p:cNvPr>
+          <p:cNvSpPr>
+            <a:spLocks noGrp="1"/>
+          </p:cNvSpPr>
+          <p:nvPr>
+            <p:ph idx="1"/>
+          </p:nvPr>
+        </p:nvSpPr>
+        <p:spPr>
+          <a:xfrm>
+            <a:off x="1097280" y="1845734"/>
+            <a:ext cx="10058400" cy="813576"/>
+          </a:xfrm>
+        </p:spPr>
+        <p:txBody>
+          <a:bodyPr>
+            <a:normAutofit/>
+          </a:bodyPr>
+          <a:lstStyle/>
+          <a:p>
+            <a:pPr>
+              <a:buFont typeface="Arial" panose="020B0604020202020204" pitchFamily="34" charset="0"/>
+              <a:buChar char="•"/>
+            </a:pPr>
+            <a:r>
+              <a:rPr lang="sr-Cyrl-RS" sz="2400" dirty="0"/>
+              <a:t>Специјални токен азбуке који при евалуацији може „глумити“ било који други токен.</a:t>
+            </a:r>
+            <a:endParaRPr lang="en-US" sz="2400" dirty="0"/>
+          </a:p>
+        </p:txBody>
+      </p:sp>
+      <p:sp>
+        <p:nvSpPr>
+          <p:cNvPr id="4" name="TextBox 3">
+            <a:extLst>
+              <a:ext uri="{FF2B5EF4-FFF2-40B4-BE49-F238E27FC236}">
+                <a16:creationId xmlns:a16="http://schemas.microsoft.com/office/drawing/2014/main" id="{A7359CA4-DD44-4932-B6D2-6E82DFA19A32}"/>
+              </a:ext>
+            </a:extLst>
+          </p:cNvPr>
+          <p:cNvSpPr txBox="1"/>
+          <p:nvPr/>
+        </p:nvSpPr>
+        <p:spPr>
+          <a:xfrm>
+            <a:off x="1627465" y="3605169"/>
+            <a:ext cx="3142207" cy="923330"/>
+          </a:xfrm>
+          <a:prstGeom prst="rect">
+            <a:avLst/>
+          </a:prstGeom>
+          <a:noFill/>
+        </p:spPr>
+        <p:txBody>
+          <a:bodyPr wrap="none" rtlCol="0">
+            <a:spAutoFit/>
+          </a:bodyPr>
+          <a:lstStyle/>
+          <a:p>
+            <a:r>
+              <a:rPr lang="sr-Cyrl-RS" sz="5400" dirty="0"/>
+              <a:t>А </a:t>
+            </a:r>
+            <a:r>
+              <a:rPr lang="sr-Latn-RS" sz="5400" i="1" dirty="0">
+                <a:solidFill>
+                  <a:srgbClr val="FF0000"/>
+                </a:solidFill>
+              </a:rPr>
+              <a:t>W</a:t>
+            </a:r>
+            <a:r>
+              <a:rPr lang="sr-Latn-RS" sz="5400" i="1" dirty="0"/>
+              <a:t> </a:t>
+            </a:r>
+            <a:r>
+              <a:rPr lang="sr-Latn-RS" sz="5400" dirty="0"/>
+              <a:t>A B B</a:t>
+            </a:r>
+            <a:r>
+              <a:rPr lang="sr-Latn-RS" sz="5400" i="1" dirty="0"/>
+              <a:t> </a:t>
+            </a:r>
+            <a:endParaRPr lang="en-US" sz="5400" dirty="0"/>
+          </a:p>
+        </p:txBody>
+      </p:sp>
+      <p:sp>
+        <p:nvSpPr>
+          <p:cNvPr id="5" name="TextBox 4">
+            <a:extLst>
+              <a:ext uri="{FF2B5EF4-FFF2-40B4-BE49-F238E27FC236}">
+                <a16:creationId xmlns:a16="http://schemas.microsoft.com/office/drawing/2014/main" id="{5E25CB5D-A82C-421E-A738-7AD852D044B1}"/>
+              </a:ext>
+            </a:extLst>
+          </p:cNvPr>
+          <p:cNvSpPr txBox="1"/>
+          <p:nvPr/>
+        </p:nvSpPr>
+        <p:spPr>
+          <a:xfrm>
+            <a:off x="10702674" y="868217"/>
+            <a:ext cx="906011" cy="923330"/>
+          </a:xfrm>
+          <a:prstGeom prst="rect">
+            <a:avLst/>
+          </a:prstGeom>
+          <a:noFill/>
+        </p:spPr>
+        <p:txBody>
+          <a:bodyPr wrap="square" rtlCol="0">
+            <a:spAutoFit/>
+          </a:bodyPr>
+          <a:lstStyle/>
+          <a:p>
+            <a:r>
+              <a:rPr lang="sr-Latn-RS" sz="5400" i="1" dirty="0">
+                <a:solidFill>
+                  <a:srgbClr val="FF0000"/>
+                </a:solidFill>
+              </a:rPr>
+              <a:t>W</a:t>
+            </a:r>
+            <a:endParaRPr lang="en-US" sz="5400" i="1" dirty="0">
+              <a:solidFill>
+                <a:srgbClr val="FF0000"/>
+              </a:solidFill>
+            </a:endParaRPr>
+          </a:p>
+        </p:txBody>
+      </p:sp>
+      <p:cxnSp>
+        <p:nvCxnSpPr>
+          <p:cNvPr id="6" name="Straight Arrow Connector 5">
+            <a:extLst>
+              <a:ext uri="{FF2B5EF4-FFF2-40B4-BE49-F238E27FC236}">
+                <a16:creationId xmlns:a16="http://schemas.microsoft.com/office/drawing/2014/main" id="{2AD7334A-BB60-4A17-A877-0561C603F5B2}"/>
+              </a:ext>
+            </a:extLst>
+          </p:cNvPr>
+          <p:cNvCxnSpPr>
+            <a:cxnSpLocks/>
+          </p:cNvCxnSpPr>
+          <p:nvPr/>
+        </p:nvCxnSpPr>
+        <p:spPr>
+          <a:xfrm>
+            <a:off x="5335399" y="4066834"/>
+            <a:ext cx="1568741" cy="0"/>
+          </a:xfrm>
+          <a:prstGeom prst="straightConnector1">
+            <a:avLst/>
+          </a:prstGeom>
+          <a:ln w="57150">
+            <a:solidFill>
+              <a:schemeClr val="tx1"/>
+            </a:solidFill>
+            <a:tailEnd type="triangle"/>
+          </a:ln>
+        </p:spPr>
+        <p:style>
+          <a:lnRef idx="1">
+            <a:schemeClr val="accent1"/>
+          </a:lnRef>
+          <a:fillRef idx="0">
+            <a:schemeClr val="accent1"/>
+          </a:fillRef>
+          <a:effectRef idx="0">
+            <a:schemeClr val="accent1"/>
+          </a:effectRef>
+          <a:fontRef idx="minor">
+            <a:schemeClr val="tx1"/>
+          </a:fontRef>
+        </p:style>
+      </p:cxnSp>
+      <p:sp>
+        <p:nvSpPr>
+          <p:cNvPr id="9" name="TextBox 8">
+            <a:extLst>
+              <a:ext uri="{FF2B5EF4-FFF2-40B4-BE49-F238E27FC236}">
+                <a16:creationId xmlns:a16="http://schemas.microsoft.com/office/drawing/2014/main" id="{54A74F80-E9BE-4B07-A67F-4784E2F5A6D9}"/>
+              </a:ext>
+            </a:extLst>
+          </p:cNvPr>
+          <p:cNvSpPr txBox="1"/>
+          <p:nvPr/>
+        </p:nvSpPr>
+        <p:spPr>
+          <a:xfrm>
+            <a:off x="7469867" y="3605169"/>
+            <a:ext cx="2925801" cy="923330"/>
+          </a:xfrm>
+          <a:prstGeom prst="rect">
+            <a:avLst/>
+          </a:prstGeom>
+          <a:noFill/>
+        </p:spPr>
+        <p:txBody>
+          <a:bodyPr wrap="none" rtlCol="0">
+            <a:spAutoFit/>
+          </a:bodyPr>
+          <a:lstStyle/>
+          <a:p>
+            <a:r>
+              <a:rPr lang="sr-Cyrl-RS" sz="5400" dirty="0"/>
+              <a:t>А </a:t>
+            </a:r>
+            <a:r>
+              <a:rPr lang="sr-Latn-RS" sz="5400" dirty="0">
+                <a:solidFill>
+                  <a:srgbClr val="FF0000"/>
+                </a:solidFill>
+              </a:rPr>
+              <a:t>A</a:t>
+            </a:r>
+            <a:r>
+              <a:rPr lang="sr-Latn-RS" sz="5400" i="1" dirty="0"/>
+              <a:t> </a:t>
+            </a:r>
+            <a:r>
+              <a:rPr lang="sr-Latn-RS" sz="5400" dirty="0"/>
+              <a:t>A B B</a:t>
+            </a:r>
+            <a:r>
+              <a:rPr lang="sr-Latn-RS" sz="5400" i="1" dirty="0"/>
+              <a:t> </a:t>
+            </a:r>
+            <a:endParaRPr lang="en-US" sz="5400" dirty="0"/>
+          </a:p>
+        </p:txBody>
+      </p:sp>
+      <p:sp>
+        <p:nvSpPr>
+          <p:cNvPr id="10" name="TextBox 9">
+            <a:extLst>
+              <a:ext uri="{FF2B5EF4-FFF2-40B4-BE49-F238E27FC236}">
+                <a16:creationId xmlns:a16="http://schemas.microsoft.com/office/drawing/2014/main" id="{351B65E2-4004-4E19-9F0E-8C81F56BB2F9}"/>
+              </a:ext>
+            </a:extLst>
+          </p:cNvPr>
+          <p:cNvSpPr txBox="1"/>
+          <p:nvPr/>
+        </p:nvSpPr>
+        <p:spPr>
+          <a:xfrm>
+            <a:off x="7826928" y="4672668"/>
+            <a:ext cx="1990032" cy="369332"/>
+          </a:xfrm>
+          <a:prstGeom prst="rect">
+            <a:avLst/>
+          </a:prstGeom>
+          <a:noFill/>
+        </p:spPr>
+        <p:txBody>
+          <a:bodyPr wrap="none" rtlCol="0">
+            <a:spAutoFit/>
+          </a:bodyPr>
+          <a:lstStyle/>
+          <a:p>
+            <a:r>
+              <a:rPr lang="sr-Cyrl-RS" dirty="0"/>
+              <a:t>префикс дужине 3</a:t>
+            </a:r>
+            <a:endParaRPr lang="en-US" dirty="0"/>
+          </a:p>
+        </p:txBody>
+      </p:sp>
+      <p:sp>
+        <p:nvSpPr>
+          <p:cNvPr id="11" name="TextBox 10">
+            <a:extLst>
+              <a:ext uri="{FF2B5EF4-FFF2-40B4-BE49-F238E27FC236}">
+                <a16:creationId xmlns:a16="http://schemas.microsoft.com/office/drawing/2014/main" id="{B7DE50B4-0753-4B38-9C8C-BC827A9CB907}"/>
+              </a:ext>
+            </a:extLst>
+          </p:cNvPr>
+          <p:cNvSpPr txBox="1"/>
+          <p:nvPr/>
+        </p:nvSpPr>
+        <p:spPr>
+          <a:xfrm>
+            <a:off x="2097248" y="4672668"/>
+            <a:ext cx="1990032" cy="369332"/>
+          </a:xfrm>
+          <a:prstGeom prst="rect">
+            <a:avLst/>
+          </a:prstGeom>
+          <a:noFill/>
+        </p:spPr>
+        <p:txBody>
+          <a:bodyPr wrap="none" rtlCol="0">
+            <a:spAutoFit/>
+          </a:bodyPr>
+          <a:lstStyle/>
+          <a:p>
+            <a:r>
+              <a:rPr lang="sr-Cyrl-RS" dirty="0"/>
+              <a:t>префикс дужине 1</a:t>
+            </a:r>
+            <a:endParaRPr lang="en-US" dirty="0"/>
+          </a:p>
+        </p:txBody>
+      </p:sp>
+    </p:spTree>
+    <p:extLst>
+      <p:ext uri="{BB962C8B-B14F-4D97-AF65-F5344CB8AC3E}">
+        <p14:creationId xmlns:p14="http://schemas.microsoft.com/office/powerpoint/2010/main" val="2336904327"/>
+      </p:ext>
+    </p:extLst>
+  </p:cSld>
+  <p:clrMapOvr>
+    <a:masterClrMapping/>
+  </p:clrMapOvr>
+</p:sld>
+</file>
+
+<file path=ppt/slides/slide15.xml><?xml version="1.0" encoding="utf-8"?>
+<p:sld xmlns:a="http://schemas.openxmlformats.org/drawingml/2006/main" xmlns:r="http://schemas.openxmlformats.org/officeDocument/2006/relationships" xmlns:p="http://schemas.openxmlformats.org/presentationml/2006/main">
+  <p:cSld>
+    <p:spTree>
+      <p:nvGrpSpPr>
+        <p:cNvPr id="1" name=""/>
+        <p:cNvGrpSpPr/>
+        <p:nvPr/>
+      </p:nvGrpSpPr>
+      <p:grpSpPr>
+        <a:xfrm>
+          <a:off x="0" y="0"/>
+          <a:ext cx="0" cy="0"/>
+          <a:chOff x="0" y="0"/>
+          <a:chExt cx="0" cy="0"/>
+        </a:xfrm>
+      </p:grpSpPr>
+      <p:sp>
+        <p:nvSpPr>
+          <p:cNvPr id="2" name="Title 1">
+            <a:extLst>
+              <a:ext uri="{FF2B5EF4-FFF2-40B4-BE49-F238E27FC236}">
+                <a16:creationId xmlns:a16="http://schemas.microsoft.com/office/drawing/2014/main" id="{80528F1B-5282-416B-ADC5-89B724D568E6}"/>
+              </a:ext>
+            </a:extLst>
+          </p:cNvPr>
+          <p:cNvSpPr>
+            <a:spLocks noGrp="1"/>
+          </p:cNvSpPr>
+          <p:nvPr>
+            <p:ph type="title"/>
+          </p:nvPr>
+        </p:nvSpPr>
+        <p:spPr/>
+        <p:txBody>
+          <a:bodyPr/>
+          <a:lstStyle/>
+          <a:p>
+            <a:r>
+              <a:rPr lang="sr-Cyrl-RS" dirty="0"/>
+              <a:t>ПОЗИЦИОНО ИНВАРИЈАНТНИ ТОКЕН</a:t>
+            </a:r>
+            <a:endParaRPr lang="en-US" dirty="0"/>
+          </a:p>
+        </p:txBody>
+      </p:sp>
+      <p:sp>
+        <p:nvSpPr>
+          <p:cNvPr id="3" name="Content Placeholder 2">
+            <a:extLst>
+              <a:ext uri="{FF2B5EF4-FFF2-40B4-BE49-F238E27FC236}">
+                <a16:creationId xmlns:a16="http://schemas.microsoft.com/office/drawing/2014/main" id="{336E2759-B224-4F25-ACE1-F37FEA19C0BF}"/>
+              </a:ext>
+            </a:extLst>
+          </p:cNvPr>
+          <p:cNvSpPr>
+            <a:spLocks noGrp="1"/>
+          </p:cNvSpPr>
+          <p:nvPr>
+            <p:ph idx="1"/>
+          </p:nvPr>
+        </p:nvSpPr>
+        <p:spPr>
+          <a:xfrm>
+            <a:off x="1127866" y="1807003"/>
+            <a:ext cx="10058400" cy="814396"/>
+          </a:xfrm>
+        </p:spPr>
+        <p:txBody>
+          <a:bodyPr>
+            <a:normAutofit/>
+          </a:bodyPr>
+          <a:lstStyle/>
+          <a:p>
+            <a:pPr>
+              <a:buFont typeface="Arial" panose="020B0604020202020204" pitchFamily="34" charset="0"/>
+              <a:buChar char="•"/>
+            </a:pPr>
+            <a:r>
+              <a:rPr lang="sr-Cyrl-RS" sz="2400" dirty="0"/>
+              <a:t>Уместо да се посматра дуж </a:t>
+            </a:r>
+            <a:r>
+              <a:rPr lang="sr-Cyrl-RS" sz="2400" dirty="0" err="1"/>
+              <a:t>евалуационих</a:t>
+            </a:r>
+            <a:r>
+              <a:rPr lang="sr-Cyrl-RS" sz="2400" dirty="0"/>
+              <a:t> путања, евалуација зависи од укупног броја појављивања у целом видљивом прозору.</a:t>
+            </a:r>
+            <a:endParaRPr lang="en-US" sz="2400" dirty="0"/>
+          </a:p>
+        </p:txBody>
+      </p:sp>
+      <p:sp>
+        <p:nvSpPr>
+          <p:cNvPr id="4" name="TextBox 3">
+            <a:extLst>
+              <a:ext uri="{FF2B5EF4-FFF2-40B4-BE49-F238E27FC236}">
+                <a16:creationId xmlns:a16="http://schemas.microsoft.com/office/drawing/2014/main" id="{E8E17691-3B47-4C2B-ADCA-1389C74DD0B2}"/>
+              </a:ext>
+            </a:extLst>
+          </p:cNvPr>
+          <p:cNvSpPr txBox="1"/>
+          <p:nvPr/>
+        </p:nvSpPr>
+        <p:spPr>
+          <a:xfrm>
+            <a:off x="11224470" y="814030"/>
+            <a:ext cx="497252" cy="923330"/>
+          </a:xfrm>
+          <a:prstGeom prst="rect">
+            <a:avLst/>
+          </a:prstGeom>
+          <a:noFill/>
+        </p:spPr>
+        <p:txBody>
+          <a:bodyPr wrap="none" rtlCol="0">
+            <a:spAutoFit/>
+          </a:bodyPr>
+          <a:lstStyle/>
+          <a:p>
+            <a:r>
+              <a:rPr lang="sr-Latn-RS" sz="5400" i="1" dirty="0">
+                <a:solidFill>
+                  <a:srgbClr val="FF0000"/>
+                </a:solidFill>
+              </a:rPr>
+              <a:t>S</a:t>
+            </a:r>
+            <a:endParaRPr lang="en-US" i="1" dirty="0">
+              <a:solidFill>
+                <a:srgbClr val="FF0000"/>
+              </a:solidFill>
+            </a:endParaRPr>
+          </a:p>
+        </p:txBody>
+      </p:sp>
+      <p:pic>
+        <p:nvPicPr>
+          <p:cNvPr id="5" name="Picture 4">
+            <a:extLst>
+              <a:ext uri="{FF2B5EF4-FFF2-40B4-BE49-F238E27FC236}">
+                <a16:creationId xmlns:a16="http://schemas.microsoft.com/office/drawing/2014/main" id="{56D892ED-59D8-4D7F-89C9-8385BBEB4654}"/>
+              </a:ext>
+            </a:extLst>
+          </p:cNvPr>
+          <p:cNvPicPr>
+            <a:picLocks noChangeAspect="1"/>
+          </p:cNvPicPr>
+          <p:nvPr/>
+        </p:nvPicPr>
+        <p:blipFill>
+          <a:blip r:embed="rId2"/>
+          <a:stretch>
+            <a:fillRect/>
+          </a:stretch>
+        </p:blipFill>
+        <p:spPr>
+          <a:xfrm>
+            <a:off x="1716810" y="4861000"/>
+            <a:ext cx="1157643" cy="1157643"/>
+          </a:xfrm>
+          <a:prstGeom prst="rect">
+            <a:avLst/>
+          </a:prstGeom>
+        </p:spPr>
+      </p:pic>
+      <p:pic>
+        <p:nvPicPr>
+          <p:cNvPr id="6" name="Picture 5" descr="lemon - download free icon Classic Slot Machine Icons on Artage.io">
+            <a:extLst>
+              <a:ext uri="{FF2B5EF4-FFF2-40B4-BE49-F238E27FC236}">
+                <a16:creationId xmlns:a16="http://schemas.microsoft.com/office/drawing/2014/main" id="{37BD358D-B472-4B02-AF00-AA528BE0AC34}"/>
+              </a:ext>
+            </a:extLst>
+          </p:cNvPr>
+          <p:cNvPicPr>
+            <a:picLocks noChangeAspect="1" noChangeArrowheads="1"/>
+          </p:cNvPicPr>
+          <p:nvPr/>
+        </p:nvPicPr>
+        <p:blipFill>
+          <a:blip r:embed="rId3">
+            <a:extLst>
+              <a:ext uri="{28A0092B-C50C-407E-A947-70E740481C1C}">
+                <a14:useLocalDpi xmlns:a14="http://schemas.microsoft.com/office/drawing/2010/main" val="0"/>
+              </a:ext>
+            </a:extLst>
+          </a:blip>
+          <a:srcRect/>
+          <a:stretch>
+            <a:fillRect/>
+          </a:stretch>
+        </p:blipFill>
+        <p:spPr bwMode="auto">
+          <a:xfrm>
+            <a:off x="4341332" y="5090854"/>
+            <a:ext cx="697934" cy="697934"/>
+          </a:xfrm>
+          <a:prstGeom prst="rect">
+            <a:avLst/>
+          </a:prstGeom>
+          <a:noFill/>
+          <a:extLst>
+            <a:ext uri="{909E8E84-426E-40DD-AFC4-6F175D3DCCD1}">
+              <a14:hiddenFill xmlns:a14="http://schemas.microsoft.com/office/drawing/2010/main">
+                <a:solidFill>
+                  <a:srgbClr val="FFFFFF"/>
+                </a:solidFill>
+              </a14:hiddenFill>
+            </a:ext>
+          </a:extLst>
+        </p:spPr>
+      </p:pic>
+      <p:sp>
+        <p:nvSpPr>
+          <p:cNvPr id="7" name="TextBox 6">
+            <a:extLst>
+              <a:ext uri="{FF2B5EF4-FFF2-40B4-BE49-F238E27FC236}">
+                <a16:creationId xmlns:a16="http://schemas.microsoft.com/office/drawing/2014/main" id="{B954E36C-8FCA-4FEA-9954-22DC558F19F4}"/>
+              </a:ext>
+            </a:extLst>
+          </p:cNvPr>
+          <p:cNvSpPr txBox="1"/>
+          <p:nvPr/>
+        </p:nvSpPr>
+        <p:spPr>
+          <a:xfrm>
+            <a:off x="1936399" y="2897553"/>
+            <a:ext cx="718466" cy="2400657"/>
+          </a:xfrm>
+          <a:prstGeom prst="rect">
+            <a:avLst/>
+          </a:prstGeom>
+          <a:noFill/>
+        </p:spPr>
+        <p:txBody>
+          <a:bodyPr wrap="none" rtlCol="0">
+            <a:spAutoFit/>
+          </a:bodyPr>
+          <a:lstStyle/>
+          <a:p>
+            <a:r>
+              <a:rPr lang="sr-Latn-RS" sz="6600" i="1" dirty="0">
+                <a:solidFill>
+                  <a:srgbClr val="FF0000"/>
+                </a:solidFill>
+              </a:rPr>
+              <a:t>S</a:t>
+            </a:r>
+          </a:p>
+          <a:p>
+            <a:r>
+              <a:rPr lang="sr-Latn-RS" sz="6600" dirty="0"/>
+              <a:t>G</a:t>
+            </a:r>
+          </a:p>
+          <a:p>
+            <a:endParaRPr lang="en-US" dirty="0"/>
+          </a:p>
+        </p:txBody>
+      </p:sp>
+      <p:sp>
+        <p:nvSpPr>
+          <p:cNvPr id="8" name="TextBox 7">
+            <a:extLst>
+              <a:ext uri="{FF2B5EF4-FFF2-40B4-BE49-F238E27FC236}">
+                <a16:creationId xmlns:a16="http://schemas.microsoft.com/office/drawing/2014/main" id="{73BB9CD6-6E81-4B27-9804-2830BA1D3BAB}"/>
+              </a:ext>
+            </a:extLst>
+          </p:cNvPr>
+          <p:cNvSpPr txBox="1"/>
+          <p:nvPr/>
+        </p:nvSpPr>
+        <p:spPr>
+          <a:xfrm>
+            <a:off x="3171079" y="2897553"/>
+            <a:ext cx="712054" cy="3139321"/>
+          </a:xfrm>
+          <a:prstGeom prst="rect">
+            <a:avLst/>
+          </a:prstGeom>
+          <a:noFill/>
+        </p:spPr>
+        <p:txBody>
+          <a:bodyPr wrap="none" rtlCol="0">
+            <a:spAutoFit/>
+          </a:bodyPr>
+          <a:lstStyle/>
+          <a:p>
+            <a:r>
+              <a:rPr lang="sr-Latn-RS" sz="6600" dirty="0"/>
+              <a:t>H</a:t>
+            </a:r>
+          </a:p>
+          <a:p>
+            <a:r>
+              <a:rPr lang="sr-Latn-RS" sz="6600" dirty="0"/>
+              <a:t>H</a:t>
+            </a:r>
+          </a:p>
+          <a:p>
+            <a:r>
+              <a:rPr lang="sr-Latn-RS" sz="6600" i="1" dirty="0">
+                <a:solidFill>
+                  <a:srgbClr val="FF0000"/>
+                </a:solidFill>
+              </a:rPr>
+              <a:t>S</a:t>
+            </a:r>
+          </a:p>
+        </p:txBody>
+      </p:sp>
+      <p:sp>
+        <p:nvSpPr>
+          <p:cNvPr id="9" name="TextBox 8">
+            <a:extLst>
+              <a:ext uri="{FF2B5EF4-FFF2-40B4-BE49-F238E27FC236}">
+                <a16:creationId xmlns:a16="http://schemas.microsoft.com/office/drawing/2014/main" id="{DAA1F31B-DDE5-4E19-92B5-7151B8F5BA25}"/>
+              </a:ext>
+            </a:extLst>
+          </p:cNvPr>
+          <p:cNvSpPr txBox="1"/>
+          <p:nvPr/>
+        </p:nvSpPr>
+        <p:spPr>
+          <a:xfrm>
+            <a:off x="4415377" y="2897553"/>
+            <a:ext cx="623889" cy="2123658"/>
+          </a:xfrm>
+          <a:prstGeom prst="rect">
+            <a:avLst/>
+          </a:prstGeom>
+          <a:noFill/>
+        </p:spPr>
+        <p:txBody>
+          <a:bodyPr wrap="none" rtlCol="0">
+            <a:spAutoFit/>
+          </a:bodyPr>
+          <a:lstStyle/>
+          <a:p>
+            <a:r>
+              <a:rPr lang="sr-Latn-RS" sz="6600" dirty="0"/>
+              <a:t>K</a:t>
+            </a:r>
+          </a:p>
+          <a:p>
+            <a:r>
+              <a:rPr lang="sr-Latn-RS" sz="6600" i="1" dirty="0">
+                <a:solidFill>
+                  <a:srgbClr val="FF0000"/>
+                </a:solidFill>
+              </a:rPr>
+              <a:t>S</a:t>
+            </a:r>
+            <a:endParaRPr lang="en-US" sz="6600" i="1" dirty="0">
+              <a:solidFill>
+                <a:srgbClr val="FF0000"/>
+              </a:solidFill>
+            </a:endParaRPr>
+          </a:p>
+        </p:txBody>
+      </p:sp>
+      <p:cxnSp>
+        <p:nvCxnSpPr>
+          <p:cNvPr id="10" name="Straight Arrow Connector 9">
+            <a:extLst>
+              <a:ext uri="{FF2B5EF4-FFF2-40B4-BE49-F238E27FC236}">
+                <a16:creationId xmlns:a16="http://schemas.microsoft.com/office/drawing/2014/main" id="{8C3D1309-4521-475A-A480-C168D5A94AA4}"/>
+              </a:ext>
+            </a:extLst>
+          </p:cNvPr>
+          <p:cNvCxnSpPr>
+            <a:cxnSpLocks/>
+          </p:cNvCxnSpPr>
+          <p:nvPr/>
+        </p:nvCxnSpPr>
+        <p:spPr>
+          <a:xfrm>
+            <a:off x="5738070" y="4310114"/>
+            <a:ext cx="1568741" cy="0"/>
+          </a:xfrm>
+          <a:prstGeom prst="straightConnector1">
+            <a:avLst/>
+          </a:prstGeom>
+          <a:ln w="57150">
+            <a:solidFill>
+              <a:schemeClr val="tx1"/>
+            </a:solidFill>
+            <a:tailEnd type="triangle"/>
+          </a:ln>
+        </p:spPr>
+        <p:style>
+          <a:lnRef idx="1">
+            <a:schemeClr val="accent1"/>
+          </a:lnRef>
+          <a:fillRef idx="0">
+            <a:schemeClr val="accent1"/>
+          </a:fillRef>
+          <a:effectRef idx="0">
+            <a:schemeClr val="accent1"/>
+          </a:effectRef>
+          <a:fontRef idx="minor">
+            <a:schemeClr val="tx1"/>
+          </a:fontRef>
+        </p:style>
+      </p:cxnSp>
+      <p:sp>
+        <p:nvSpPr>
+          <p:cNvPr id="11" name="TextBox 10">
+            <a:extLst>
+              <a:ext uri="{FF2B5EF4-FFF2-40B4-BE49-F238E27FC236}">
+                <a16:creationId xmlns:a16="http://schemas.microsoft.com/office/drawing/2014/main" id="{97868770-5B76-400B-A012-424914E74E95}"/>
+              </a:ext>
+            </a:extLst>
+          </p:cNvPr>
+          <p:cNvSpPr txBox="1"/>
+          <p:nvPr/>
+        </p:nvSpPr>
+        <p:spPr>
+          <a:xfrm>
+            <a:off x="8128932" y="3682604"/>
+            <a:ext cx="1745991" cy="1107996"/>
+          </a:xfrm>
+          <a:prstGeom prst="rect">
+            <a:avLst/>
+          </a:prstGeom>
+          <a:noFill/>
+        </p:spPr>
+        <p:txBody>
+          <a:bodyPr wrap="none" rtlCol="0">
+            <a:spAutoFit/>
+          </a:bodyPr>
+          <a:lstStyle/>
+          <a:p>
+            <a:r>
+              <a:rPr lang="sr-Latn-RS" sz="6600" dirty="0"/>
+              <a:t>3 x </a:t>
+            </a:r>
+            <a:r>
+              <a:rPr lang="sr-Latn-RS" sz="6600" i="1" dirty="0">
+                <a:solidFill>
+                  <a:srgbClr val="FF0000"/>
+                </a:solidFill>
+              </a:rPr>
+              <a:t>S</a:t>
+            </a:r>
+            <a:endParaRPr lang="en-US" sz="6600" dirty="0">
+              <a:solidFill>
+                <a:srgbClr val="FF0000"/>
+              </a:solidFill>
+            </a:endParaRPr>
+          </a:p>
+        </p:txBody>
+      </p:sp>
+    </p:spTree>
+    <p:extLst>
+      <p:ext uri="{BB962C8B-B14F-4D97-AF65-F5344CB8AC3E}">
+        <p14:creationId xmlns:p14="http://schemas.microsoft.com/office/powerpoint/2010/main" val="71923587"/>
+      </p:ext>
+    </p:extLst>
+  </p:cSld>
+  <p:clrMapOvr>
+    <a:masterClrMapping/>
+  </p:clrMapOvr>
+</p:sld>
+</file>
+
+<file path=ppt/slides/slide16.xml><?xml version="1.0" encoding="utf-8"?>
+<p:sld xmlns:a="http://schemas.openxmlformats.org/drawingml/2006/main" xmlns:r="http://schemas.openxmlformats.org/officeDocument/2006/relationships" xmlns:p="http://schemas.openxmlformats.org/presentationml/2006/main">
+  <p:cSld>
+    <p:spTree>
+      <p:nvGrpSpPr>
+        <p:cNvPr id="1" name=""/>
+        <p:cNvGrpSpPr/>
+        <p:nvPr/>
+      </p:nvGrpSpPr>
+      <p:grpSpPr>
+        <a:xfrm>
+          <a:off x="0" y="0"/>
+          <a:ext cx="0" cy="0"/>
+          <a:chOff x="0" y="0"/>
+          <a:chExt cx="0" cy="0"/>
+        </a:xfrm>
+      </p:grpSpPr>
+      <p:sp>
+        <p:nvSpPr>
+          <p:cNvPr id="2" name="Title 1">
+            <a:extLst>
+              <a:ext uri="{FF2B5EF4-FFF2-40B4-BE49-F238E27FC236}">
+                <a16:creationId xmlns:a16="http://schemas.microsoft.com/office/drawing/2014/main" id="{844B96F1-A9AE-4B8A-99A5-345E0208229A}"/>
+              </a:ext>
+            </a:extLst>
+          </p:cNvPr>
+          <p:cNvSpPr>
+            <a:spLocks noGrp="1"/>
+          </p:cNvSpPr>
+          <p:nvPr>
+            <p:ph type="title"/>
+          </p:nvPr>
+        </p:nvSpPr>
+        <p:spPr/>
+        <p:txBody>
+          <a:bodyPr/>
+          <a:lstStyle/>
+          <a:p>
+            <a:r>
+              <a:rPr lang="sr-Cyrl-RS"/>
+              <a:t>ЕВАЛУАЦИОНА ФУНКЦИЈА И ТАБЕЛА ИЗЛАЗНИХ ВРЕДНОСТИ ТОКЕНА</a:t>
+            </a:r>
+            <a:endParaRPr lang="en-US"/>
+          </a:p>
+        </p:txBody>
+      </p:sp>
+      <p:sp>
+        <p:nvSpPr>
+          <p:cNvPr id="3" name="Content Placeholder 2">
+            <a:extLst>
+              <a:ext uri="{FF2B5EF4-FFF2-40B4-BE49-F238E27FC236}">
+                <a16:creationId xmlns:a16="http://schemas.microsoft.com/office/drawing/2014/main" id="{7CBCD496-33AE-49E8-AC7A-F2AE84BDF8C4}"/>
+              </a:ext>
+            </a:extLst>
+          </p:cNvPr>
+          <p:cNvSpPr>
+            <a:spLocks noGrp="1"/>
+          </p:cNvSpPr>
+          <p:nvPr>
+            <p:ph idx="1"/>
+          </p:nvPr>
+        </p:nvSpPr>
+        <p:spPr/>
+        <p:txBody>
+          <a:bodyPr/>
+          <a:lstStyle/>
+          <a:p>
+            <a:endParaRPr lang="en-US"/>
+          </a:p>
+        </p:txBody>
+      </p:sp>
+    </p:spTree>
+    <p:extLst>
+      <p:ext uri="{BB962C8B-B14F-4D97-AF65-F5344CB8AC3E}">
+        <p14:creationId xmlns:p14="http://schemas.microsoft.com/office/powerpoint/2010/main" val="3488669527"/>
+      </p:ext>
+    </p:extLst>
+  </p:cSld>
+  <p:clrMapOvr>
+    <a:masterClrMapping/>
+  </p:clrMapOvr>
+</p:sld>
+</file>
+
 <file path=ppt/slides/slide2.xml><?xml version="1.0" encoding="utf-8"?>
 <p:sld xmlns:a="http://schemas.openxmlformats.org/drawingml/2006/main" xmlns:r="http://schemas.openxmlformats.org/officeDocument/2006/relationships" xmlns:p="http://schemas.openxmlformats.org/presentationml/2006/main">
   <p:cSld>
@@ -6963,7 +9165,7 @@
         </p:nvSpPr>
         <p:spPr>
           <a:xfrm>
-            <a:off x="3758269" y="1971413"/>
+            <a:off x="4042457" y="2290194"/>
             <a:ext cx="718466" cy="2400657"/>
           </a:xfrm>
           <a:prstGeom prst="rect">
@@ -7007,7 +9209,7 @@
         </p:nvSpPr>
         <p:spPr>
           <a:xfrm>
-            <a:off x="5083728" y="1981320"/>
+            <a:off x="5367916" y="2300101"/>
             <a:ext cx="728084" cy="3139321"/>
           </a:xfrm>
           <a:prstGeom prst="rect">
@@ -7055,7 +9257,7 @@
         </p:nvSpPr>
         <p:spPr>
           <a:xfrm>
-            <a:off x="6418805" y="1981320"/>
+            <a:off x="6702993" y="2300101"/>
             <a:ext cx="623889" cy="2123658"/>
           </a:xfrm>
           <a:prstGeom prst="rect">
@@ -7105,7 +9307,7 @@
         </p:blipFill>
         <p:spPr>
           <a:xfrm>
-            <a:off x="3538680" y="3962998"/>
+            <a:off x="3822868" y="4281779"/>
             <a:ext cx="1157643" cy="1157643"/>
           </a:xfrm>
           <a:prstGeom prst="rect">
@@ -7142,7 +9344,7 @@
         </p:blipFill>
         <p:spPr bwMode="auto">
           <a:xfrm>
-            <a:off x="6418805" y="4192852"/>
+            <a:off x="6702993" y="4511633"/>
             <a:ext cx="697934" cy="697934"/>
           </a:xfrm>
           <a:prstGeom prst="rect">

--- a/PREZENTACIJA_JB.pptx
+++ b/PREZENTACIJA_JB.pptx
@@ -5,7 +5,7 @@
     <p:sldMasterId id="2147483648" r:id="rId1"/>
   </p:sldMasterIdLst>
   <p:notesMasterIdLst>
-    <p:notesMasterId r:id="rId42"/>
+    <p:notesMasterId r:id="rId41"/>
   </p:notesMasterIdLst>
   <p:sldIdLst>
     <p:sldId id="256" r:id="rId2"/>
@@ -43,11 +43,10 @@
     <p:sldId id="301" r:id="rId34"/>
     <p:sldId id="302" r:id="rId35"/>
     <p:sldId id="304" r:id="rId36"/>
-    <p:sldId id="305" r:id="rId37"/>
-    <p:sldId id="306" r:id="rId38"/>
-    <p:sldId id="308" r:id="rId39"/>
-    <p:sldId id="310" r:id="rId40"/>
-    <p:sldId id="312" r:id="rId41"/>
+    <p:sldId id="306" r:id="rId37"/>
+    <p:sldId id="308" r:id="rId38"/>
+    <p:sldId id="310" r:id="rId39"/>
+    <p:sldId id="312" r:id="rId40"/>
   </p:sldIdLst>
   <p:sldSz cx="12192000" cy="6858000"/>
   <p:notesSz cx="6858000" cy="9144000"/>
@@ -236,7 +235,7 @@
           <a:p>
             <a:fld id="{A17F16B8-5A20-4EA5-952C-4F8D73950EEF}" type="datetimeFigureOut">
               <a:rPr lang="en-US" smtClean="0"/>
-              <a:t>22. 07. 2026.</a:t>
+              <a:t>30. 07. 2026.</a:t>
             </a:fld>
             <a:endParaRPr lang="en-US"/>
           </a:p>
@@ -670,6 +669,49 @@
               <a:rPr lang="sr-Latn-RS" sz="1200" dirty="0"/>
               <a:t>.</a:t>
             </a:r>
+          </a:p>
+          <a:p>
+            <a:pPr marL="0" marR="0" lvl="0" indent="0" algn="l" defTabSz="914400" rtl="0" eaLnBrk="1" fontAlgn="auto" latinLnBrk="0" hangingPunct="1">
+              <a:lnSpc>
+                <a:spcPct val="100000"/>
+              </a:lnSpc>
+              <a:spcBef>
+                <a:spcPts val="0"/>
+              </a:spcBef>
+              <a:spcAft>
+                <a:spcPts val="0"/>
+              </a:spcAft>
+              <a:buClrTx/>
+              <a:buSzTx/>
+              <a:buFontTx/>
+              <a:buNone/>
+              <a:tabLst/>
+              <a:defRPr/>
+            </a:pPr>
+            <a:endParaRPr lang="sr-Latn-RS" sz="1200" dirty="0"/>
+          </a:p>
+          <a:p>
+            <a:pPr marL="0" marR="0" lvl="0" indent="0" algn="l" defTabSz="914400" rtl="0" eaLnBrk="1" fontAlgn="auto" latinLnBrk="0" hangingPunct="1">
+              <a:lnSpc>
+                <a:spcPct val="100000"/>
+              </a:lnSpc>
+              <a:spcBef>
+                <a:spcPts val="0"/>
+              </a:spcBef>
+              <a:spcAft>
+                <a:spcPts val="0"/>
+              </a:spcAft>
+              <a:buClrTx/>
+              <a:buSzTx/>
+              <a:buFontTx/>
+              <a:buNone/>
+              <a:tabLst/>
+              <a:defRPr/>
+            </a:pPr>
+            <a:r>
+              <a:rPr lang="sr-Latn-RS" sz="1200" dirty="0"/>
+              <a:t>OBJASNIĆU VAM KAKO SE KONSTRUIŠE GENERATIVNA KOMPONENTA I KAKO JE NAJBOLJE PROJEKTOVATI EVALUACIONI KOMPONENTU</a:t>
+            </a:r>
             <a:endParaRPr lang="en-US" sz="1200" dirty="0"/>
           </a:p>
           <a:p>
@@ -1374,6 +1416,21 @@
               <a:rPr lang="sr-Latn-RS" dirty="0"/>
               <a:t>Doprinos se sabira za sve tokene</a:t>
             </a:r>
+          </a:p>
+          <a:p>
+            <a:endParaRPr lang="sr-Latn-RS" dirty="0"/>
+          </a:p>
+          <a:p>
+            <a:r>
+              <a:rPr lang="sr-Latn-RS" dirty="0"/>
+              <a:t>Spoljna suma je svaki token</a:t>
+            </a:r>
+          </a:p>
+          <a:p>
+            <a:r>
+              <a:rPr lang="sr-Latn-RS" dirty="0"/>
+              <a:t>Unutrasnja je svaka duzina prefiksa za taj token</a:t>
+            </a:r>
             <a:endParaRPr lang="en-US" dirty="0"/>
           </a:p>
         </p:txBody>
@@ -1462,6 +1519,25 @@
               <a:rPr lang="sr-Latn-RS" dirty="0"/>
               <a:t>Bitno nam je da imamo tačne brojeve koliko koj token treba u kojoj koloni da se pojavljuje.</a:t>
             </a:r>
+          </a:p>
+          <a:p>
+            <a:endParaRPr lang="sr-Latn-RS" dirty="0"/>
+          </a:p>
+          <a:p>
+            <a:r>
+              <a:rPr lang="sr-Latn-RS" dirty="0"/>
+              <a:t>ULAZ U SISTEM JE TRAŽENI ULAZNO IZLAZNI ODNOS, IZLAZNE VREDNOSTI ZA SVE PREFIKSE SVIH TOKENA I BROJ POJAVLJIVANJA SPECIJALNIH TOKENA</a:t>
+            </a:r>
+            <a:endParaRPr lang="sr-Cyrl-RS" dirty="0"/>
+          </a:p>
+          <a:p>
+            <a:endParaRPr lang="sr-Cyrl-RS" dirty="0"/>
+          </a:p>
+          <a:p>
+            <a:r>
+              <a:rPr lang="sr-Cyrl-RS" dirty="0"/>
+              <a:t>КРЕНЕШ ПРИЧУ ЗА ОПТИМИЗАЦИЈУ ДА ЈЕ ТО АЛГОРИТАМ КОЈИ ПРОНАЛАЗИ ВРЕДНОСТИ ТАКО ШТО ПОЧНЕ ОД НЕКИХ РАДНОМ </a:t>
+            </a:r>
             <a:endParaRPr lang="en-US" dirty="0"/>
           </a:p>
         </p:txBody>
@@ -1706,96 +1782,6 @@
           <a:bodyPr/>
           <a:lstStyle/>
           <a:p>
-            <a:pPr>
-              <a:buFont typeface="Arial" panose="020B0604020202020204" pitchFamily="34" charset="0"/>
-              <a:buChar char="•"/>
-            </a:pPr>
-            <a:r>
-              <a:rPr lang="sr-Cyrl-RS" dirty="0"/>
-              <a:t>ГЕНЕРИСАЊЕ ЦИКЛИЧНЕ-ТОКЕН СЕКВЕНЦЕ</a:t>
-            </a:r>
-            <a:endParaRPr lang="sr-Latn-RS" sz="1200" dirty="0"/>
-          </a:p>
-          <a:p>
-            <a:pPr>
-              <a:buFont typeface="Arial" panose="020B0604020202020204" pitchFamily="34" charset="0"/>
-              <a:buChar char="•"/>
-            </a:pPr>
-            <a:endParaRPr lang="sr-Latn-RS" sz="1200" dirty="0"/>
-          </a:p>
-          <a:p>
-            <a:pPr>
-              <a:buFont typeface="Arial" panose="020B0604020202020204" pitchFamily="34" charset="0"/>
-              <a:buChar char="•"/>
-            </a:pPr>
-            <a:r>
-              <a:rPr lang="sr-Cyrl-RS" sz="1200" dirty="0"/>
-              <a:t>Када имамо све бројеве појављивања сваког </a:t>
-            </a:r>
-            <a:r>
-              <a:rPr lang="sr-Cyrl-RS" sz="1200" dirty="0" err="1"/>
-              <a:t>токена</a:t>
-            </a:r>
-            <a:r>
-              <a:rPr lang="sr-Cyrl-RS" sz="1200" dirty="0"/>
-              <a:t> за одређено </a:t>
-            </a:r>
-            <a:r>
-              <a:rPr lang="sr-Latn-RS" sz="1200" i="1" dirty="0"/>
-              <a:t>L</a:t>
-            </a:r>
-            <a:r>
-              <a:rPr lang="sr-Latn-RS" sz="1200" dirty="0"/>
-              <a:t> </a:t>
-            </a:r>
-            <a:r>
-              <a:rPr lang="sr-Cyrl-RS" sz="1200" dirty="0"/>
-              <a:t>можемо да матрицу попунимо са </a:t>
-            </a:r>
-            <a:r>
-              <a:rPr lang="sr-Cyrl-RS" sz="1200" dirty="0" err="1"/>
-              <a:t>токенима</a:t>
-            </a:r>
-            <a:r>
-              <a:rPr lang="sr-Cyrl-RS" sz="1200" dirty="0"/>
-              <a:t> скроз </a:t>
-            </a:r>
-            <a:r>
-              <a:rPr lang="sr-Latn-RS" sz="1200" dirty="0"/>
-              <a:t>„random“</a:t>
-            </a:r>
-            <a:r>
-              <a:rPr lang="sr-Cyrl-RS" sz="1200" dirty="0"/>
-              <a:t>.</a:t>
-            </a:r>
-          </a:p>
-          <a:p>
-            <a:pPr>
-              <a:buFont typeface="Arial" panose="020B0604020202020204" pitchFamily="34" charset="0"/>
-              <a:buChar char="•"/>
-            </a:pPr>
-            <a:endParaRPr lang="sr-Cyrl-RS" sz="1200" dirty="0"/>
-          </a:p>
-          <a:p>
-            <a:pPr>
-              <a:buFont typeface="Arial" panose="020B0604020202020204" pitchFamily="34" charset="0"/>
-              <a:buChar char="•"/>
-            </a:pPr>
-            <a:r>
-              <a:rPr lang="sr-Cyrl-RS" sz="1200" dirty="0"/>
-              <a:t>Позиције </a:t>
-            </a:r>
-            <a:r>
-              <a:rPr lang="sr-Cyrl-RS" sz="1200" dirty="0" err="1"/>
-              <a:t>токена</a:t>
-            </a:r>
-            <a:r>
-              <a:rPr lang="sr-Cyrl-RS" sz="1200" dirty="0"/>
-              <a:t> у цикличним токен секвенцама не утичу на њихову вероватноћу појављивања па тако ни на улазно-излазни однос.</a:t>
-            </a:r>
-            <a:endParaRPr lang="en-US" sz="1200" dirty="0"/>
-          </a:p>
-          <a:p>
             <a:endParaRPr lang="en-US" dirty="0"/>
           </a:p>
         </p:txBody>
@@ -1817,7 +1803,7 @@
           <a:p>
             <a:fld id="{4B43ADDB-6817-475F-AC27-9281D9F320C3}" type="slidenum">
               <a:rPr lang="en-US" smtClean="0"/>
-              <a:t>24</a:t>
+              <a:t>21</a:t>
             </a:fld>
             <a:endParaRPr lang="en-US"/>
           </a:p>
@@ -1826,7 +1812,7 @@
     </p:spTree>
     <p:extLst>
       <p:ext uri="{BB962C8B-B14F-4D97-AF65-F5344CB8AC3E}">
-        <p14:creationId xmlns:p14="http://schemas.microsoft.com/office/powerpoint/2010/main" val="2144888060"/>
+        <p14:creationId xmlns:p14="http://schemas.microsoft.com/office/powerpoint/2010/main" val="4277437892"/>
       </p:ext>
     </p:extLst>
   </p:cSld>
@@ -1879,6 +1865,15 @@
         <p:txBody>
           <a:bodyPr/>
           <a:lstStyle/>
+          <a:p>
+            <a:r>
+              <a:rPr lang="sr-Latn-RS" dirty="0"/>
+              <a:t>Svi tokeni koji se mogu generisati</a:t>
+            </a:r>
+          </a:p>
+          <a:p>
+            <a:endParaRPr lang="sr-Latn-RS" dirty="0"/>
+          </a:p>
           <a:p>
             <a:r>
               <a:rPr lang="sr-Latn-RS" dirty="0"/>
@@ -1974,44 +1969,19 @@
           <a:bodyPr/>
           <a:lstStyle/>
           <a:p>
-            <a:pPr>
-              <a:buFont typeface="Arial" panose="020B0604020202020204" pitchFamily="34" charset="0"/>
-              <a:buNone/>
-            </a:pPr>
-            <a:r>
-              <a:rPr lang="sr-Latn-RS" sz="1200" dirty="0"/>
-              <a:t>Ograničenja i napomene</a:t>
-            </a:r>
-            <a:br>
-              <a:rPr lang="sr-Latn-RS" sz="1200" dirty="0"/>
-            </a:br>
-            <a:br>
-              <a:rPr lang="sr-Latn-RS" sz="1200" dirty="0"/>
-            </a:br>
-            <a:r>
-              <a:rPr lang="sr-Cyrl-RS" sz="1200" dirty="0"/>
-              <a:t>Не постоји једно решење реконструкције.</a:t>
-            </a:r>
-          </a:p>
-          <a:p>
-            <a:pPr>
-              <a:buFont typeface="Arial" panose="020B0604020202020204" pitchFamily="34" charset="0"/>
-              <a:buChar char="•"/>
-            </a:pPr>
-            <a:endParaRPr lang="sr-Cyrl-RS" sz="1200" dirty="0"/>
-          </a:p>
-          <a:p>
-            <a:pPr>
-              <a:buFont typeface="Arial" panose="020B0604020202020204" pitchFamily="34" charset="0"/>
-              <a:buChar char="•"/>
-            </a:pPr>
-            <a:r>
-              <a:rPr lang="sr-Cyrl-RS" sz="1200" dirty="0"/>
-              <a:t>Потребан је велики број посматрања.</a:t>
-            </a:r>
-            <a:endParaRPr lang="en-US" sz="1200" dirty="0"/>
-          </a:p>
-          <a:p>
+            <a:r>
+              <a:rPr lang="sr-Latn-RS" dirty="0"/>
+              <a:t>Taj proces uzimanja najboljih od najgorih se zove metoda najvećeg apsolutnog ostatka</a:t>
+            </a:r>
+          </a:p>
+          <a:p>
+            <a:endParaRPr lang="sr-Latn-RS" dirty="0"/>
+          </a:p>
+          <a:p>
+            <a:r>
+              <a:rPr lang="sr-Latn-RS" dirty="0"/>
+              <a:t>NAKON OVOGA KADA IMAMO TAČNO ZA SVAKI STANDARDNI TOKEN POJAVLJIVANJE ZA ODREĐENO L, TO L ZADRŽAVAMO I DODAJEMO SPECIJALNE TOKENE</a:t>
+            </a:r>
             <a:endParaRPr lang="en-US" dirty="0"/>
           </a:p>
         </p:txBody>
@@ -2033,7 +2003,7 @@
           <a:p>
             <a:fld id="{4B43ADDB-6817-475F-AC27-9281D9F320C3}" type="slidenum">
               <a:rPr lang="en-US" smtClean="0"/>
-              <a:t>31</a:t>
+              <a:t>22</a:t>
             </a:fld>
             <a:endParaRPr lang="en-US"/>
           </a:p>
@@ -2042,7 +2012,7 @@
     </p:spTree>
     <p:extLst>
       <p:ext uri="{BB962C8B-B14F-4D97-AF65-F5344CB8AC3E}">
-        <p14:creationId xmlns:p14="http://schemas.microsoft.com/office/powerpoint/2010/main" val="482664667"/>
+        <p14:creationId xmlns:p14="http://schemas.microsoft.com/office/powerpoint/2010/main" val="1503857343"/>
       </p:ext>
     </p:extLst>
   </p:cSld>
@@ -2101,8 +2071,62 @@
               <a:buChar char="•"/>
             </a:pPr>
             <a:r>
+              <a:rPr lang="sr-Cyrl-RS" dirty="0"/>
+              <a:t>ГЕНЕРИСАЊЕ ЦИКЛИЧНЕ-ТОКЕН СЕКВЕНЦЕ</a:t>
+            </a:r>
+            <a:endParaRPr lang="sr-Latn-RS" sz="1200" dirty="0"/>
+          </a:p>
+          <a:p>
+            <a:pPr>
+              <a:buFont typeface="Arial" panose="020B0604020202020204" pitchFamily="34" charset="0"/>
+              <a:buChar char="•"/>
+            </a:pPr>
+            <a:endParaRPr lang="sr-Latn-RS" sz="1200" dirty="0"/>
+          </a:p>
+          <a:p>
+            <a:pPr>
+              <a:buFont typeface="Arial" panose="020B0604020202020204" pitchFamily="34" charset="0"/>
+              <a:buChar char="•"/>
+            </a:pPr>
+            <a:r>
               <a:rPr lang="sr-Cyrl-RS" sz="1200" dirty="0"/>
-              <a:t>Секвенцијална евалуација</a:t>
+              <a:t>Када имамо све бројеве појављивања сваког </a:t>
+            </a:r>
+            <a:r>
+              <a:rPr lang="sr-Cyrl-RS" sz="1200" dirty="0" err="1"/>
+              <a:t>токена</a:t>
+            </a:r>
+            <a:r>
+              <a:rPr lang="sr-Cyrl-RS" sz="1200" dirty="0"/>
+              <a:t> за одређено </a:t>
+            </a:r>
+            <a:r>
+              <a:rPr lang="sr-Latn-RS" sz="1200" i="1" dirty="0"/>
+              <a:t>L</a:t>
+            </a:r>
+            <a:r>
+              <a:rPr lang="sr-Latn-RS" sz="1200" dirty="0"/>
+              <a:t> </a:t>
+            </a:r>
+            <a:r>
+              <a:rPr lang="sr-Cyrl-RS" sz="1200" dirty="0"/>
+              <a:t>можемо да матрицу попунимо са </a:t>
+            </a:r>
+            <a:r>
+              <a:rPr lang="sr-Cyrl-RS" sz="1200" dirty="0" err="1"/>
+              <a:t>токенима</a:t>
+            </a:r>
+            <a:r>
+              <a:rPr lang="sr-Cyrl-RS" sz="1200" dirty="0"/>
+              <a:t> скроз </a:t>
+            </a:r>
+            <a:r>
+              <a:rPr lang="sr-Latn-RS" sz="1200" dirty="0"/>
+              <a:t>„random“</a:t>
+            </a:r>
+            <a:r>
+              <a:rPr lang="sr-Cyrl-RS" sz="1200" dirty="0"/>
+              <a:t>.</a:t>
             </a:r>
           </a:p>
           <a:p>
@@ -2119,32 +2143,15 @@
             </a:pPr>
             <a:r>
               <a:rPr lang="sr-Cyrl-RS" sz="1200" dirty="0"/>
-              <a:t>Евалуација помоћу </a:t>
+              <a:t>Позиције </a:t>
             </a:r>
             <a:r>
               <a:rPr lang="sr-Cyrl-RS" sz="1200" dirty="0" err="1"/>
-              <a:t>хеш</a:t>
+              <a:t>токена</a:t>
             </a:r>
             <a:r>
               <a:rPr lang="sr-Cyrl-RS" sz="1200" dirty="0"/>
-              <a:t> табеле</a:t>
-            </a:r>
-          </a:p>
-          <a:p>
-            <a:pPr>
-              <a:buFont typeface="Arial" panose="020B0604020202020204" pitchFamily="34" charset="0"/>
-              <a:buChar char="•"/>
-            </a:pPr>
-            <a:endParaRPr lang="sr-Cyrl-RS" sz="1200" dirty="0"/>
-          </a:p>
-          <a:p>
-            <a:pPr>
-              <a:buFont typeface="Arial" panose="020B0604020202020204" pitchFamily="34" charset="0"/>
-              <a:buChar char="•"/>
-            </a:pPr>
-            <a:r>
-              <a:rPr lang="sr-Cyrl-RS" sz="1200" dirty="0"/>
-              <a:t>Евалуација помоћу индексног стабла</a:t>
+              <a:t> у цикличним токен секвенцама не утичу на њихову вероватноћу појављивања па тако ни на улазно-излазни однос.</a:t>
             </a:r>
             <a:endParaRPr lang="en-US" sz="1200" dirty="0"/>
           </a:p>
@@ -2170,6 +2177,603 @@
           <a:p>
             <a:fld id="{4B43ADDB-6817-475F-AC27-9281D9F320C3}" type="slidenum">
               <a:rPr lang="en-US" smtClean="0"/>
+              <a:t>24</a:t>
+            </a:fld>
+            <a:endParaRPr lang="en-US"/>
+          </a:p>
+        </p:txBody>
+      </p:sp>
+    </p:spTree>
+    <p:extLst>
+      <p:ext uri="{BB962C8B-B14F-4D97-AF65-F5344CB8AC3E}">
+        <p14:creationId xmlns:p14="http://schemas.microsoft.com/office/powerpoint/2010/main" val="2144888060"/>
+      </p:ext>
+    </p:extLst>
+  </p:cSld>
+  <p:clrMapOvr>
+    <a:masterClrMapping/>
+  </p:clrMapOvr>
+</p:notes>
+</file>
+
+<file path=ppt/notesSlides/notesSlide22.xml><?xml version="1.0" encoding="utf-8"?>
+<p:notes xmlns:a="http://schemas.openxmlformats.org/drawingml/2006/main" xmlns:r="http://schemas.openxmlformats.org/officeDocument/2006/relationships" xmlns:p="http://schemas.openxmlformats.org/presentationml/2006/main">
+  <p:cSld>
+    <p:spTree>
+      <p:nvGrpSpPr>
+        <p:cNvPr id="1" name=""/>
+        <p:cNvGrpSpPr/>
+        <p:nvPr/>
+      </p:nvGrpSpPr>
+      <p:grpSpPr>
+        <a:xfrm>
+          <a:off x="0" y="0"/>
+          <a:ext cx="0" cy="0"/>
+          <a:chOff x="0" y="0"/>
+          <a:chExt cx="0" cy="0"/>
+        </a:xfrm>
+      </p:grpSpPr>
+      <p:sp>
+        <p:nvSpPr>
+          <p:cNvPr id="2" name="Slide Image Placeholder 1"/>
+          <p:cNvSpPr>
+            <a:spLocks noGrp="1" noRot="1" noChangeAspect="1"/>
+          </p:cNvSpPr>
+          <p:nvPr>
+            <p:ph type="sldImg"/>
+          </p:nvPr>
+        </p:nvSpPr>
+        <p:spPr/>
+      </p:sp>
+      <p:sp>
+        <p:nvSpPr>
+          <p:cNvPr id="3" name="Notes Placeholder 2"/>
+          <p:cNvSpPr>
+            <a:spLocks noGrp="1"/>
+          </p:cNvSpPr>
+          <p:nvPr>
+            <p:ph type="body" idx="1"/>
+          </p:nvPr>
+        </p:nvSpPr>
+        <p:spPr/>
+        <p:txBody>
+          <a:bodyPr/>
+          <a:lstStyle/>
+          <a:p>
+            <a:r>
+              <a:rPr lang="sr-Latn-RS" dirty="0"/>
+              <a:t>REKONSTRUKCIJA CELE MATRICE SE SVODI NA NEZAVISNE REKONSTRUKCIJE KOLONA</a:t>
+            </a:r>
+            <a:endParaRPr lang="en-US" dirty="0"/>
+          </a:p>
+        </p:txBody>
+      </p:sp>
+      <p:sp>
+        <p:nvSpPr>
+          <p:cNvPr id="4" name="Slide Number Placeholder 3"/>
+          <p:cNvSpPr>
+            <a:spLocks noGrp="1"/>
+          </p:cNvSpPr>
+          <p:nvPr>
+            <p:ph type="sldNum" sz="quarter" idx="5"/>
+          </p:nvPr>
+        </p:nvSpPr>
+        <p:spPr/>
+        <p:txBody>
+          <a:bodyPr/>
+          <a:lstStyle/>
+          <a:p>
+            <a:fld id="{4B43ADDB-6817-475F-AC27-9281D9F320C3}" type="slidenum">
+              <a:rPr lang="en-US" smtClean="0"/>
+              <a:t>25</a:t>
+            </a:fld>
+            <a:endParaRPr lang="en-US"/>
+          </a:p>
+        </p:txBody>
+      </p:sp>
+    </p:spTree>
+    <p:extLst>
+      <p:ext uri="{BB962C8B-B14F-4D97-AF65-F5344CB8AC3E}">
+        <p14:creationId xmlns:p14="http://schemas.microsoft.com/office/powerpoint/2010/main" val="96592918"/>
+      </p:ext>
+    </p:extLst>
+  </p:cSld>
+  <p:clrMapOvr>
+    <a:masterClrMapping/>
+  </p:clrMapOvr>
+</p:notes>
+</file>
+
+<file path=ppt/notesSlides/notesSlide23.xml><?xml version="1.0" encoding="utf-8"?>
+<p:notes xmlns:a="http://schemas.openxmlformats.org/drawingml/2006/main" xmlns:r="http://schemas.openxmlformats.org/officeDocument/2006/relationships" xmlns:p="http://schemas.openxmlformats.org/presentationml/2006/main">
+  <p:cSld>
+    <p:spTree>
+      <p:nvGrpSpPr>
+        <p:cNvPr id="1" name=""/>
+        <p:cNvGrpSpPr/>
+        <p:nvPr/>
+      </p:nvGrpSpPr>
+      <p:grpSpPr>
+        <a:xfrm>
+          <a:off x="0" y="0"/>
+          <a:ext cx="0" cy="0"/>
+          <a:chOff x="0" y="0"/>
+          <a:chExt cx="0" cy="0"/>
+        </a:xfrm>
+      </p:grpSpPr>
+      <p:sp>
+        <p:nvSpPr>
+          <p:cNvPr id="2" name="Slide Image Placeholder 1"/>
+          <p:cNvSpPr>
+            <a:spLocks noGrp="1" noRot="1" noChangeAspect="1"/>
+          </p:cNvSpPr>
+          <p:nvPr>
+            <p:ph type="sldImg"/>
+          </p:nvPr>
+        </p:nvSpPr>
+        <p:spPr/>
+      </p:sp>
+      <p:sp>
+        <p:nvSpPr>
+          <p:cNvPr id="3" name="Notes Placeholder 2"/>
+          <p:cNvSpPr>
+            <a:spLocks noGrp="1"/>
+          </p:cNvSpPr>
+          <p:nvPr>
+            <p:ph type="body" idx="1"/>
+          </p:nvPr>
+        </p:nvSpPr>
+        <p:spPr/>
+        <p:txBody>
+          <a:bodyPr/>
+          <a:lstStyle/>
+          <a:p>
+            <a:r>
+              <a:rPr lang="sr-Latn-RS" dirty="0"/>
+              <a:t>PRAVIMO GRAD TAKO STO SVAKU PODEKVENCU UZIMAMO I DELIMO NA 2 DELA, UKOLIKO CVOR VEC POSTOJI NE DUPLIRAMO GA, SVOROVI SU UVEK JEDINSVENI</a:t>
+            </a:r>
+          </a:p>
+          <a:p>
+            <a:endParaRPr lang="sr-Latn-RS" dirty="0"/>
+          </a:p>
+          <a:p>
+            <a:r>
+              <a:rPr lang="sr-Latn-RS" dirty="0"/>
+              <a:t>REŠENJE SE DOBIJA NALAŽENJEM OJLEROVOG PUTA</a:t>
+            </a:r>
+            <a:endParaRPr lang="en-US" dirty="0"/>
+          </a:p>
+        </p:txBody>
+      </p:sp>
+      <p:sp>
+        <p:nvSpPr>
+          <p:cNvPr id="4" name="Slide Number Placeholder 3"/>
+          <p:cNvSpPr>
+            <a:spLocks noGrp="1"/>
+          </p:cNvSpPr>
+          <p:nvPr>
+            <p:ph type="sldNum" sz="quarter" idx="5"/>
+          </p:nvPr>
+        </p:nvSpPr>
+        <p:spPr/>
+        <p:txBody>
+          <a:bodyPr/>
+          <a:lstStyle/>
+          <a:p>
+            <a:fld id="{4B43ADDB-6817-475F-AC27-9281D9F320C3}" type="slidenum">
+              <a:rPr lang="en-US" smtClean="0"/>
+              <a:t>27</a:t>
+            </a:fld>
+            <a:endParaRPr lang="en-US"/>
+          </a:p>
+        </p:txBody>
+      </p:sp>
+    </p:spTree>
+    <p:extLst>
+      <p:ext uri="{BB962C8B-B14F-4D97-AF65-F5344CB8AC3E}">
+        <p14:creationId xmlns:p14="http://schemas.microsoft.com/office/powerpoint/2010/main" val="2066347447"/>
+      </p:ext>
+    </p:extLst>
+  </p:cSld>
+  <p:clrMapOvr>
+    <a:masterClrMapping/>
+  </p:clrMapOvr>
+</p:notes>
+</file>
+
+<file path=ppt/notesSlides/notesSlide24.xml><?xml version="1.0" encoding="utf-8"?>
+<p:notes xmlns:a="http://schemas.openxmlformats.org/drawingml/2006/main" xmlns:r="http://schemas.openxmlformats.org/officeDocument/2006/relationships" xmlns:p="http://schemas.openxmlformats.org/presentationml/2006/main">
+  <p:cSld>
+    <p:spTree>
+      <p:nvGrpSpPr>
+        <p:cNvPr id="1" name=""/>
+        <p:cNvGrpSpPr/>
+        <p:nvPr/>
+      </p:nvGrpSpPr>
+      <p:grpSpPr>
+        <a:xfrm>
+          <a:off x="0" y="0"/>
+          <a:ext cx="0" cy="0"/>
+          <a:chOff x="0" y="0"/>
+          <a:chExt cx="0" cy="0"/>
+        </a:xfrm>
+      </p:grpSpPr>
+      <p:sp>
+        <p:nvSpPr>
+          <p:cNvPr id="2" name="Slide Image Placeholder 1"/>
+          <p:cNvSpPr>
+            <a:spLocks noGrp="1" noRot="1" noChangeAspect="1"/>
+          </p:cNvSpPr>
+          <p:nvPr>
+            <p:ph type="sldImg"/>
+          </p:nvPr>
+        </p:nvSpPr>
+        <p:spPr/>
+      </p:sp>
+      <p:sp>
+        <p:nvSpPr>
+          <p:cNvPr id="3" name="Notes Placeholder 2"/>
+          <p:cNvSpPr>
+            <a:spLocks noGrp="1"/>
+          </p:cNvSpPr>
+          <p:nvPr>
+            <p:ph type="body" idx="1"/>
+          </p:nvPr>
+        </p:nvSpPr>
+        <p:spPr/>
+        <p:txBody>
+          <a:bodyPr/>
+          <a:lstStyle/>
+          <a:p>
+            <a:r>
+              <a:rPr lang="sr-Latn-RS" dirty="0"/>
+              <a:t>KRENI OBJASNJENJJE SA KOCKICOM DA VEROVATNOCA DA SE PADNE JEDAN BROJ JE 1/6 A AKO BACAMO MNOGO PUTA TI BROJEVI CE BITI BLISKI U KLASTERIMA</a:t>
+            </a:r>
+          </a:p>
+          <a:p>
+            <a:endParaRPr lang="sr-Latn-RS" dirty="0"/>
+          </a:p>
+          <a:p>
+            <a:r>
+              <a:rPr lang="sr-Latn-RS" dirty="0"/>
+              <a:t>NAKON TOGA TREBA DA SE PRICA AKO SE NESTO POJAVI 2 X Fbase DA TOGA IMA DUPLO VISE, PRIMER SA KOCKICOM AKO BI IMALA 2 BROJA 6</a:t>
+            </a:r>
+            <a:endParaRPr lang="en-US" dirty="0"/>
+          </a:p>
+        </p:txBody>
+      </p:sp>
+      <p:sp>
+        <p:nvSpPr>
+          <p:cNvPr id="4" name="Slide Number Placeholder 3"/>
+          <p:cNvSpPr>
+            <a:spLocks noGrp="1"/>
+          </p:cNvSpPr>
+          <p:nvPr>
+            <p:ph type="sldNum" sz="quarter" idx="5"/>
+          </p:nvPr>
+        </p:nvSpPr>
+        <p:spPr/>
+        <p:txBody>
+          <a:bodyPr/>
+          <a:lstStyle/>
+          <a:p>
+            <a:fld id="{4B43ADDB-6817-475F-AC27-9281D9F320C3}" type="slidenum">
+              <a:rPr lang="en-US" smtClean="0"/>
+              <a:t>29</a:t>
+            </a:fld>
+            <a:endParaRPr lang="en-US"/>
+          </a:p>
+        </p:txBody>
+      </p:sp>
+    </p:spTree>
+    <p:extLst>
+      <p:ext uri="{BB962C8B-B14F-4D97-AF65-F5344CB8AC3E}">
+        <p14:creationId xmlns:p14="http://schemas.microsoft.com/office/powerpoint/2010/main" val="3934903842"/>
+      </p:ext>
+    </p:extLst>
+  </p:cSld>
+  <p:clrMapOvr>
+    <a:masterClrMapping/>
+  </p:clrMapOvr>
+</p:notes>
+</file>
+
+<file path=ppt/notesSlides/notesSlide25.xml><?xml version="1.0" encoding="utf-8"?>
+<p:notes xmlns:a="http://schemas.openxmlformats.org/drawingml/2006/main" xmlns:r="http://schemas.openxmlformats.org/officeDocument/2006/relationships" xmlns:p="http://schemas.openxmlformats.org/presentationml/2006/main">
+  <p:cSld>
+    <p:spTree>
+      <p:nvGrpSpPr>
+        <p:cNvPr id="1" name=""/>
+        <p:cNvGrpSpPr/>
+        <p:nvPr/>
+      </p:nvGrpSpPr>
+      <p:grpSpPr>
+        <a:xfrm>
+          <a:off x="0" y="0"/>
+          <a:ext cx="0" cy="0"/>
+          <a:chOff x="0" y="0"/>
+          <a:chExt cx="0" cy="0"/>
+        </a:xfrm>
+      </p:grpSpPr>
+      <p:sp>
+        <p:nvSpPr>
+          <p:cNvPr id="2" name="Slide Image Placeholder 1"/>
+          <p:cNvSpPr>
+            <a:spLocks noGrp="1" noRot="1" noChangeAspect="1"/>
+          </p:cNvSpPr>
+          <p:nvPr>
+            <p:ph type="sldImg"/>
+          </p:nvPr>
+        </p:nvSpPr>
+        <p:spPr/>
+      </p:sp>
+      <p:sp>
+        <p:nvSpPr>
+          <p:cNvPr id="3" name="Notes Placeholder 2"/>
+          <p:cNvSpPr>
+            <a:spLocks noGrp="1"/>
+          </p:cNvSpPr>
+          <p:nvPr>
+            <p:ph type="body" idx="1"/>
+          </p:nvPr>
+        </p:nvSpPr>
+        <p:spPr/>
+        <p:txBody>
+          <a:bodyPr/>
+          <a:lstStyle/>
+          <a:p>
+            <a:pPr>
+              <a:buFont typeface="Arial" panose="020B0604020202020204" pitchFamily="34" charset="0"/>
+              <a:buNone/>
+            </a:pPr>
+            <a:r>
+              <a:rPr lang="sr-Latn-RS" sz="1200" dirty="0"/>
+              <a:t>Ograničenja i napomene</a:t>
+            </a:r>
+            <a:br>
+              <a:rPr lang="sr-Latn-RS" sz="1200" dirty="0"/>
+            </a:br>
+            <a:br>
+              <a:rPr lang="sr-Latn-RS" sz="1200" dirty="0"/>
+            </a:br>
+            <a:r>
+              <a:rPr lang="sr-Cyrl-RS" sz="1200" dirty="0"/>
+              <a:t>Не постоји једно решење реконструкције.</a:t>
+            </a:r>
+            <a:endParaRPr lang="sr-Latn-RS" sz="1200" dirty="0"/>
+          </a:p>
+          <a:p>
+            <a:pPr>
+              <a:buFont typeface="Arial" panose="020B0604020202020204" pitchFamily="34" charset="0"/>
+              <a:buNone/>
+            </a:pPr>
+            <a:endParaRPr lang="sr-Latn-RS" sz="1200" dirty="0"/>
+          </a:p>
+          <a:p>
+            <a:pPr>
+              <a:buFont typeface="Arial" panose="020B0604020202020204" pitchFamily="34" charset="0"/>
+              <a:buNone/>
+            </a:pPr>
+            <a:r>
+              <a:rPr lang="sr-Latn-RS" sz="1200" dirty="0"/>
+              <a:t>MOZEMO DA IDEMO NA 2 RALZICITE PUTANJE OVDE ALI TO JE DOVOLJNO DOBRO RESENJE</a:t>
+            </a:r>
+            <a:endParaRPr lang="sr-Cyrl-RS" sz="1200" dirty="0"/>
+          </a:p>
+          <a:p>
+            <a:pPr>
+              <a:buFont typeface="Arial" panose="020B0604020202020204" pitchFamily="34" charset="0"/>
+              <a:buChar char="•"/>
+            </a:pPr>
+            <a:endParaRPr lang="sr-Cyrl-RS" sz="1200" dirty="0"/>
+          </a:p>
+          <a:p>
+            <a:pPr>
+              <a:buFont typeface="Arial" panose="020B0604020202020204" pitchFamily="34" charset="0"/>
+              <a:buChar char="•"/>
+            </a:pPr>
+            <a:r>
+              <a:rPr lang="sr-Cyrl-RS" sz="1200" dirty="0"/>
+              <a:t>Потребан је велики број посматрања.</a:t>
+            </a:r>
+            <a:endParaRPr lang="en-US" sz="1200" dirty="0"/>
+          </a:p>
+          <a:p>
+            <a:endParaRPr lang="en-US" dirty="0"/>
+          </a:p>
+        </p:txBody>
+      </p:sp>
+      <p:sp>
+        <p:nvSpPr>
+          <p:cNvPr id="4" name="Slide Number Placeholder 3"/>
+          <p:cNvSpPr>
+            <a:spLocks noGrp="1"/>
+          </p:cNvSpPr>
+          <p:nvPr>
+            <p:ph type="sldNum" sz="quarter" idx="5"/>
+          </p:nvPr>
+        </p:nvSpPr>
+        <p:spPr/>
+        <p:txBody>
+          <a:bodyPr/>
+          <a:lstStyle/>
+          <a:p>
+            <a:fld id="{4B43ADDB-6817-475F-AC27-9281D9F320C3}" type="slidenum">
+              <a:rPr lang="en-US" smtClean="0"/>
+              <a:t>31</a:t>
+            </a:fld>
+            <a:endParaRPr lang="en-US"/>
+          </a:p>
+        </p:txBody>
+      </p:sp>
+    </p:spTree>
+    <p:extLst>
+      <p:ext uri="{BB962C8B-B14F-4D97-AF65-F5344CB8AC3E}">
+        <p14:creationId xmlns:p14="http://schemas.microsoft.com/office/powerpoint/2010/main" val="482664667"/>
+      </p:ext>
+    </p:extLst>
+  </p:cSld>
+  <p:clrMapOvr>
+    <a:masterClrMapping/>
+  </p:clrMapOvr>
+</p:notes>
+</file>
+
+<file path=ppt/notesSlides/notesSlide26.xml><?xml version="1.0" encoding="utf-8"?>
+<p:notes xmlns:a="http://schemas.openxmlformats.org/drawingml/2006/main" xmlns:r="http://schemas.openxmlformats.org/officeDocument/2006/relationships" xmlns:p="http://schemas.openxmlformats.org/presentationml/2006/main">
+  <p:cSld>
+    <p:spTree>
+      <p:nvGrpSpPr>
+        <p:cNvPr id="1" name=""/>
+        <p:cNvGrpSpPr/>
+        <p:nvPr/>
+      </p:nvGrpSpPr>
+      <p:grpSpPr>
+        <a:xfrm>
+          <a:off x="0" y="0"/>
+          <a:ext cx="0" cy="0"/>
+          <a:chOff x="0" y="0"/>
+          <a:chExt cx="0" cy="0"/>
+        </a:xfrm>
+      </p:grpSpPr>
+      <p:sp>
+        <p:nvSpPr>
+          <p:cNvPr id="2" name="Slide Image Placeholder 1"/>
+          <p:cNvSpPr>
+            <a:spLocks noGrp="1" noRot="1" noChangeAspect="1"/>
+          </p:cNvSpPr>
+          <p:nvPr>
+            <p:ph type="sldImg"/>
+          </p:nvPr>
+        </p:nvSpPr>
+        <p:spPr/>
+      </p:sp>
+      <p:sp>
+        <p:nvSpPr>
+          <p:cNvPr id="3" name="Notes Placeholder 2"/>
+          <p:cNvSpPr>
+            <a:spLocks noGrp="1"/>
+          </p:cNvSpPr>
+          <p:nvPr>
+            <p:ph type="body" idx="1"/>
+          </p:nvPr>
+        </p:nvSpPr>
+        <p:spPr/>
+        <p:txBody>
+          <a:bodyPr/>
+          <a:lstStyle/>
+          <a:p>
+            <a:pPr>
+              <a:buFont typeface="Arial" panose="020B0604020202020204" pitchFamily="34" charset="0"/>
+              <a:buChar char="•"/>
+            </a:pPr>
+            <a:r>
+              <a:rPr lang="sr-Latn-RS" sz="1200" dirty="0"/>
+              <a:t>SADA KADA IMAMO GENERATIVNU KOMPONENTU POTREBNO JE DA VIDIMO NA KOJI NAČIN JE NAJBOLJE ISPROJEKTOVATI EVALUACIONU KOMPONENTU</a:t>
+            </a:r>
+          </a:p>
+          <a:p>
+            <a:pPr>
+              <a:buFont typeface="Arial" panose="020B0604020202020204" pitchFamily="34" charset="0"/>
+              <a:buChar char="•"/>
+            </a:pPr>
+            <a:r>
+              <a:rPr lang="sr-Latn-RS" sz="1200" dirty="0"/>
+              <a:t>‚</a:t>
+            </a:r>
+          </a:p>
+          <a:p>
+            <a:pPr>
+              <a:buFont typeface="Arial" panose="020B0604020202020204" pitchFamily="34" charset="0"/>
+              <a:buChar char="•"/>
+            </a:pPr>
+            <a:r>
+              <a:rPr lang="sr-Latn-RS" sz="1200" dirty="0"/>
+              <a:t>TREBA NAM DA SISTEM RADI ŠTO EFIKASNIJE ZA MNOGO KORISNIKA</a:t>
+            </a:r>
+          </a:p>
+          <a:p>
+            <a:pPr>
+              <a:buFont typeface="Arial" panose="020B0604020202020204" pitchFamily="34" charset="0"/>
+              <a:buChar char="•"/>
+            </a:pPr>
+            <a:endParaRPr lang="sr-Latn-RS" sz="1200" dirty="0"/>
+          </a:p>
+          <a:p>
+            <a:pPr>
+              <a:buFont typeface="Arial" panose="020B0604020202020204" pitchFamily="34" charset="0"/>
+              <a:buChar char="•"/>
+            </a:pPr>
+            <a:r>
+              <a:rPr lang="sr-Cyrl-RS" sz="1200" dirty="0"/>
+              <a:t>Секвенцијална евалуација</a:t>
+            </a:r>
+          </a:p>
+          <a:p>
+            <a:pPr>
+              <a:buFont typeface="Arial" panose="020B0604020202020204" pitchFamily="34" charset="0"/>
+              <a:buChar char="•"/>
+            </a:pPr>
+            <a:endParaRPr lang="sr-Cyrl-RS" sz="1200" dirty="0"/>
+          </a:p>
+          <a:p>
+            <a:pPr>
+              <a:buFont typeface="Arial" panose="020B0604020202020204" pitchFamily="34" charset="0"/>
+              <a:buChar char="•"/>
+            </a:pPr>
+            <a:r>
+              <a:rPr lang="sr-Cyrl-RS" sz="1200" dirty="0"/>
+              <a:t>Евалуација помоћу </a:t>
+            </a:r>
+            <a:r>
+              <a:rPr lang="sr-Cyrl-RS" sz="1200" dirty="0" err="1"/>
+              <a:t>хеш</a:t>
+            </a:r>
+            <a:r>
+              <a:rPr lang="sr-Cyrl-RS" sz="1200" dirty="0"/>
+              <a:t> табеле</a:t>
+            </a:r>
+          </a:p>
+          <a:p>
+            <a:pPr>
+              <a:buFont typeface="Arial" panose="020B0604020202020204" pitchFamily="34" charset="0"/>
+              <a:buChar char="•"/>
+            </a:pPr>
+            <a:endParaRPr lang="sr-Cyrl-RS" sz="1200" dirty="0"/>
+          </a:p>
+          <a:p>
+            <a:pPr>
+              <a:buFont typeface="Arial" panose="020B0604020202020204" pitchFamily="34" charset="0"/>
+              <a:buChar char="•"/>
+            </a:pPr>
+            <a:r>
+              <a:rPr lang="sr-Cyrl-RS" sz="1200" dirty="0"/>
+              <a:t>Евалуација помоћу индексног стабла</a:t>
+            </a:r>
+            <a:endParaRPr lang="en-US" sz="1200" dirty="0"/>
+          </a:p>
+          <a:p>
+            <a:endParaRPr lang="en-US" dirty="0"/>
+          </a:p>
+        </p:txBody>
+      </p:sp>
+      <p:sp>
+        <p:nvSpPr>
+          <p:cNvPr id="4" name="Slide Number Placeholder 3"/>
+          <p:cNvSpPr>
+            <a:spLocks noGrp="1"/>
+          </p:cNvSpPr>
+          <p:nvPr>
+            <p:ph type="sldNum" sz="quarter" idx="5"/>
+          </p:nvPr>
+        </p:nvSpPr>
+        <p:spPr/>
+        <p:txBody>
+          <a:bodyPr/>
+          <a:lstStyle/>
+          <a:p>
+            <a:fld id="{4B43ADDB-6817-475F-AC27-9281D9F320C3}" type="slidenum">
+              <a:rPr lang="en-US" smtClean="0"/>
               <a:t>32</a:t>
             </a:fld>
             <a:endParaRPr lang="en-US"/>
@@ -2180,6 +2784,182 @@
     <p:extLst>
       <p:ext uri="{BB962C8B-B14F-4D97-AF65-F5344CB8AC3E}">
         <p14:creationId xmlns:p14="http://schemas.microsoft.com/office/powerpoint/2010/main" val="2377466713"/>
+      </p:ext>
+    </p:extLst>
+  </p:cSld>
+  <p:clrMapOvr>
+    <a:masterClrMapping/>
+  </p:clrMapOvr>
+</p:notes>
+</file>
+
+<file path=ppt/notesSlides/notesSlide27.xml><?xml version="1.0" encoding="utf-8"?>
+<p:notes xmlns:a="http://schemas.openxmlformats.org/drawingml/2006/main" xmlns:r="http://schemas.openxmlformats.org/officeDocument/2006/relationships" xmlns:p="http://schemas.openxmlformats.org/presentationml/2006/main">
+  <p:cSld>
+    <p:spTree>
+      <p:nvGrpSpPr>
+        <p:cNvPr id="1" name=""/>
+        <p:cNvGrpSpPr/>
+        <p:nvPr/>
+      </p:nvGrpSpPr>
+      <p:grpSpPr>
+        <a:xfrm>
+          <a:off x="0" y="0"/>
+          <a:ext cx="0" cy="0"/>
+          <a:chOff x="0" y="0"/>
+          <a:chExt cx="0" cy="0"/>
+        </a:xfrm>
+      </p:grpSpPr>
+      <p:sp>
+        <p:nvSpPr>
+          <p:cNvPr id="2" name="Slide Image Placeholder 1"/>
+          <p:cNvSpPr>
+            <a:spLocks noGrp="1" noRot="1" noChangeAspect="1"/>
+          </p:cNvSpPr>
+          <p:nvPr>
+            <p:ph type="sldImg"/>
+          </p:nvPr>
+        </p:nvSpPr>
+        <p:spPr/>
+      </p:sp>
+      <p:sp>
+        <p:nvSpPr>
+          <p:cNvPr id="3" name="Notes Placeholder 2"/>
+          <p:cNvSpPr>
+            <a:spLocks noGrp="1"/>
+          </p:cNvSpPr>
+          <p:nvPr>
+            <p:ph type="body" idx="1"/>
+          </p:nvPr>
+        </p:nvSpPr>
+        <p:spPr/>
+        <p:txBody>
+          <a:bodyPr/>
+          <a:lstStyle/>
+          <a:p>
+            <a:r>
+              <a:rPr lang="sr-Latn-RS" dirty="0"/>
+              <a:t>IDEJA JE DA PAMTIMO NIZOVE KOJI OZNACAVAJU POZICIJU VRSTE U SVAKOJ KOLONI VIDLJIVOG PROZORA I ZA SVAKU PUTANJU PROVERAVAMO PREFIKS</a:t>
+            </a:r>
+            <a:endParaRPr lang="en-US" dirty="0"/>
+          </a:p>
+        </p:txBody>
+      </p:sp>
+      <p:sp>
+        <p:nvSpPr>
+          <p:cNvPr id="4" name="Slide Number Placeholder 3"/>
+          <p:cNvSpPr>
+            <a:spLocks noGrp="1"/>
+          </p:cNvSpPr>
+          <p:nvPr>
+            <p:ph type="sldNum" sz="quarter" idx="5"/>
+          </p:nvPr>
+        </p:nvSpPr>
+        <p:spPr/>
+        <p:txBody>
+          <a:bodyPr/>
+          <a:lstStyle/>
+          <a:p>
+            <a:fld id="{4B43ADDB-6817-475F-AC27-9281D9F320C3}" type="slidenum">
+              <a:rPr lang="en-US" smtClean="0"/>
+              <a:t>33</a:t>
+            </a:fld>
+            <a:endParaRPr lang="en-US"/>
+          </a:p>
+        </p:txBody>
+      </p:sp>
+    </p:spTree>
+    <p:extLst>
+      <p:ext uri="{BB962C8B-B14F-4D97-AF65-F5344CB8AC3E}">
+        <p14:creationId xmlns:p14="http://schemas.microsoft.com/office/powerpoint/2010/main" val="3631599874"/>
+      </p:ext>
+    </p:extLst>
+  </p:cSld>
+  <p:clrMapOvr>
+    <a:masterClrMapping/>
+  </p:clrMapOvr>
+</p:notes>
+</file>
+
+<file path=ppt/notesSlides/notesSlide28.xml><?xml version="1.0" encoding="utf-8"?>
+<p:notes xmlns:a="http://schemas.openxmlformats.org/drawingml/2006/main" xmlns:r="http://schemas.openxmlformats.org/officeDocument/2006/relationships" xmlns:p="http://schemas.openxmlformats.org/presentationml/2006/main">
+  <p:cSld>
+    <p:spTree>
+      <p:nvGrpSpPr>
+        <p:cNvPr id="1" name=""/>
+        <p:cNvGrpSpPr/>
+        <p:nvPr/>
+      </p:nvGrpSpPr>
+      <p:grpSpPr>
+        <a:xfrm>
+          <a:off x="0" y="0"/>
+          <a:ext cx="0" cy="0"/>
+          <a:chOff x="0" y="0"/>
+          <a:chExt cx="0" cy="0"/>
+        </a:xfrm>
+      </p:grpSpPr>
+      <p:sp>
+        <p:nvSpPr>
+          <p:cNvPr id="2" name="Slide Image Placeholder 1"/>
+          <p:cNvSpPr>
+            <a:spLocks noGrp="1" noRot="1" noChangeAspect="1"/>
+          </p:cNvSpPr>
+          <p:nvPr>
+            <p:ph type="sldImg"/>
+          </p:nvPr>
+        </p:nvSpPr>
+        <p:spPr/>
+      </p:sp>
+      <p:sp>
+        <p:nvSpPr>
+          <p:cNvPr id="3" name="Notes Placeholder 2"/>
+          <p:cNvSpPr>
+            <a:spLocks noGrp="1"/>
+          </p:cNvSpPr>
+          <p:nvPr>
+            <p:ph type="body" idx="1"/>
+          </p:nvPr>
+        </p:nvSpPr>
+        <p:spPr/>
+        <p:txBody>
+          <a:bodyPr/>
+          <a:lstStyle/>
+          <a:p>
+            <a:r>
+              <a:rPr lang="sr-Latn-RS" dirty="0"/>
+              <a:t>OBJASNI PSEUDO KOD I SLOŽENOST, NAPOMENI DA OVDE IMA I MEMORIJSKA SLOŽENOST I VREME DA SE SPAKUJE TABELA ALI DA SE TOP RADI SAMO PRIPOKRETANJU</a:t>
+            </a:r>
+            <a:endParaRPr lang="en-US" dirty="0"/>
+          </a:p>
+        </p:txBody>
+      </p:sp>
+      <p:sp>
+        <p:nvSpPr>
+          <p:cNvPr id="4" name="Slide Number Placeholder 3"/>
+          <p:cNvSpPr>
+            <a:spLocks noGrp="1"/>
+          </p:cNvSpPr>
+          <p:nvPr>
+            <p:ph type="sldNum" sz="quarter" idx="5"/>
+          </p:nvPr>
+        </p:nvSpPr>
+        <p:spPr/>
+        <p:txBody>
+          <a:bodyPr/>
+          <a:lstStyle/>
+          <a:p>
+            <a:fld id="{4B43ADDB-6817-475F-AC27-9281D9F320C3}" type="slidenum">
+              <a:rPr lang="en-US" smtClean="0"/>
+              <a:t>36</a:t>
+            </a:fld>
+            <a:endParaRPr lang="en-US"/>
+          </a:p>
+        </p:txBody>
+      </p:sp>
+    </p:spTree>
+    <p:extLst>
+      <p:ext uri="{BB962C8B-B14F-4D97-AF65-F5344CB8AC3E}">
+        <p14:creationId xmlns:p14="http://schemas.microsoft.com/office/powerpoint/2010/main" val="1007066252"/>
       </p:ext>
     </p:extLst>
   </p:cSld>
@@ -2324,6 +3104,15 @@
               <a:rPr lang="sr-Latn-RS" dirty="0"/>
               <a:t>Skup od nekoliko ciklične token sekvence.</a:t>
             </a:r>
+          </a:p>
+          <a:p>
+            <a:endParaRPr lang="sr-Latn-RS" dirty="0"/>
+          </a:p>
+          <a:p>
+            <a:r>
+              <a:rPr lang="sr-Latn-RS" dirty="0"/>
+              <a:t>NAKON OVOGA IDE ITERACIJA SISTEMA – IZ TE MATRICE TREBA DA SE GENERIŠE NEŠTO</a:t>
+            </a:r>
             <a:endParaRPr lang="en-US" dirty="0"/>
           </a:p>
         </p:txBody>
@@ -2818,6 +3607,21 @@
             <a:r>
               <a:rPr lang="sr-Latn-RS" dirty="0"/>
               <a:t>Evaluacija se radi po sekvencama a evaluaciona putanja definiše koje pozicije ulaze u koju sekvencu.</a:t>
+            </a:r>
+          </a:p>
+          <a:p>
+            <a:r>
+              <a:rPr lang="sr-Latn-RS" dirty="0"/>
+              <a:t>IZ MATRICE IZVLAČIMO EVALUACIONE SEKVENCE PO UNAPRED DEFINISANIM PUTANJAMA</a:t>
+            </a:r>
+          </a:p>
+          <a:p>
+            <a:endParaRPr lang="sr-Latn-RS" dirty="0"/>
+          </a:p>
+          <a:p>
+            <a:r>
+              <a:rPr lang="sr-Latn-RS" dirty="0"/>
+              <a:t>EVALUACI SE NAJČEŠĆE VRŠI TAKO ŠTO SE POSMATRA PREFIKS EVALUACIONE SEKVENCE I TRAŽI SE NAJVEĆE POKLAPANJE PRVOG TOKENA S LEVA NA DESNO</a:t>
             </a:r>
             <a:endParaRPr lang="en-US" dirty="0"/>
           </a:p>
@@ -3085,7 +3889,7 @@
           <a:p>
             <a:fld id="{96DFF08F-DC6B-4601-B491-B0F83F6DD2DA}" type="datetimeFigureOut">
               <a:rPr lang="en-US" dirty="0"/>
-              <a:t>22. 07. 2026.</a:t>
+              <a:t>30. 07. 2026.</a:t>
             </a:fld>
             <a:endParaRPr lang="en-US" dirty="0"/>
           </a:p>
@@ -3288,7 +4092,7 @@
           <a:p>
             <a:fld id="{96DFF08F-DC6B-4601-B491-B0F83F6DD2DA}" type="datetimeFigureOut">
               <a:rPr lang="en-US" dirty="0"/>
-              <a:t>22. 07. 2026.</a:t>
+              <a:t>30. 07. 2026.</a:t>
             </a:fld>
             <a:endParaRPr lang="en-US" dirty="0"/>
           </a:p>
@@ -3539,7 +4343,7 @@
           <a:p>
             <a:fld id="{96DFF08F-DC6B-4601-B491-B0F83F6DD2DA}" type="datetimeFigureOut">
               <a:rPr lang="en-US" dirty="0"/>
-              <a:t>22. 07. 2026.</a:t>
+              <a:t>30. 07. 2026.</a:t>
             </a:fld>
             <a:endParaRPr lang="en-US" dirty="0"/>
           </a:p>
@@ -3704,7 +4508,7 @@
           <a:p>
             <a:fld id="{D62CEF3B-A037-46D0-B02C-1428F07E9383}" type="datetimeFigureOut">
               <a:rPr lang="en-US" dirty="0"/>
-              <a:t>22. 07. 2026.</a:t>
+              <a:t>30. 07. 2026.</a:t>
             </a:fld>
             <a:endParaRPr lang="en-US" dirty="0"/>
           </a:p>
@@ -4042,7 +4846,7 @@
           <a:p>
             <a:fld id="{96DFF08F-DC6B-4601-B491-B0F83F6DD2DA}" type="datetimeFigureOut">
               <a:rPr lang="en-US" dirty="0"/>
-              <a:t>22. 07. 2026.</a:t>
+              <a:t>30. 07. 2026.</a:t>
             </a:fld>
             <a:endParaRPr lang="en-US" dirty="0"/>
           </a:p>
@@ -4312,7 +5116,7 @@
           <a:p>
             <a:fld id="{96DFF08F-DC6B-4601-B491-B0F83F6DD2DA}" type="datetimeFigureOut">
               <a:rPr lang="en-US" dirty="0"/>
-              <a:t>22. 07. 2026.</a:t>
+              <a:t>30. 07. 2026.</a:t>
             </a:fld>
             <a:endParaRPr lang="en-US" dirty="0"/>
           </a:p>
@@ -4686,7 +5490,7 @@
           <a:p>
             <a:fld id="{96DFF08F-DC6B-4601-B491-B0F83F6DD2DA}" type="datetimeFigureOut">
               <a:rPr lang="en-US" dirty="0"/>
-              <a:t>22. 07. 2026.</a:t>
+              <a:t>30. 07. 2026.</a:t>
             </a:fld>
             <a:endParaRPr lang="en-US" dirty="0"/>
           </a:p>
@@ -4799,7 +5603,7 @@
           <a:p>
             <a:fld id="{96DFF08F-DC6B-4601-B491-B0F83F6DD2DA}" type="datetimeFigureOut">
               <a:rPr lang="en-US" dirty="0"/>
-              <a:t>22. 07. 2026.</a:t>
+              <a:t>30. 07. 2026.</a:t>
             </a:fld>
             <a:endParaRPr lang="en-US" dirty="0"/>
           </a:p>
@@ -4966,7 +5770,7 @@
             <a:fld id="{96DFF08F-DC6B-4601-B491-B0F83F6DD2DA}" type="datetimeFigureOut">
               <a:rPr lang="en-US" dirty="0"/>
               <a:pPr/>
-              <a:t>22. 07. 2026.</a:t>
+              <a:t>30. 07. 2026.</a:t>
             </a:fld>
             <a:endParaRPr lang="en-US" dirty="0"/>
           </a:p>
@@ -5317,7 +6121,7 @@
             <a:fld id="{96DFF08F-DC6B-4601-B491-B0F83F6DD2DA}" type="datetimeFigureOut">
               <a:rPr lang="en-US" dirty="0"/>
               <a:pPr/>
-              <a:t>22. 07. 2026.</a:t>
+              <a:t>30. 07. 2026.</a:t>
             </a:fld>
             <a:endParaRPr lang="en-US" dirty="0"/>
           </a:p>
@@ -5690,7 +6494,7 @@
           <a:p>
             <a:fld id="{96DFF08F-DC6B-4601-B491-B0F83F6DD2DA}" type="datetimeFigureOut">
               <a:rPr lang="en-US" dirty="0"/>
-              <a:t>22. 07. 2026.</a:t>
+              <a:t>30. 07. 2026.</a:t>
             </a:fld>
             <a:endParaRPr lang="en-US" dirty="0"/>
           </a:p>
@@ -5973,7 +6777,7 @@
             <a:fld id="{96DFF08F-DC6B-4601-B491-B0F83F6DD2DA}" type="datetimeFigureOut">
               <a:rPr lang="en-US" dirty="0"/>
               <a:pPr/>
-              <a:t>22. 07. 2026.</a:t>
+              <a:t>30. 07. 2026.</a:t>
             </a:fld>
             <a:endParaRPr lang="en-US" dirty="0"/>
           </a:p>
@@ -6519,7 +7323,19 @@
             <a:pPr algn="ctr"/>
             <a:r>
               <a:rPr lang="sr-Cyrl-RS" sz="3600" b="1" dirty="0"/>
-              <a:t>МАТЕМАТИЧКО МОДЕЛОВАЊЕ СИСТЕМА ЗА ПСЕУДО-СЛУЧАНО ГЕНЕРИСАЊЕ ТОКЕНА И ЕВАЛУАЦИЈУ КОМБИНАЦИЈА НАД ДИСКРЕТНИМ МАТРИЦАМА</a:t>
+              <a:t>МАТЕМАТИЧКО МОДЕЛОВАЊЕ СИСТЕМА ЗА ПСЕУДО-СЛУЧА</a:t>
+            </a:r>
+            <a:r>
+              <a:rPr lang="sr-Latn-RS" sz="3600" b="1"/>
+              <a:t>J</a:t>
+            </a:r>
+            <a:r>
+              <a:rPr lang="sr-Cyrl-RS" sz="3600" b="1"/>
+              <a:t>НО </a:t>
+            </a:r>
+            <a:r>
+              <a:rPr lang="sr-Cyrl-RS" sz="3600" b="1" dirty="0"/>
+              <a:t>ГЕНЕРИСАЊЕ ТОКЕНА И ЕВАЛУАЦИЈУ КОМБИНАЦИЈА НАД ДИСКРЕТНИМ МАТРИЦАМА</a:t>
             </a:r>
             <a:endParaRPr lang="en-US" sz="3600" b="1" dirty="0"/>
           </a:p>
@@ -6745,7 +7561,7 @@
         <p:spPr>
           <a:xfrm>
             <a:off x="8876887" y="4804252"/>
-            <a:ext cx="2495043" cy="923330"/>
+            <a:ext cx="2495042" cy="646331"/>
           </a:xfrm>
           <a:prstGeom prst="rect">
             <a:avLst/>
@@ -6762,13 +7578,6 @@
             <a:r>
               <a:rPr lang="sr-Cyrl-RS" dirty="0"/>
               <a:t>МЕНТОР:</a:t>
-            </a:r>
-          </a:p>
-          <a:p>
-            <a:pPr algn="ctr"/>
-            <a:r>
-              <a:rPr lang="sr-Cyrl-RS" dirty="0"/>
-              <a:t>Јован Богдановић</a:t>
             </a:r>
           </a:p>
           <a:p>
@@ -8078,12 +8887,12 @@
                         </a:spcAft>
                       </a:pPr>
                       <a:r>
-                        <a:rPr lang="sr-Cyrl-RS" sz="2400">
+                        <a:rPr lang="sr-Cyrl-RS" sz="2400" dirty="0">
                           <a:effectLst/>
                         </a:rPr>
                         <a:t>5</a:t>
                       </a:r>
-                      <a:endParaRPr lang="en-US" sz="2400">
+                      <a:endParaRPr lang="en-US" sz="2400" dirty="0">
                         <a:effectLst/>
                         <a:latin typeface="Times New Roman" panose="02020603050405020304" pitchFamily="18" charset="0"/>
                         <a:ea typeface="Calibri" panose="020F0502020204030204" pitchFamily="34" charset="0"/>
@@ -8110,12 +8919,12 @@
                         </a:spcAft>
                       </a:pPr>
                       <a:r>
-                        <a:rPr lang="sr-Cyrl-RS" sz="2400">
+                        <a:rPr lang="sr-Cyrl-RS" sz="2400" dirty="0">
                           <a:effectLst/>
                         </a:rPr>
                         <a:t>20</a:t>
                       </a:r>
-                      <a:endParaRPr lang="en-US" sz="2400">
+                      <a:endParaRPr lang="en-US" sz="2400" dirty="0">
                         <a:effectLst/>
                         <a:latin typeface="Times New Roman" panose="02020603050405020304" pitchFamily="18" charset="0"/>
                         <a:ea typeface="Calibri" panose="020F0502020204030204" pitchFamily="34" charset="0"/>
@@ -8213,12 +9022,12 @@
                         </a:spcAft>
                       </a:pPr>
                       <a:r>
-                        <a:rPr lang="sr-Cyrl-RS" sz="2400">
+                        <a:rPr lang="sr-Cyrl-RS" sz="2400" dirty="0">
                           <a:effectLst/>
                         </a:rPr>
                         <a:t>3</a:t>
                       </a:r>
-                      <a:endParaRPr lang="en-US" sz="2400">
+                      <a:endParaRPr lang="en-US" sz="2400" dirty="0">
                         <a:effectLst/>
                         <a:latin typeface="Times New Roman" panose="02020603050405020304" pitchFamily="18" charset="0"/>
                         <a:ea typeface="Calibri" panose="020F0502020204030204" pitchFamily="34" charset="0"/>
@@ -8245,12 +9054,12 @@
                         </a:spcAft>
                       </a:pPr>
                       <a:r>
-                        <a:rPr lang="sr-Cyrl-RS" sz="2400">
+                        <a:rPr lang="sr-Cyrl-RS" sz="2400" dirty="0">
                           <a:effectLst/>
                         </a:rPr>
                         <a:t>10</a:t>
                       </a:r>
-                      <a:endParaRPr lang="en-US" sz="2400">
+                      <a:endParaRPr lang="en-US" sz="2400" dirty="0">
                         <a:effectLst/>
                         <a:latin typeface="Times New Roman" panose="02020603050405020304" pitchFamily="18" charset="0"/>
                         <a:ea typeface="Calibri" panose="020F0502020204030204" pitchFamily="34" charset="0"/>
@@ -8348,12 +9157,12 @@
                         </a:spcAft>
                       </a:pPr>
                       <a:r>
-                        <a:rPr lang="sr-Cyrl-RS" sz="2400">
+                        <a:rPr lang="sr-Cyrl-RS" sz="2400" dirty="0">
                           <a:effectLst/>
                         </a:rPr>
                         <a:t>2</a:t>
                       </a:r>
-                      <a:endParaRPr lang="en-US" sz="2400">
+                      <a:endParaRPr lang="en-US" sz="2400" dirty="0">
                         <a:effectLst/>
                         <a:latin typeface="Times New Roman" panose="02020603050405020304" pitchFamily="18" charset="0"/>
                         <a:ea typeface="Calibri" panose="020F0502020204030204" pitchFamily="34" charset="0"/>
@@ -8380,12 +9189,12 @@
                         </a:spcAft>
                       </a:pPr>
                       <a:r>
-                        <a:rPr lang="sr-Cyrl-RS" sz="2400">
+                        <a:rPr lang="sr-Cyrl-RS" sz="2400" dirty="0">
                           <a:effectLst/>
                         </a:rPr>
                         <a:t>5</a:t>
                       </a:r>
-                      <a:endParaRPr lang="en-US" sz="2400">
+                      <a:endParaRPr lang="en-US" sz="2400" dirty="0">
                         <a:effectLst/>
                         <a:latin typeface="Times New Roman" panose="02020603050405020304" pitchFamily="18" charset="0"/>
                         <a:ea typeface="Calibri" panose="020F0502020204030204" pitchFamily="34" charset="0"/>
@@ -8515,12 +9324,12 @@
                         </a:spcAft>
                       </a:pPr>
                       <a:r>
-                        <a:rPr lang="sr-Cyrl-RS" sz="2400">
+                        <a:rPr lang="sr-Cyrl-RS" sz="2400" dirty="0">
                           <a:effectLst/>
                         </a:rPr>
                         <a:t>3</a:t>
                       </a:r>
-                      <a:endParaRPr lang="en-US" sz="2400">
+                      <a:endParaRPr lang="en-US" sz="2400" dirty="0">
                         <a:effectLst/>
                         <a:latin typeface="Times New Roman" panose="02020603050405020304" pitchFamily="18" charset="0"/>
                         <a:ea typeface="Calibri" panose="020F0502020204030204" pitchFamily="34" charset="0"/>
@@ -8811,10 +9620,10 @@
       </p:sp>
       <p:pic>
         <p:nvPicPr>
-          <p:cNvPr id="9" name="Picture 8">
+          <p:cNvPr id="5" name="Picture 4">
             <a:extLst>
               <a:ext uri="{FF2B5EF4-FFF2-40B4-BE49-F238E27FC236}">
-                <a16:creationId xmlns:a16="http://schemas.microsoft.com/office/drawing/2014/main" id="{ADA4F60F-8007-4CE3-84C7-DFA438D64767}"/>
+                <a16:creationId xmlns:a16="http://schemas.microsoft.com/office/drawing/2014/main" id="{B711E6C1-D853-49D9-BC5B-136FB021F387}"/>
               </a:ext>
             </a:extLst>
           </p:cNvPr>
@@ -8831,8 +9640,8 @@
         </p:blipFill>
         <p:spPr>
           <a:xfrm>
-            <a:off x="2877802" y="3433781"/>
-            <a:ext cx="5849166" cy="2381582"/>
+            <a:off x="2673308" y="3495902"/>
+            <a:ext cx="6114433" cy="2491672"/>
           </a:xfrm>
           <a:prstGeom prst="rect">
             <a:avLst/>
@@ -9043,11 +9852,19 @@
             </a:r>
             <a:r>
               <a:rPr lang="sr-Cyrl-RS" sz="2400" dirty="0"/>
-              <a:t>и број појављивања једног токена </a:t>
+              <a:t>и број појављивања једног </a:t>
+            </a:r>
+            <a:r>
+              <a:rPr lang="sr-Cyrl-RS" sz="2400" dirty="0" err="1"/>
+              <a:t>токена</a:t>
+            </a:r>
+            <a:r>
+              <a:rPr lang="sr-Cyrl-RS" sz="2400" dirty="0"/>
+              <a:t> </a:t>
             </a:r>
             <a:r>
               <a:rPr lang="sr-Latn-RS" sz="2400" i="1" dirty="0"/>
-              <a:t>r</a:t>
+              <a:t>n</a:t>
             </a:r>
             <a:r>
               <a:rPr lang="sr-Cyrl-RS" sz="2400" dirty="0"/>
@@ -10613,6 +11430,16 @@
             <a:pPr marL="0" indent="0">
               <a:buNone/>
             </a:pPr>
+            <a:endParaRPr lang="sr-Latn-RS" sz="2400" dirty="0">
+              <a:solidFill>
+                <a:schemeClr val="accent1"/>
+              </a:solidFill>
+            </a:endParaRPr>
+          </a:p>
+          <a:p>
+            <a:pPr marL="0" indent="0">
+              <a:buNone/>
+            </a:pPr>
             <a:r>
               <a:rPr lang="sr-Cyrl-RS" sz="2400" dirty="0">
                 <a:solidFill>
@@ -10623,7 +11450,7 @@
             </a:r>
             <a:r>
               <a:rPr lang="sr-Cyrl-RS" sz="2400" dirty="0"/>
-              <a:t>Проналажење погодних густина стандардних токена – ОПТИМИЗАЦИЈА.</a:t>
+              <a:t>Проналажење оптималних густина стандардних токена – ОПТИМИЗАЦИЈА.</a:t>
             </a:r>
           </a:p>
           <a:p>
@@ -11107,36 +11934,10 @@
               <a:rPr lang="sr-Cyrl-RS" dirty="0"/>
               <a:t>ОПТИМИЗАЦИЈА</a:t>
             </a:r>
-            <a:endParaRPr lang="en-US" dirty="0"/>
-          </a:p>
-        </p:txBody>
-      </p:sp>
-      <p:sp>
-        <p:nvSpPr>
-          <p:cNvPr id="3" name="Content Placeholder 2">
-            <a:extLst>
-              <a:ext uri="{FF2B5EF4-FFF2-40B4-BE49-F238E27FC236}">
-                <a16:creationId xmlns:a16="http://schemas.microsoft.com/office/drawing/2014/main" id="{D18B20E9-F01D-477C-A110-22FE36DA28B5}"/>
-              </a:ext>
-            </a:extLst>
-          </p:cNvPr>
-          <p:cNvSpPr>
-            <a:spLocks noGrp="1"/>
-          </p:cNvSpPr>
-          <p:nvPr>
-            <p:ph idx="1"/>
-          </p:nvPr>
-        </p:nvSpPr>
-        <p:spPr>
-          <a:xfrm>
-            <a:off x="1097280" y="1845734"/>
-            <a:ext cx="10058400" cy="1090413"/>
-          </a:xfrm>
-        </p:spPr>
-        <p:txBody>
-          <a:bodyPr/>
-          <a:lstStyle/>
-          <a:p>
+            <a:r>
+              <a:rPr lang="sr-Latn-RS" dirty="0"/>
+              <a:t> - SLSQP</a:t>
+            </a:r>
             <a:endParaRPr lang="en-US" dirty="0"/>
           </a:p>
         </p:txBody>
@@ -11188,8 +11989,8 @@
           </a:extLst>
         </p:spPr>
       </p:pic>
-      <mc:AlternateContent xmlns:mc="http://schemas.openxmlformats.org/markup-compatibility/2006">
-        <mc:Choice xmlns:a14="http://schemas.microsoft.com/office/drawing/2010/main" Requires="a14">
+      <mc:AlternateContent xmlns:mc="http://schemas.openxmlformats.org/markup-compatibility/2006" xmlns:a14="http://schemas.microsoft.com/office/drawing/2010/main">
+        <mc:Choice Requires="a14">
           <p:sp>
             <p:nvSpPr>
               <p:cNvPr id="5" name="Content Placeholder 2">
@@ -11569,7 +12370,7 @@
             </p:txBody>
           </p:sp>
         </mc:Choice>
-        <mc:Fallback>
+        <mc:Fallback xmlns="">
           <p:sp>
             <p:nvSpPr>
               <p:cNvPr id="5" name="Content Placeholder 2">
@@ -11773,6 +12574,112 @@
   <p:clrMapOvr>
     <a:masterClrMapping/>
   </p:clrMapOvr>
+  <p:timing>
+    <p:tnLst>
+      <p:par>
+        <p:cTn id="1" dur="indefinite" restart="never" nodeType="tmRoot">
+          <p:childTnLst>
+            <p:seq concurrent="1" nextAc="seek">
+              <p:cTn id="2" dur="indefinite" nodeType="mainSeq">
+                <p:childTnLst>
+                  <p:par>
+                    <p:cTn id="3" fill="hold">
+                      <p:stCondLst>
+                        <p:cond delay="indefinite"/>
+                      </p:stCondLst>
+                      <p:childTnLst>
+                        <p:par>
+                          <p:cTn id="4" fill="hold">
+                            <p:stCondLst>
+                              <p:cond delay="0"/>
+                            </p:stCondLst>
+                            <p:childTnLst>
+                              <p:par>
+                                <p:cTn id="5" presetID="1" presetClass="entr" presetSubtype="0" fill="hold" grpId="0" nodeType="clickEffect">
+                                  <p:stCondLst>
+                                    <p:cond delay="0"/>
+                                  </p:stCondLst>
+                                  <p:childTnLst>
+                                    <p:set>
+                                      <p:cBhvr>
+                                        <p:cTn id="6" dur="1" fill="hold">
+                                          <p:stCondLst>
+                                            <p:cond delay="0"/>
+                                          </p:stCondLst>
+                                        </p:cTn>
+                                        <p:tgtEl>
+                                          <p:spTgt spid="5"/>
+                                        </p:tgtEl>
+                                        <p:attrNameLst>
+                                          <p:attrName>style.visibility</p:attrName>
+                                        </p:attrNameLst>
+                                      </p:cBhvr>
+                                      <p:to>
+                                        <p:strVal val="visible"/>
+                                      </p:to>
+                                    </p:set>
+                                  </p:childTnLst>
+                                </p:cTn>
+                              </p:par>
+                              <p:par>
+                                <p:cTn id="7" presetID="1" presetClass="entr" presetSubtype="0" fill="hold" grpId="0" nodeType="withEffect">
+                                  <p:stCondLst>
+                                    <p:cond delay="0"/>
+                                  </p:stCondLst>
+                                  <p:childTnLst>
+                                    <p:set>
+                                      <p:cBhvr>
+                                        <p:cTn id="8" dur="1" fill="hold">
+                                          <p:stCondLst>
+                                            <p:cond delay="0"/>
+                                          </p:stCondLst>
+                                        </p:cTn>
+                                        <p:tgtEl>
+                                          <p:spTgt spid="6"/>
+                                        </p:tgtEl>
+                                        <p:attrNameLst>
+                                          <p:attrName>style.visibility</p:attrName>
+                                        </p:attrNameLst>
+                                      </p:cBhvr>
+                                      <p:to>
+                                        <p:strVal val="visible"/>
+                                      </p:to>
+                                    </p:set>
+                                  </p:childTnLst>
+                                </p:cTn>
+                              </p:par>
+                            </p:childTnLst>
+                          </p:cTn>
+                        </p:par>
+                      </p:childTnLst>
+                    </p:cTn>
+                  </p:par>
+                </p:childTnLst>
+              </p:cTn>
+              <p:prevCondLst>
+                <p:cond evt="onPrev" delay="0">
+                  <p:tgtEl>
+                    <p:sldTgt/>
+                  </p:tgtEl>
+                </p:cond>
+              </p:prevCondLst>
+              <p:nextCondLst>
+                <p:cond evt="onNext" delay="0">
+                  <p:tgtEl>
+                    <p:sldTgt/>
+                  </p:tgtEl>
+                </p:cond>
+              </p:nextCondLst>
+            </p:seq>
+          </p:childTnLst>
+        </p:cTn>
+      </p:par>
+    </p:tnLst>
+    <p:bldLst>
+      <p:bldP spid="5" grpId="0"/>
+      <p:bldP spid="6" grpId="0"/>
+    </p:bldLst>
+  </p:timing>
 </p:sld>
 </file>
 
@@ -12694,7 +13601,7 @@
         <p:spPr>
           <a:xfrm>
             <a:off x="1097280" y="1845734"/>
-            <a:ext cx="10058400" cy="4412191"/>
+            <a:ext cx="10058400" cy="1082289"/>
           </a:xfrm>
         </p:spPr>
         <p:txBody>
@@ -12757,8 +13664,8 @@
             </p:nvSpPr>
             <p:spPr>
               <a:xfrm>
-                <a:off x="4815281" y="2730616"/>
-                <a:ext cx="1782860" cy="735138"/>
+                <a:off x="4624781" y="3354447"/>
+                <a:ext cx="2037674" cy="840230"/>
               </a:xfrm>
               <a:prstGeom prst="rect">
                 <a:avLst/>
@@ -12781,14 +13688,14 @@
                       <m:sSub>
                         <m:sSubPr>
                           <m:ctrlPr>
-                            <a:rPr lang="en-US" sz="2800" i="1" smtClean="0">
+                            <a:rPr lang="en-US" sz="3200" i="1" smtClean="0">
                               <a:latin typeface="Cambria Math" panose="02040503050406030204" pitchFamily="18" charset="0"/>
                             </a:rPr>
                           </m:ctrlPr>
                         </m:sSubPr>
                         <m:e>
                           <m:r>
-                            <a:rPr lang="sr-Latn-RS" sz="2800" b="0" i="1" smtClean="0">
+                            <a:rPr lang="sr-Latn-RS" sz="3200" b="0" i="1" smtClean="0">
                               <a:latin typeface="Cambria Math" panose="02040503050406030204" pitchFamily="18" charset="0"/>
                             </a:rPr>
                             <m:t>𝑝</m:t>
@@ -12796,7 +13703,7 @@
                         </m:e>
                         <m:sub>
                           <m:r>
-                            <a:rPr lang="sr-Latn-RS" sz="2800" b="0" i="1" smtClean="0">
+                            <a:rPr lang="sr-Latn-RS" sz="3200" b="0" i="1" smtClean="0">
                               <a:latin typeface="Cambria Math" panose="02040503050406030204" pitchFamily="18" charset="0"/>
                             </a:rPr>
                             <m:t>𝑖</m:t>
@@ -12804,7 +13711,7 @@
                         </m:sub>
                       </m:sSub>
                       <m:r>
-                        <a:rPr lang="sr-Latn-RS" sz="2800" b="0" i="1" smtClean="0">
+                        <a:rPr lang="sr-Latn-RS" sz="3200" b="0" i="1" smtClean="0">
                           <a:latin typeface="Cambria Math" panose="02040503050406030204" pitchFamily="18" charset="0"/>
                         </a:rPr>
                         <m:t>= </m:t>
@@ -12812,14 +13719,14 @@
                       <m:f>
                         <m:fPr>
                           <m:ctrlPr>
-                            <a:rPr lang="sr-Latn-RS" sz="2800" b="0" i="1" smtClean="0">
+                            <a:rPr lang="sr-Latn-RS" sz="3200" b="0" i="1" smtClean="0">
                               <a:latin typeface="Cambria Math" panose="02040503050406030204" pitchFamily="18" charset="0"/>
                             </a:rPr>
                           </m:ctrlPr>
                         </m:fPr>
                         <m:num>
                           <m:r>
-                            <a:rPr lang="sr-Latn-RS" sz="2800" b="0" i="1" smtClean="0">
+                            <a:rPr lang="sr-Latn-RS" sz="3200" b="0" i="1" smtClean="0">
                               <a:latin typeface="Cambria Math" panose="02040503050406030204" pitchFamily="18" charset="0"/>
                             </a:rPr>
                             <m:t>𝑚</m:t>
@@ -12828,7 +13735,7 @@
                             <m:rPr>
                               <m:nor/>
                             </m:rPr>
-                            <a:rPr lang="sr-Latn-RS" sz="2800" b="0" i="0" smtClean="0">
+                            <a:rPr lang="sr-Latn-RS" sz="3200" b="0" i="0" smtClean="0">
                               <a:latin typeface="Cambria Math" panose="02040503050406030204" pitchFamily="18" charset="0"/>
                             </a:rPr>
                             <m:t> </m:t>
@@ -12837,18 +13744,18 @@
                             <m:rPr>
                               <m:nor/>
                             </m:rPr>
-                            <a:rPr lang="en-US" sz="2800"/>
+                            <a:rPr lang="en-US" sz="3200"/>
                             <m:t>⋅</m:t>
                           </m:r>
                           <m:r>
                             <m:rPr>
                               <m:nor/>
                             </m:rPr>
-                            <a:rPr lang="sr-Latn-RS" sz="2800" b="0" i="0" smtClean="0"/>
+                            <a:rPr lang="sr-Latn-RS" sz="3200" b="0" i="0" smtClean="0"/>
                             <m:t> </m:t>
                           </m:r>
                           <m:r>
-                            <a:rPr lang="sr-Latn-RS" sz="2800" b="0" i="1" smtClean="0">
+                            <a:rPr lang="sr-Latn-RS" sz="3200" b="0" i="1" smtClean="0">
                               <a:latin typeface="Cambria Math" panose="02040503050406030204" pitchFamily="18" charset="0"/>
                             </a:rPr>
                             <m:t>𝑛</m:t>
@@ -12857,13 +13764,13 @@
                             <m:rPr>
                               <m:nor/>
                             </m:rPr>
-                            <a:rPr lang="sr-Latn-RS" sz="2800" b="0" i="0" smtClean="0"/>
+                            <a:rPr lang="sr-Latn-RS" sz="3200" b="0" i="0" smtClean="0"/>
                             <m:t> </m:t>
                           </m:r>
                         </m:num>
                         <m:den>
                           <m:r>
-                            <a:rPr lang="sr-Latn-RS" sz="2800" b="0" i="1" smtClean="0">
+                            <a:rPr lang="sr-Latn-RS" sz="3200" b="0" i="1" smtClean="0">
                               <a:latin typeface="Cambria Math" panose="02040503050406030204" pitchFamily="18" charset="0"/>
                             </a:rPr>
                             <m:t>𝐿</m:t>
@@ -12873,7 +13780,7 @@
                     </m:oMath>
                   </m:oMathPara>
                 </a14:m>
-                <a:endParaRPr lang="en-US" dirty="0"/>
+                <a:endParaRPr lang="en-US" sz="2000" dirty="0"/>
               </a:p>
             </p:txBody>
           </p:sp>
@@ -12895,8 +13802,8 @@
             </p:nvSpPr>
             <p:spPr>
               <a:xfrm>
-                <a:off x="4815281" y="2730616"/>
-                <a:ext cx="1782860" cy="735138"/>
+                <a:off x="4624781" y="3354447"/>
+                <a:ext cx="2037674" cy="840230"/>
               </a:xfrm>
               <a:prstGeom prst="rect">
                 <a:avLst/>
@@ -13584,6 +14491,473 @@
   <p:clrMapOvr>
     <a:masterClrMapping/>
   </p:clrMapOvr>
+  <p:timing>
+    <p:tnLst>
+      <p:par>
+        <p:cTn id="1" dur="indefinite" restart="never" nodeType="tmRoot">
+          <p:childTnLst>
+            <p:seq concurrent="1" nextAc="seek">
+              <p:cTn id="2" dur="indefinite" nodeType="mainSeq">
+                <p:childTnLst>
+                  <p:par>
+                    <p:cTn id="3" fill="hold">
+                      <p:stCondLst>
+                        <p:cond delay="indefinite"/>
+                      </p:stCondLst>
+                      <p:childTnLst>
+                        <p:par>
+                          <p:cTn id="4" fill="hold">
+                            <p:stCondLst>
+                              <p:cond delay="0"/>
+                            </p:stCondLst>
+                            <p:childTnLst>
+                              <p:par>
+                                <p:cTn id="5" presetID="1" presetClass="entr" presetSubtype="0" fill="hold" grpId="0" nodeType="clickEffect">
+                                  <p:stCondLst>
+                                    <p:cond delay="0"/>
+                                  </p:stCondLst>
+                                  <p:childTnLst>
+                                    <p:set>
+                                      <p:cBhvr>
+                                        <p:cTn id="6" dur="1" fill="hold">
+                                          <p:stCondLst>
+                                            <p:cond delay="0"/>
+                                          </p:stCondLst>
+                                        </p:cTn>
+                                        <p:tgtEl>
+                                          <p:spTgt spid="10"/>
+                                        </p:tgtEl>
+                                        <p:attrNameLst>
+                                          <p:attrName>style.visibility</p:attrName>
+                                        </p:attrNameLst>
+                                      </p:cBhvr>
+                                      <p:to>
+                                        <p:strVal val="visible"/>
+                                      </p:to>
+                                    </p:set>
+                                  </p:childTnLst>
+                                </p:cTn>
+                              </p:par>
+                              <p:par>
+                                <p:cTn id="7" presetID="1" presetClass="entr" presetSubtype="0" fill="hold" nodeType="withEffect">
+                                  <p:stCondLst>
+                                    <p:cond delay="0"/>
+                                  </p:stCondLst>
+                                  <p:childTnLst>
+                                    <p:set>
+                                      <p:cBhvr>
+                                        <p:cTn id="8" dur="1" fill="hold">
+                                          <p:stCondLst>
+                                            <p:cond delay="0"/>
+                                          </p:stCondLst>
+                                        </p:cTn>
+                                        <p:tgtEl>
+                                          <p:spTgt spid="11"/>
+                                        </p:tgtEl>
+                                        <p:attrNameLst>
+                                          <p:attrName>style.visibility</p:attrName>
+                                        </p:attrNameLst>
+                                      </p:cBhvr>
+                                      <p:to>
+                                        <p:strVal val="visible"/>
+                                      </p:to>
+                                    </p:set>
+                                  </p:childTnLst>
+                                </p:cTn>
+                              </p:par>
+                              <p:par>
+                                <p:cTn id="9" presetID="1" presetClass="entr" presetSubtype="0" fill="hold" grpId="0" nodeType="withEffect">
+                                  <p:stCondLst>
+                                    <p:cond delay="0"/>
+                                  </p:stCondLst>
+                                  <p:childTnLst>
+                                    <p:set>
+                                      <p:cBhvr>
+                                        <p:cTn id="10" dur="1" fill="hold">
+                                          <p:stCondLst>
+                                            <p:cond delay="0"/>
+                                          </p:stCondLst>
+                                        </p:cTn>
+                                        <p:tgtEl>
+                                          <p:spTgt spid="12"/>
+                                        </p:tgtEl>
+                                        <p:attrNameLst>
+                                          <p:attrName>style.visibility</p:attrName>
+                                        </p:attrNameLst>
+                                      </p:cBhvr>
+                                      <p:to>
+                                        <p:strVal val="visible"/>
+                                      </p:to>
+                                    </p:set>
+                                  </p:childTnLst>
+                                </p:cTn>
+                              </p:par>
+                              <p:par>
+                                <p:cTn id="11" presetID="1" presetClass="entr" presetSubtype="0" fill="hold" grpId="0" nodeType="withEffect">
+                                  <p:stCondLst>
+                                    <p:cond delay="0"/>
+                                  </p:stCondLst>
+                                  <p:childTnLst>
+                                    <p:set>
+                                      <p:cBhvr>
+                                        <p:cTn id="12" dur="1" fill="hold">
+                                          <p:stCondLst>
+                                            <p:cond delay="0"/>
+                                          </p:stCondLst>
+                                        </p:cTn>
+                                        <p:tgtEl>
+                                          <p:spTgt spid="13"/>
+                                        </p:tgtEl>
+                                        <p:attrNameLst>
+                                          <p:attrName>style.visibility</p:attrName>
+                                        </p:attrNameLst>
+                                      </p:cBhvr>
+                                      <p:to>
+                                        <p:strVal val="visible"/>
+                                      </p:to>
+                                    </p:set>
+                                  </p:childTnLst>
+                                </p:cTn>
+                              </p:par>
+                              <p:par>
+                                <p:cTn id="13" presetID="1" presetClass="entr" presetSubtype="0" fill="hold" grpId="0" nodeType="withEffect">
+                                  <p:stCondLst>
+                                    <p:cond delay="0"/>
+                                  </p:stCondLst>
+                                  <p:childTnLst>
+                                    <p:set>
+                                      <p:cBhvr>
+                                        <p:cTn id="14" dur="1" fill="hold">
+                                          <p:stCondLst>
+                                            <p:cond delay="0"/>
+                                          </p:stCondLst>
+                                        </p:cTn>
+                                        <p:tgtEl>
+                                          <p:spTgt spid="14"/>
+                                        </p:tgtEl>
+                                        <p:attrNameLst>
+                                          <p:attrName>style.visibility</p:attrName>
+                                        </p:attrNameLst>
+                                      </p:cBhvr>
+                                      <p:to>
+                                        <p:strVal val="visible"/>
+                                      </p:to>
+                                    </p:set>
+                                  </p:childTnLst>
+                                </p:cTn>
+                              </p:par>
+                              <p:par>
+                                <p:cTn id="15" presetID="1" presetClass="entr" presetSubtype="0" fill="hold" nodeType="withEffect">
+                                  <p:stCondLst>
+                                    <p:cond delay="0"/>
+                                  </p:stCondLst>
+                                  <p:childTnLst>
+                                    <p:set>
+                                      <p:cBhvr>
+                                        <p:cTn id="16" dur="1" fill="hold">
+                                          <p:stCondLst>
+                                            <p:cond delay="0"/>
+                                          </p:stCondLst>
+                                        </p:cTn>
+                                        <p:tgtEl>
+                                          <p:spTgt spid="15"/>
+                                        </p:tgtEl>
+                                        <p:attrNameLst>
+                                          <p:attrName>style.visibility</p:attrName>
+                                        </p:attrNameLst>
+                                      </p:cBhvr>
+                                      <p:to>
+                                        <p:strVal val="visible"/>
+                                      </p:to>
+                                    </p:set>
+                                  </p:childTnLst>
+                                </p:cTn>
+                              </p:par>
+                              <p:par>
+                                <p:cTn id="17" presetID="1" presetClass="entr" presetSubtype="0" fill="hold" grpId="0" nodeType="withEffect">
+                                  <p:stCondLst>
+                                    <p:cond delay="0"/>
+                                  </p:stCondLst>
+                                  <p:childTnLst>
+                                    <p:set>
+                                      <p:cBhvr>
+                                        <p:cTn id="18" dur="1" fill="hold">
+                                          <p:stCondLst>
+                                            <p:cond delay="0"/>
+                                          </p:stCondLst>
+                                        </p:cTn>
+                                        <p:tgtEl>
+                                          <p:spTgt spid="16"/>
+                                        </p:tgtEl>
+                                        <p:attrNameLst>
+                                          <p:attrName>style.visibility</p:attrName>
+                                        </p:attrNameLst>
+                                      </p:cBhvr>
+                                      <p:to>
+                                        <p:strVal val="visible"/>
+                                      </p:to>
+                                    </p:set>
+                                  </p:childTnLst>
+                                </p:cTn>
+                              </p:par>
+                              <p:par>
+                                <p:cTn id="19" presetID="1" presetClass="entr" presetSubtype="0" fill="hold" grpId="0" nodeType="withEffect">
+                                  <p:stCondLst>
+                                    <p:cond delay="0"/>
+                                  </p:stCondLst>
+                                  <p:childTnLst>
+                                    <p:set>
+                                      <p:cBhvr>
+                                        <p:cTn id="20" dur="1" fill="hold">
+                                          <p:stCondLst>
+                                            <p:cond delay="0"/>
+                                          </p:stCondLst>
+                                        </p:cTn>
+                                        <p:tgtEl>
+                                          <p:spTgt spid="17"/>
+                                        </p:tgtEl>
+                                        <p:attrNameLst>
+                                          <p:attrName>style.visibility</p:attrName>
+                                        </p:attrNameLst>
+                                      </p:cBhvr>
+                                      <p:to>
+                                        <p:strVal val="visible"/>
+                                      </p:to>
+                                    </p:set>
+                                  </p:childTnLst>
+                                </p:cTn>
+                              </p:par>
+                              <p:par>
+                                <p:cTn id="21" presetID="1" presetClass="entr" presetSubtype="0" fill="hold" grpId="0" nodeType="withEffect">
+                                  <p:stCondLst>
+                                    <p:cond delay="0"/>
+                                  </p:stCondLst>
+                                  <p:childTnLst>
+                                    <p:set>
+                                      <p:cBhvr>
+                                        <p:cTn id="22" dur="1" fill="hold">
+                                          <p:stCondLst>
+                                            <p:cond delay="0"/>
+                                          </p:stCondLst>
+                                        </p:cTn>
+                                        <p:tgtEl>
+                                          <p:spTgt spid="18"/>
+                                        </p:tgtEl>
+                                        <p:attrNameLst>
+                                          <p:attrName>style.visibility</p:attrName>
+                                        </p:attrNameLst>
+                                      </p:cBhvr>
+                                      <p:to>
+                                        <p:strVal val="visible"/>
+                                      </p:to>
+                                    </p:set>
+                                  </p:childTnLst>
+                                </p:cTn>
+                              </p:par>
+                              <p:par>
+                                <p:cTn id="23" presetID="1" presetClass="entr" presetSubtype="0" fill="hold" nodeType="withEffect">
+                                  <p:stCondLst>
+                                    <p:cond delay="0"/>
+                                  </p:stCondLst>
+                                  <p:childTnLst>
+                                    <p:set>
+                                      <p:cBhvr>
+                                        <p:cTn id="24" dur="1" fill="hold">
+                                          <p:stCondLst>
+                                            <p:cond delay="0"/>
+                                          </p:stCondLst>
+                                        </p:cTn>
+                                        <p:tgtEl>
+                                          <p:spTgt spid="19"/>
+                                        </p:tgtEl>
+                                        <p:attrNameLst>
+                                          <p:attrName>style.visibility</p:attrName>
+                                        </p:attrNameLst>
+                                      </p:cBhvr>
+                                      <p:to>
+                                        <p:strVal val="visible"/>
+                                      </p:to>
+                                    </p:set>
+                                  </p:childTnLst>
+                                </p:cTn>
+                              </p:par>
+                              <p:par>
+                                <p:cTn id="25" presetID="1" presetClass="entr" presetSubtype="0" fill="hold" grpId="0" nodeType="withEffect">
+                                  <p:stCondLst>
+                                    <p:cond delay="0"/>
+                                  </p:stCondLst>
+                                  <p:childTnLst>
+                                    <p:set>
+                                      <p:cBhvr>
+                                        <p:cTn id="26" dur="1" fill="hold">
+                                          <p:stCondLst>
+                                            <p:cond delay="0"/>
+                                          </p:stCondLst>
+                                        </p:cTn>
+                                        <p:tgtEl>
+                                          <p:spTgt spid="20"/>
+                                        </p:tgtEl>
+                                        <p:attrNameLst>
+                                          <p:attrName>style.visibility</p:attrName>
+                                        </p:attrNameLst>
+                                      </p:cBhvr>
+                                      <p:to>
+                                        <p:strVal val="visible"/>
+                                      </p:to>
+                                    </p:set>
+                                  </p:childTnLst>
+                                </p:cTn>
+                              </p:par>
+                              <p:par>
+                                <p:cTn id="27" presetID="1" presetClass="entr" presetSubtype="0" fill="hold" grpId="0" nodeType="withEffect">
+                                  <p:stCondLst>
+                                    <p:cond delay="0"/>
+                                  </p:stCondLst>
+                                  <p:childTnLst>
+                                    <p:set>
+                                      <p:cBhvr>
+                                        <p:cTn id="28" dur="1" fill="hold">
+                                          <p:stCondLst>
+                                            <p:cond delay="0"/>
+                                          </p:stCondLst>
+                                        </p:cTn>
+                                        <p:tgtEl>
+                                          <p:spTgt spid="21"/>
+                                        </p:tgtEl>
+                                        <p:attrNameLst>
+                                          <p:attrName>style.visibility</p:attrName>
+                                        </p:attrNameLst>
+                                      </p:cBhvr>
+                                      <p:to>
+                                        <p:strVal val="visible"/>
+                                      </p:to>
+                                    </p:set>
+                                  </p:childTnLst>
+                                </p:cTn>
+                              </p:par>
+                              <p:par>
+                                <p:cTn id="29" presetID="1" presetClass="entr" presetSubtype="0" fill="hold" grpId="0" nodeType="withEffect">
+                                  <p:stCondLst>
+                                    <p:cond delay="0"/>
+                                  </p:stCondLst>
+                                  <p:childTnLst>
+                                    <p:set>
+                                      <p:cBhvr>
+                                        <p:cTn id="30" dur="1" fill="hold">
+                                          <p:stCondLst>
+                                            <p:cond delay="0"/>
+                                          </p:stCondLst>
+                                        </p:cTn>
+                                        <p:tgtEl>
+                                          <p:spTgt spid="22"/>
+                                        </p:tgtEl>
+                                        <p:attrNameLst>
+                                          <p:attrName>style.visibility</p:attrName>
+                                        </p:attrNameLst>
+                                      </p:cBhvr>
+                                      <p:to>
+                                        <p:strVal val="visible"/>
+                                      </p:to>
+                                    </p:set>
+                                  </p:childTnLst>
+                                </p:cTn>
+                              </p:par>
+                              <p:par>
+                                <p:cTn id="31" presetID="1" presetClass="entr" presetSubtype="0" fill="hold" grpId="0" nodeType="withEffect">
+                                  <p:stCondLst>
+                                    <p:cond delay="0"/>
+                                  </p:stCondLst>
+                                  <p:childTnLst>
+                                    <p:set>
+                                      <p:cBhvr>
+                                        <p:cTn id="32" dur="1" fill="hold">
+                                          <p:stCondLst>
+                                            <p:cond delay="0"/>
+                                          </p:stCondLst>
+                                        </p:cTn>
+                                        <p:tgtEl>
+                                          <p:spTgt spid="23"/>
+                                        </p:tgtEl>
+                                        <p:attrNameLst>
+                                          <p:attrName>style.visibility</p:attrName>
+                                        </p:attrNameLst>
+                                      </p:cBhvr>
+                                      <p:to>
+                                        <p:strVal val="visible"/>
+                                      </p:to>
+                                    </p:set>
+                                  </p:childTnLst>
+                                </p:cTn>
+                              </p:par>
+                              <p:par>
+                                <p:cTn id="33" presetID="1" presetClass="entr" presetSubtype="0" fill="hold" grpId="0" nodeType="withEffect">
+                                  <p:stCondLst>
+                                    <p:cond delay="0"/>
+                                  </p:stCondLst>
+                                  <p:childTnLst>
+                                    <p:set>
+                                      <p:cBhvr>
+                                        <p:cTn id="34" dur="1" fill="hold">
+                                          <p:stCondLst>
+                                            <p:cond delay="0"/>
+                                          </p:stCondLst>
+                                        </p:cTn>
+                                        <p:tgtEl>
+                                          <p:spTgt spid="24"/>
+                                        </p:tgtEl>
+                                        <p:attrNameLst>
+                                          <p:attrName>style.visibility</p:attrName>
+                                        </p:attrNameLst>
+                                      </p:cBhvr>
+                                      <p:to>
+                                        <p:strVal val="visible"/>
+                                      </p:to>
+                                    </p:set>
+                                  </p:childTnLst>
+                                </p:cTn>
+                              </p:par>
+                            </p:childTnLst>
+                          </p:cTn>
+                        </p:par>
+                      </p:childTnLst>
+                    </p:cTn>
+                  </p:par>
+                </p:childTnLst>
+              </p:cTn>
+              <p:prevCondLst>
+                <p:cond evt="onPrev" delay="0">
+                  <p:tgtEl>
+                    <p:sldTgt/>
+                  </p:tgtEl>
+                </p:cond>
+              </p:prevCondLst>
+              <p:nextCondLst>
+                <p:cond evt="onNext" delay="0">
+                  <p:tgtEl>
+                    <p:sldTgt/>
+                  </p:tgtEl>
+                </p:cond>
+              </p:nextCondLst>
+            </p:seq>
+          </p:childTnLst>
+        </p:cTn>
+      </p:par>
+    </p:tnLst>
+    <p:bldLst>
+      <p:bldP spid="10" grpId="0"/>
+      <p:bldP spid="12" grpId="0"/>
+      <p:bldP spid="13" grpId="0"/>
+      <p:bldP spid="14" grpId="0"/>
+      <p:bldP spid="16" grpId="0"/>
+      <p:bldP spid="17" grpId="0"/>
+      <p:bldP spid="18" grpId="0"/>
+      <p:bldP spid="20" grpId="0"/>
+      <p:bldP spid="21" grpId="0"/>
+      <p:bldP spid="22" grpId="0" animBg="1"/>
+      <p:bldP spid="23" grpId="0" animBg="1"/>
+      <p:bldP spid="24" grpId="0" animBg="1"/>
+    </p:bldLst>
+  </p:timing>
 </p:sld>
 </file>
 
@@ -14139,7 +15513,7 @@
           <p:nvPr/>
         </p:nvPicPr>
         <p:blipFill>
-          <a:blip r:embed="rId2"/>
+          <a:blip r:embed="rId3"/>
           <a:stretch>
             <a:fillRect/>
           </a:stretch>
@@ -14223,7 +15597,7 @@
         <p:spPr>
           <a:xfrm>
             <a:off x="1008261" y="2228671"/>
-            <a:ext cx="6585359" cy="1200329"/>
+            <a:ext cx="4008239" cy="1200329"/>
           </a:xfrm>
           <a:prstGeom prst="rect">
             <a:avLst/>
@@ -14326,6 +15700,335 @@
           </a:p>
         </p:txBody>
       </p:sp>
+      <p:sp>
+        <p:nvSpPr>
+          <p:cNvPr id="3" name="Rectangle 2">
+            <a:extLst>
+              <a:ext uri="{FF2B5EF4-FFF2-40B4-BE49-F238E27FC236}">
+                <a16:creationId xmlns:a16="http://schemas.microsoft.com/office/drawing/2014/main" id="{9F4ADBFD-065F-4A02-9CB4-98C5A208191E}"/>
+              </a:ext>
+            </a:extLst>
+          </p:cNvPr>
+          <p:cNvSpPr/>
+          <p:nvPr/>
+        </p:nvSpPr>
+        <p:spPr>
+          <a:xfrm>
+            <a:off x="7219950" y="2724150"/>
+            <a:ext cx="238125" cy="295275"/>
+          </a:xfrm>
+          <a:prstGeom prst="rect">
+            <a:avLst/>
+          </a:prstGeom>
+          <a:noFill/>
+        </p:spPr>
+        <p:style>
+          <a:lnRef idx="2">
+            <a:schemeClr val="accent1">
+              <a:shade val="50000"/>
+            </a:schemeClr>
+          </a:lnRef>
+          <a:fillRef idx="1">
+            <a:schemeClr val="accent1"/>
+          </a:fillRef>
+          <a:effectRef idx="0">
+            <a:schemeClr val="accent1"/>
+          </a:effectRef>
+          <a:fontRef idx="minor">
+            <a:schemeClr val="lt1"/>
+          </a:fontRef>
+        </p:style>
+        <p:txBody>
+          <a:bodyPr rtlCol="0" anchor="ctr"/>
+          <a:lstStyle/>
+          <a:p>
+            <a:pPr algn="ctr"/>
+            <a:endParaRPr lang="en-US"/>
+          </a:p>
+        </p:txBody>
+      </p:sp>
+      <p:sp>
+        <p:nvSpPr>
+          <p:cNvPr id="8" name="Rectangle 7">
+            <a:extLst>
+              <a:ext uri="{FF2B5EF4-FFF2-40B4-BE49-F238E27FC236}">
+                <a16:creationId xmlns:a16="http://schemas.microsoft.com/office/drawing/2014/main" id="{274BF77E-0E1A-4E05-B622-73BCBD22F1A8}"/>
+              </a:ext>
+            </a:extLst>
+          </p:cNvPr>
+          <p:cNvSpPr/>
+          <p:nvPr/>
+        </p:nvSpPr>
+        <p:spPr>
+          <a:xfrm>
+            <a:off x="8807450" y="2720975"/>
+            <a:ext cx="238125" cy="295275"/>
+          </a:xfrm>
+          <a:prstGeom prst="rect">
+            <a:avLst/>
+          </a:prstGeom>
+          <a:noFill/>
+        </p:spPr>
+        <p:style>
+          <a:lnRef idx="2">
+            <a:schemeClr val="accent1">
+              <a:shade val="50000"/>
+            </a:schemeClr>
+          </a:lnRef>
+          <a:fillRef idx="1">
+            <a:schemeClr val="accent1"/>
+          </a:fillRef>
+          <a:effectRef idx="0">
+            <a:schemeClr val="accent1"/>
+          </a:effectRef>
+          <a:fontRef idx="minor">
+            <a:schemeClr val="lt1"/>
+          </a:fontRef>
+        </p:style>
+        <p:txBody>
+          <a:bodyPr rtlCol="0" anchor="ctr"/>
+          <a:lstStyle/>
+          <a:p>
+            <a:pPr algn="ctr"/>
+            <a:endParaRPr lang="en-US"/>
+          </a:p>
+        </p:txBody>
+      </p:sp>
+      <p:sp>
+        <p:nvSpPr>
+          <p:cNvPr id="9" name="Rectangle 8">
+            <a:extLst>
+              <a:ext uri="{FF2B5EF4-FFF2-40B4-BE49-F238E27FC236}">
+                <a16:creationId xmlns:a16="http://schemas.microsoft.com/office/drawing/2014/main" id="{2736CD24-00E4-436F-9655-3B668557516A}"/>
+              </a:ext>
+            </a:extLst>
+          </p:cNvPr>
+          <p:cNvSpPr/>
+          <p:nvPr/>
+        </p:nvSpPr>
+        <p:spPr>
+          <a:xfrm>
+            <a:off x="10380662" y="2720974"/>
+            <a:ext cx="238125" cy="295275"/>
+          </a:xfrm>
+          <a:prstGeom prst="rect">
+            <a:avLst/>
+          </a:prstGeom>
+          <a:noFill/>
+        </p:spPr>
+        <p:style>
+          <a:lnRef idx="2">
+            <a:schemeClr val="accent1">
+              <a:shade val="50000"/>
+            </a:schemeClr>
+          </a:lnRef>
+          <a:fillRef idx="1">
+            <a:schemeClr val="accent1"/>
+          </a:fillRef>
+          <a:effectRef idx="0">
+            <a:schemeClr val="accent1"/>
+          </a:effectRef>
+          <a:fontRef idx="minor">
+            <a:schemeClr val="lt1"/>
+          </a:fontRef>
+        </p:style>
+        <p:txBody>
+          <a:bodyPr rtlCol="0" anchor="ctr"/>
+          <a:lstStyle/>
+          <a:p>
+            <a:pPr algn="ctr"/>
+            <a:endParaRPr lang="en-US"/>
+          </a:p>
+        </p:txBody>
+      </p:sp>
+      <p:sp>
+        <p:nvSpPr>
+          <p:cNvPr id="10" name="Rectangle 9">
+            <a:extLst>
+              <a:ext uri="{FF2B5EF4-FFF2-40B4-BE49-F238E27FC236}">
+                <a16:creationId xmlns:a16="http://schemas.microsoft.com/office/drawing/2014/main" id="{799A3F56-7592-49FF-9194-B0045068E744}"/>
+              </a:ext>
+            </a:extLst>
+          </p:cNvPr>
+          <p:cNvSpPr/>
+          <p:nvPr/>
+        </p:nvSpPr>
+        <p:spPr>
+          <a:xfrm>
+            <a:off x="11588750" y="3456982"/>
+            <a:ext cx="238125" cy="295275"/>
+          </a:xfrm>
+          <a:prstGeom prst="rect">
+            <a:avLst/>
+          </a:prstGeom>
+          <a:noFill/>
+        </p:spPr>
+        <p:style>
+          <a:lnRef idx="2">
+            <a:schemeClr val="accent1">
+              <a:shade val="50000"/>
+            </a:schemeClr>
+          </a:lnRef>
+          <a:fillRef idx="1">
+            <a:schemeClr val="accent1"/>
+          </a:fillRef>
+          <a:effectRef idx="0">
+            <a:schemeClr val="accent1"/>
+          </a:effectRef>
+          <a:fontRef idx="minor">
+            <a:schemeClr val="lt1"/>
+          </a:fontRef>
+        </p:style>
+        <p:txBody>
+          <a:bodyPr rtlCol="0" anchor="ctr"/>
+          <a:lstStyle/>
+          <a:p>
+            <a:pPr algn="ctr"/>
+            <a:endParaRPr lang="en-US"/>
+          </a:p>
+        </p:txBody>
+      </p:sp>
+      <p:sp>
+        <p:nvSpPr>
+          <p:cNvPr id="11" name="Rectangle 10">
+            <a:extLst>
+              <a:ext uri="{FF2B5EF4-FFF2-40B4-BE49-F238E27FC236}">
+                <a16:creationId xmlns:a16="http://schemas.microsoft.com/office/drawing/2014/main" id="{0AFD0E5C-80D7-464E-A2A0-AE17FE8AD239}"/>
+              </a:ext>
+            </a:extLst>
+          </p:cNvPr>
+          <p:cNvSpPr/>
+          <p:nvPr/>
+        </p:nvSpPr>
+        <p:spPr>
+          <a:xfrm>
+            <a:off x="10393643" y="4222750"/>
+            <a:ext cx="238125" cy="295275"/>
+          </a:xfrm>
+          <a:prstGeom prst="rect">
+            <a:avLst/>
+          </a:prstGeom>
+          <a:noFill/>
+        </p:spPr>
+        <p:style>
+          <a:lnRef idx="2">
+            <a:schemeClr val="accent1">
+              <a:shade val="50000"/>
+            </a:schemeClr>
+          </a:lnRef>
+          <a:fillRef idx="1">
+            <a:schemeClr val="accent1"/>
+          </a:fillRef>
+          <a:effectRef idx="0">
+            <a:schemeClr val="accent1"/>
+          </a:effectRef>
+          <a:fontRef idx="minor">
+            <a:schemeClr val="lt1"/>
+          </a:fontRef>
+        </p:style>
+        <p:txBody>
+          <a:bodyPr rtlCol="0" anchor="ctr"/>
+          <a:lstStyle/>
+          <a:p>
+            <a:pPr algn="ctr"/>
+            <a:endParaRPr lang="en-US"/>
+          </a:p>
+        </p:txBody>
+      </p:sp>
+      <p:sp>
+        <p:nvSpPr>
+          <p:cNvPr id="12" name="Rectangle 11">
+            <a:extLst>
+              <a:ext uri="{FF2B5EF4-FFF2-40B4-BE49-F238E27FC236}">
+                <a16:creationId xmlns:a16="http://schemas.microsoft.com/office/drawing/2014/main" id="{87C844BF-54BC-47F3-8BAF-0A25E8EC3278}"/>
+              </a:ext>
+            </a:extLst>
+          </p:cNvPr>
+          <p:cNvSpPr/>
+          <p:nvPr/>
+        </p:nvSpPr>
+        <p:spPr>
+          <a:xfrm>
+            <a:off x="8805980" y="4222749"/>
+            <a:ext cx="238125" cy="295275"/>
+          </a:xfrm>
+          <a:prstGeom prst="rect">
+            <a:avLst/>
+          </a:prstGeom>
+          <a:noFill/>
+        </p:spPr>
+        <p:style>
+          <a:lnRef idx="2">
+            <a:schemeClr val="accent1">
+              <a:shade val="50000"/>
+            </a:schemeClr>
+          </a:lnRef>
+          <a:fillRef idx="1">
+            <a:schemeClr val="accent1"/>
+          </a:fillRef>
+          <a:effectRef idx="0">
+            <a:schemeClr val="accent1"/>
+          </a:effectRef>
+          <a:fontRef idx="minor">
+            <a:schemeClr val="lt1"/>
+          </a:fontRef>
+        </p:style>
+        <p:txBody>
+          <a:bodyPr rtlCol="0" anchor="ctr"/>
+          <a:lstStyle/>
+          <a:p>
+            <a:pPr algn="ctr"/>
+            <a:endParaRPr lang="en-US"/>
+          </a:p>
+        </p:txBody>
+      </p:sp>
+      <p:sp>
+        <p:nvSpPr>
+          <p:cNvPr id="13" name="Rectangle 12">
+            <a:extLst>
+              <a:ext uri="{FF2B5EF4-FFF2-40B4-BE49-F238E27FC236}">
+                <a16:creationId xmlns:a16="http://schemas.microsoft.com/office/drawing/2014/main" id="{D4BBA520-7FC3-4FDC-B092-8650B283688C}"/>
+              </a:ext>
+            </a:extLst>
+          </p:cNvPr>
+          <p:cNvSpPr/>
+          <p:nvPr/>
+        </p:nvSpPr>
+        <p:spPr>
+          <a:xfrm>
+            <a:off x="7204147" y="4231681"/>
+            <a:ext cx="238125" cy="295275"/>
+          </a:xfrm>
+          <a:prstGeom prst="rect">
+            <a:avLst/>
+          </a:prstGeom>
+          <a:noFill/>
+        </p:spPr>
+        <p:style>
+          <a:lnRef idx="2">
+            <a:schemeClr val="accent1">
+              <a:shade val="50000"/>
+            </a:schemeClr>
+          </a:lnRef>
+          <a:fillRef idx="1">
+            <a:schemeClr val="accent1"/>
+          </a:fillRef>
+          <a:effectRef idx="0">
+            <a:schemeClr val="accent1"/>
+          </a:effectRef>
+          <a:fontRef idx="minor">
+            <a:schemeClr val="lt1"/>
+          </a:fontRef>
+        </p:style>
+        <p:txBody>
+          <a:bodyPr rtlCol="0" anchor="ctr"/>
+          <a:lstStyle/>
+          <a:p>
+            <a:pPr algn="ctr"/>
+            <a:endParaRPr lang="en-US"/>
+          </a:p>
+        </p:txBody>
+      </p:sp>
     </p:spTree>
     <p:extLst>
       <p:ext uri="{BB962C8B-B14F-4D97-AF65-F5344CB8AC3E}">
@@ -14336,6 +16039,343 @@
   <p:clrMapOvr>
     <a:masterClrMapping/>
   </p:clrMapOvr>
+  <p:timing>
+    <p:tnLst>
+      <p:par>
+        <p:cTn id="1" dur="indefinite" restart="never" nodeType="tmRoot">
+          <p:childTnLst>
+            <p:seq concurrent="1" nextAc="seek">
+              <p:cTn id="2" dur="indefinite" nodeType="mainSeq">
+                <p:childTnLst>
+                  <p:par>
+                    <p:cTn id="3" fill="hold">
+                      <p:stCondLst>
+                        <p:cond delay="indefinite"/>
+                      </p:stCondLst>
+                      <p:childTnLst>
+                        <p:par>
+                          <p:cTn id="4" fill="hold">
+                            <p:stCondLst>
+                              <p:cond delay="0"/>
+                            </p:stCondLst>
+                            <p:childTnLst>
+                              <p:par>
+                                <p:cTn id="5" presetID="1" presetClass="entr" presetSubtype="0" fill="hold" nodeType="clickEffect">
+                                  <p:stCondLst>
+                                    <p:cond delay="0"/>
+                                  </p:stCondLst>
+                                  <p:childTnLst>
+                                    <p:set>
+                                      <p:cBhvr>
+                                        <p:cTn id="6" dur="1" fill="hold">
+                                          <p:stCondLst>
+                                            <p:cond delay="0"/>
+                                          </p:stCondLst>
+                                        </p:cTn>
+                                        <p:tgtEl>
+                                          <p:spTgt spid="5"/>
+                                        </p:tgtEl>
+                                        <p:attrNameLst>
+                                          <p:attrName>style.visibility</p:attrName>
+                                        </p:attrNameLst>
+                                      </p:cBhvr>
+                                      <p:to>
+                                        <p:strVal val="visible"/>
+                                      </p:to>
+                                    </p:set>
+                                  </p:childTnLst>
+                                </p:cTn>
+                              </p:par>
+                            </p:childTnLst>
+                          </p:cTn>
+                        </p:par>
+                      </p:childTnLst>
+                    </p:cTn>
+                  </p:par>
+                  <p:par>
+                    <p:cTn id="7" fill="hold">
+                      <p:stCondLst>
+                        <p:cond delay="indefinite"/>
+                      </p:stCondLst>
+                      <p:childTnLst>
+                        <p:par>
+                          <p:cTn id="8" fill="hold">
+                            <p:stCondLst>
+                              <p:cond delay="0"/>
+                            </p:stCondLst>
+                            <p:childTnLst>
+                              <p:par>
+                                <p:cTn id="9" presetID="1" presetClass="entr" presetSubtype="0" fill="hold" grpId="0" nodeType="clickEffect">
+                                  <p:stCondLst>
+                                    <p:cond delay="0"/>
+                                  </p:stCondLst>
+                                  <p:childTnLst>
+                                    <p:set>
+                                      <p:cBhvr>
+                                        <p:cTn id="10" dur="1" fill="hold">
+                                          <p:stCondLst>
+                                            <p:cond delay="0"/>
+                                          </p:stCondLst>
+                                        </p:cTn>
+                                        <p:tgtEl>
+                                          <p:spTgt spid="3"/>
+                                        </p:tgtEl>
+                                        <p:attrNameLst>
+                                          <p:attrName>style.visibility</p:attrName>
+                                        </p:attrNameLst>
+                                      </p:cBhvr>
+                                      <p:to>
+                                        <p:strVal val="visible"/>
+                                      </p:to>
+                                    </p:set>
+                                  </p:childTnLst>
+                                </p:cTn>
+                              </p:par>
+                              <p:par>
+                                <p:cTn id="11" presetID="1" presetClass="entr" presetSubtype="0" fill="hold" grpId="0" nodeType="withEffect">
+                                  <p:stCondLst>
+                                    <p:cond delay="0"/>
+                                  </p:stCondLst>
+                                  <p:childTnLst>
+                                    <p:set>
+                                      <p:cBhvr>
+                                        <p:cTn id="12" dur="1" fill="hold">
+                                          <p:stCondLst>
+                                            <p:cond delay="0"/>
+                                          </p:stCondLst>
+                                        </p:cTn>
+                                        <p:tgtEl>
+                                          <p:spTgt spid="8"/>
+                                        </p:tgtEl>
+                                        <p:attrNameLst>
+                                          <p:attrName>style.visibility</p:attrName>
+                                        </p:attrNameLst>
+                                      </p:cBhvr>
+                                      <p:to>
+                                        <p:strVal val="visible"/>
+                                      </p:to>
+                                    </p:set>
+                                  </p:childTnLst>
+                                </p:cTn>
+                              </p:par>
+                              <p:par>
+                                <p:cTn id="13" presetID="1" presetClass="entr" presetSubtype="0" fill="hold" grpId="0" nodeType="withEffect">
+                                  <p:stCondLst>
+                                    <p:cond delay="0"/>
+                                  </p:stCondLst>
+                                  <p:childTnLst>
+                                    <p:set>
+                                      <p:cBhvr>
+                                        <p:cTn id="14" dur="1" fill="hold">
+                                          <p:stCondLst>
+                                            <p:cond delay="0"/>
+                                          </p:stCondLst>
+                                        </p:cTn>
+                                        <p:tgtEl>
+                                          <p:spTgt spid="9"/>
+                                        </p:tgtEl>
+                                        <p:attrNameLst>
+                                          <p:attrName>style.visibility</p:attrName>
+                                        </p:attrNameLst>
+                                      </p:cBhvr>
+                                      <p:to>
+                                        <p:strVal val="visible"/>
+                                      </p:to>
+                                    </p:set>
+                                  </p:childTnLst>
+                                </p:cTn>
+                              </p:par>
+                              <p:par>
+                                <p:cTn id="15" presetID="1" presetClass="entr" presetSubtype="0" fill="hold" grpId="0" nodeType="withEffect">
+                                  <p:stCondLst>
+                                    <p:cond delay="0"/>
+                                  </p:stCondLst>
+                                  <p:childTnLst>
+                                    <p:set>
+                                      <p:cBhvr>
+                                        <p:cTn id="16" dur="1" fill="hold">
+                                          <p:stCondLst>
+                                            <p:cond delay="0"/>
+                                          </p:stCondLst>
+                                        </p:cTn>
+                                        <p:tgtEl>
+                                          <p:spTgt spid="10"/>
+                                        </p:tgtEl>
+                                        <p:attrNameLst>
+                                          <p:attrName>style.visibility</p:attrName>
+                                        </p:attrNameLst>
+                                      </p:cBhvr>
+                                      <p:to>
+                                        <p:strVal val="visible"/>
+                                      </p:to>
+                                    </p:set>
+                                  </p:childTnLst>
+                                </p:cTn>
+                              </p:par>
+                              <p:par>
+                                <p:cTn id="17" presetID="1" presetClass="entr" presetSubtype="0" fill="hold" grpId="0" nodeType="withEffect">
+                                  <p:stCondLst>
+                                    <p:cond delay="0"/>
+                                  </p:stCondLst>
+                                  <p:childTnLst>
+                                    <p:set>
+                                      <p:cBhvr>
+                                        <p:cTn id="18" dur="1" fill="hold">
+                                          <p:stCondLst>
+                                            <p:cond delay="0"/>
+                                          </p:stCondLst>
+                                        </p:cTn>
+                                        <p:tgtEl>
+                                          <p:spTgt spid="11"/>
+                                        </p:tgtEl>
+                                        <p:attrNameLst>
+                                          <p:attrName>style.visibility</p:attrName>
+                                        </p:attrNameLst>
+                                      </p:cBhvr>
+                                      <p:to>
+                                        <p:strVal val="visible"/>
+                                      </p:to>
+                                    </p:set>
+                                  </p:childTnLst>
+                                </p:cTn>
+                              </p:par>
+                              <p:par>
+                                <p:cTn id="19" presetID="1" presetClass="entr" presetSubtype="0" fill="hold" grpId="0" nodeType="withEffect">
+                                  <p:stCondLst>
+                                    <p:cond delay="0"/>
+                                  </p:stCondLst>
+                                  <p:childTnLst>
+                                    <p:set>
+                                      <p:cBhvr>
+                                        <p:cTn id="20" dur="1" fill="hold">
+                                          <p:stCondLst>
+                                            <p:cond delay="0"/>
+                                          </p:stCondLst>
+                                        </p:cTn>
+                                        <p:tgtEl>
+                                          <p:spTgt spid="12"/>
+                                        </p:tgtEl>
+                                        <p:attrNameLst>
+                                          <p:attrName>style.visibility</p:attrName>
+                                        </p:attrNameLst>
+                                      </p:cBhvr>
+                                      <p:to>
+                                        <p:strVal val="visible"/>
+                                      </p:to>
+                                    </p:set>
+                                  </p:childTnLst>
+                                </p:cTn>
+                              </p:par>
+                              <p:par>
+                                <p:cTn id="21" presetID="1" presetClass="entr" presetSubtype="0" fill="hold" grpId="0" nodeType="withEffect">
+                                  <p:stCondLst>
+                                    <p:cond delay="0"/>
+                                  </p:stCondLst>
+                                  <p:childTnLst>
+                                    <p:set>
+                                      <p:cBhvr>
+                                        <p:cTn id="22" dur="1" fill="hold">
+                                          <p:stCondLst>
+                                            <p:cond delay="0"/>
+                                          </p:stCondLst>
+                                        </p:cTn>
+                                        <p:tgtEl>
+                                          <p:spTgt spid="13"/>
+                                        </p:tgtEl>
+                                        <p:attrNameLst>
+                                          <p:attrName>style.visibility</p:attrName>
+                                        </p:attrNameLst>
+                                      </p:cBhvr>
+                                      <p:to>
+                                        <p:strVal val="visible"/>
+                                      </p:to>
+                                    </p:set>
+                                  </p:childTnLst>
+                                </p:cTn>
+                              </p:par>
+                            </p:childTnLst>
+                          </p:cTn>
+                        </p:par>
+                      </p:childTnLst>
+                    </p:cTn>
+                  </p:par>
+                  <p:par>
+                    <p:cTn id="23" fill="hold">
+                      <p:stCondLst>
+                        <p:cond delay="indefinite"/>
+                      </p:stCondLst>
+                      <p:childTnLst>
+                        <p:par>
+                          <p:cTn id="24" fill="hold">
+                            <p:stCondLst>
+                              <p:cond delay="0"/>
+                            </p:stCondLst>
+                            <p:childTnLst>
+                              <p:par>
+                                <p:cTn id="25" presetID="1" presetClass="entr" presetSubtype="0" fill="hold" grpId="0" nodeType="clickEffect">
+                                  <p:stCondLst>
+                                    <p:cond delay="0"/>
+                                  </p:stCondLst>
+                                  <p:childTnLst>
+                                    <p:set>
+                                      <p:cBhvr>
+                                        <p:cTn id="26" dur="1" fill="hold">
+                                          <p:stCondLst>
+                                            <p:cond delay="0"/>
+                                          </p:stCondLst>
+                                        </p:cTn>
+                                        <p:tgtEl>
+                                          <p:spTgt spid="14"/>
+                                        </p:tgtEl>
+                                        <p:attrNameLst>
+                                          <p:attrName>style.visibility</p:attrName>
+                                        </p:attrNameLst>
+                                      </p:cBhvr>
+                                      <p:to>
+                                        <p:strVal val="visible"/>
+                                      </p:to>
+                                    </p:set>
+                                  </p:childTnLst>
+                                </p:cTn>
+                              </p:par>
+                            </p:childTnLst>
+                          </p:cTn>
+                        </p:par>
+                      </p:childTnLst>
+                    </p:cTn>
+                  </p:par>
+                </p:childTnLst>
+              </p:cTn>
+              <p:prevCondLst>
+                <p:cond evt="onPrev" delay="0">
+                  <p:tgtEl>
+                    <p:sldTgt/>
+                  </p:tgtEl>
+                </p:cond>
+              </p:prevCondLst>
+              <p:nextCondLst>
+                <p:cond evt="onNext" delay="0">
+                  <p:tgtEl>
+                    <p:sldTgt/>
+                  </p:tgtEl>
+                </p:cond>
+              </p:nextCondLst>
+            </p:seq>
+          </p:childTnLst>
+        </p:cTn>
+      </p:par>
+    </p:tnLst>
+    <p:bldLst>
+      <p:bldP spid="14" grpId="0"/>
+      <p:bldP spid="3" grpId="0" animBg="1"/>
+      <p:bldP spid="8" grpId="0" animBg="1"/>
+      <p:bldP spid="9" grpId="0" animBg="1"/>
+      <p:bldP spid="10" grpId="0" animBg="1"/>
+      <p:bldP spid="11" grpId="0" animBg="1"/>
+      <p:bldP spid="12" grpId="0" animBg="1"/>
+      <p:bldP spid="13" grpId="0" animBg="1"/>
+    </p:bldLst>
+  </p:timing>
 </p:sld>
 </file>
 
@@ -14760,7 +16800,7 @@
                 <a:avLst/>
               </a:prstGeom>
               <a:blipFill>
-                <a:blip r:embed="rId2"/>
+                <a:blip r:embed="rId3"/>
                 <a:stretch>
                   <a:fillRect/>
                 </a:stretch>
@@ -17248,6 +19288,130 @@
   <p:clrMapOvr>
     <a:masterClrMapping/>
   </p:clrMapOvr>
+  <p:timing>
+    <p:tnLst>
+      <p:par>
+        <p:cTn id="1" dur="indefinite" restart="never" nodeType="tmRoot">
+          <p:childTnLst>
+            <p:seq concurrent="1" nextAc="seek">
+              <p:cTn id="2" dur="indefinite" nodeType="mainSeq">
+                <p:childTnLst>
+                  <p:par>
+                    <p:cTn id="3" fill="hold">
+                      <p:stCondLst>
+                        <p:cond delay="indefinite"/>
+                      </p:stCondLst>
+                      <p:childTnLst>
+                        <p:par>
+                          <p:cTn id="4" fill="hold">
+                            <p:stCondLst>
+                              <p:cond delay="0"/>
+                            </p:stCondLst>
+                            <p:childTnLst>
+                              <p:par>
+                                <p:cTn id="5" presetID="1" presetClass="entr" presetSubtype="0" fill="hold" grpId="0" nodeType="clickEffect">
+                                  <p:stCondLst>
+                                    <p:cond delay="0"/>
+                                  </p:stCondLst>
+                                  <p:childTnLst>
+                                    <p:set>
+                                      <p:cBhvr>
+                                        <p:cTn id="6" dur="1" fill="hold">
+                                          <p:stCondLst>
+                                            <p:cond delay="0"/>
+                                          </p:stCondLst>
+                                        </p:cTn>
+                                        <p:tgtEl>
+                                          <p:spTgt spid="6"/>
+                                        </p:tgtEl>
+                                        <p:attrNameLst>
+                                          <p:attrName>style.visibility</p:attrName>
+                                        </p:attrNameLst>
+                                      </p:cBhvr>
+                                      <p:to>
+                                        <p:strVal val="visible"/>
+                                      </p:to>
+                                    </p:set>
+                                  </p:childTnLst>
+                                </p:cTn>
+                              </p:par>
+                            </p:childTnLst>
+                          </p:cTn>
+                        </p:par>
+                      </p:childTnLst>
+                    </p:cTn>
+                  </p:par>
+                  <p:par>
+                    <p:cTn id="7" fill="hold">
+                      <p:stCondLst>
+                        <p:cond delay="indefinite"/>
+                      </p:stCondLst>
+                      <p:childTnLst>
+                        <p:par>
+                          <p:cTn id="8" fill="hold">
+                            <p:stCondLst>
+                              <p:cond delay="0"/>
+                            </p:stCondLst>
+                            <p:childTnLst>
+                              <p:par>
+                                <p:cTn id="9" presetID="1" presetClass="entr" presetSubtype="0" fill="hold" grpId="0" nodeType="clickEffect">
+                                  <p:stCondLst>
+                                    <p:cond delay="0"/>
+                                  </p:stCondLst>
+                                  <p:childTnLst>
+                                    <p:set>
+                                      <p:cBhvr>
+                                        <p:cTn id="10" dur="1" fill="hold">
+                                          <p:stCondLst>
+                                            <p:cond delay="0"/>
+                                          </p:stCondLst>
+                                        </p:cTn>
+                                        <p:tgtEl>
+                                          <p:spTgt spid="7"/>
+                                        </p:tgtEl>
+                                        <p:attrNameLst>
+                                          <p:attrName>style.visibility</p:attrName>
+                                        </p:attrNameLst>
+                                      </p:cBhvr>
+                                      <p:to>
+                                        <p:strVal val="visible"/>
+                                      </p:to>
+                                    </p:set>
+                                  </p:childTnLst>
+                                </p:cTn>
+                              </p:par>
+                            </p:childTnLst>
+                          </p:cTn>
+                        </p:par>
+                      </p:childTnLst>
+                    </p:cTn>
+                  </p:par>
+                </p:childTnLst>
+              </p:cTn>
+              <p:prevCondLst>
+                <p:cond evt="onPrev" delay="0">
+                  <p:tgtEl>
+                    <p:sldTgt/>
+                  </p:tgtEl>
+                </p:cond>
+              </p:prevCondLst>
+              <p:nextCondLst>
+                <p:cond evt="onNext" delay="0">
+                  <p:tgtEl>
+                    <p:sldTgt/>
+                  </p:tgtEl>
+                </p:cond>
+              </p:nextCondLst>
+            </p:seq>
+          </p:childTnLst>
+        </p:cTn>
+      </p:par>
+    </p:tnLst>
+    <p:bldLst>
+      <p:bldP spid="6" grpId="0"/>
+      <p:bldP spid="7" grpId="0"/>
+    </p:bldLst>
+  </p:timing>
 </p:sld>
 </file>
 
@@ -17649,6 +19813,88 @@
   <p:clrMapOvr>
     <a:masterClrMapping/>
   </p:clrMapOvr>
+  <p:timing>
+    <p:tnLst>
+      <p:par>
+        <p:cTn id="1" dur="indefinite" restart="never" nodeType="tmRoot">
+          <p:childTnLst>
+            <p:seq concurrent="1" nextAc="seek">
+              <p:cTn id="2" dur="indefinite" nodeType="mainSeq">
+                <p:childTnLst>
+                  <p:par>
+                    <p:cTn id="3" fill="hold">
+                      <p:stCondLst>
+                        <p:cond delay="indefinite"/>
+                      </p:stCondLst>
+                      <p:childTnLst>
+                        <p:par>
+                          <p:cTn id="4" fill="hold">
+                            <p:stCondLst>
+                              <p:cond delay="0"/>
+                            </p:stCondLst>
+                            <p:childTnLst>
+                              <p:par>
+                                <p:cTn id="5" presetID="1" presetClass="entr" presetSubtype="0" fill="hold" grpId="0" nodeType="clickEffect">
+                                  <p:stCondLst>
+                                    <p:cond delay="0"/>
+                                  </p:stCondLst>
+                                  <p:childTnLst>
+                                    <p:set>
+                                      <p:cBhvr>
+                                        <p:cTn id="6" dur="1" fill="hold">
+                                          <p:stCondLst>
+                                            <p:cond delay="0"/>
+                                          </p:stCondLst>
+                                        </p:cTn>
+                                        <p:tgtEl>
+                                          <p:spTgt spid="5">
+                                            <p:txEl>
+                                              <p:pRg st="0" end="0"/>
+                                            </p:txEl>
+                                          </p:spTgt>
+                                        </p:tgtEl>
+                                        <p:attrNameLst>
+                                          <p:attrName>style.visibility</p:attrName>
+                                        </p:attrNameLst>
+                                      </p:cBhvr>
+                                      <p:to>
+                                        <p:strVal val="visible"/>
+                                      </p:to>
+                                    </p:set>
+                                  </p:childTnLst>
+                                </p:cTn>
+                              </p:par>
+                            </p:childTnLst>
+                          </p:cTn>
+                        </p:par>
+                      </p:childTnLst>
+                    </p:cTn>
+                  </p:par>
+                </p:childTnLst>
+              </p:cTn>
+              <p:prevCondLst>
+                <p:cond evt="onPrev" delay="0">
+                  <p:tgtEl>
+                    <p:sldTgt/>
+                  </p:tgtEl>
+                </p:cond>
+              </p:prevCondLst>
+              <p:nextCondLst>
+                <p:cond evt="onNext" delay="0">
+                  <p:tgtEl>
+                    <p:sldTgt/>
+                  </p:tgtEl>
+                </p:cond>
+              </p:nextCondLst>
+            </p:seq>
+          </p:childTnLst>
+        </p:cTn>
+      </p:par>
+    </p:tnLst>
+    <p:bldLst>
+      <p:bldP spid="5" grpId="0" build="p"/>
+    </p:bldLst>
+  </p:timing>
 </p:sld>
 </file>
 
@@ -17973,125 +20219,6 @@
           <p:cNvPr id="2" name="Title 1">
             <a:extLst>
               <a:ext uri="{FF2B5EF4-FFF2-40B4-BE49-F238E27FC236}">
-                <a16:creationId xmlns:a16="http://schemas.microsoft.com/office/drawing/2014/main" id="{6ADE2DD7-0F28-4C38-82FD-C6D1A8C60B37}"/>
-              </a:ext>
-            </a:extLst>
-          </p:cNvPr>
-          <p:cNvSpPr>
-            <a:spLocks noGrp="1"/>
-          </p:cNvSpPr>
-          <p:nvPr>
-            <p:ph type="title"/>
-          </p:nvPr>
-        </p:nvSpPr>
-        <p:spPr/>
-        <p:txBody>
-          <a:bodyPr/>
-          <a:lstStyle/>
-          <a:p>
-            <a:r>
-              <a:rPr lang="sr-Cyrl-RS" dirty="0"/>
-              <a:t>ЕВАЛУАЦИЈА ХЕШ ТАБЕЛОМ – ПРАВЉЕЊЕ КЉУЧА</a:t>
-            </a:r>
-            <a:endParaRPr lang="en-US" dirty="0"/>
-          </a:p>
-        </p:txBody>
-      </p:sp>
-      <p:sp>
-        <p:nvSpPr>
-          <p:cNvPr id="3" name="Content Placeholder 2">
-            <a:extLst>
-              <a:ext uri="{FF2B5EF4-FFF2-40B4-BE49-F238E27FC236}">
-                <a16:creationId xmlns:a16="http://schemas.microsoft.com/office/drawing/2014/main" id="{637D1B16-36B2-42DD-B20F-94A477722E23}"/>
-              </a:ext>
-            </a:extLst>
-          </p:cNvPr>
-          <p:cNvSpPr>
-            <a:spLocks noGrp="1"/>
-          </p:cNvSpPr>
-          <p:nvPr>
-            <p:ph idx="1"/>
-          </p:nvPr>
-        </p:nvSpPr>
-        <p:spPr>
-          <a:xfrm>
-            <a:off x="1097280" y="2122571"/>
-            <a:ext cx="10940922" cy="4023360"/>
-          </a:xfrm>
-        </p:spPr>
-        <p:txBody>
-          <a:bodyPr>
-            <a:normAutofit/>
-          </a:bodyPr>
-          <a:lstStyle/>
-          <a:p>
-            <a:r>
-              <a:rPr lang="ru-RU" sz="2800" dirty="0"/>
-              <a:t>Токен: 	А 		В 		D 		A 		C</a:t>
-            </a:r>
-          </a:p>
-          <a:p>
-            <a:endParaRPr lang="ru-RU" sz="2800" dirty="0"/>
-          </a:p>
-          <a:p>
-            <a:r>
-              <a:rPr lang="ru-RU" sz="2800" dirty="0"/>
-              <a:t>ASCII: 	65 		66 		68 		65 		67</a:t>
-            </a:r>
-          </a:p>
-          <a:p>
-            <a:r>
-              <a:rPr lang="ru-RU" sz="2800" dirty="0"/>
-              <a:t>Позиција: 	0-7 		8-15 		16-23 	24-31 	32-39</a:t>
-            </a:r>
-          </a:p>
-          <a:p>
-            <a:endParaRPr lang="ru-RU" sz="2800" dirty="0"/>
-          </a:p>
-          <a:p>
-            <a:r>
-              <a:rPr lang="ru-RU" sz="2800" dirty="0"/>
-              <a:t>Кључ = 65 | (66 &lt;&lt; 8) | (68 &lt;&lt; 16) | (65 &lt;&lt; 24) | (67 &lt;&lt; 32)</a:t>
-            </a:r>
-            <a:endParaRPr lang="en-US" sz="2800" dirty="0"/>
-          </a:p>
-        </p:txBody>
-      </p:sp>
-    </p:spTree>
-    <p:extLst>
-      <p:ext uri="{BB962C8B-B14F-4D97-AF65-F5344CB8AC3E}">
-        <p14:creationId xmlns:p14="http://schemas.microsoft.com/office/powerpoint/2010/main" val="2278931090"/>
-      </p:ext>
-    </p:extLst>
-  </p:cSld>
-  <p:clrMapOvr>
-    <a:masterClrMapping/>
-  </p:clrMapOvr>
-</p:sld>
-</file>
-
-<file path=ppt/slides/slide37.xml><?xml version="1.0" encoding="utf-8"?>
-<p:sld xmlns:a="http://schemas.openxmlformats.org/drawingml/2006/main" xmlns:r="http://schemas.openxmlformats.org/officeDocument/2006/relationships" xmlns:p="http://schemas.openxmlformats.org/presentationml/2006/main">
-  <p:cSld>
-    <p:spTree>
-      <p:nvGrpSpPr>
-        <p:cNvPr id="1" name=""/>
-        <p:cNvGrpSpPr/>
-        <p:nvPr/>
-      </p:nvGrpSpPr>
-      <p:grpSpPr>
-        <a:xfrm>
-          <a:off x="0" y="0"/>
-          <a:ext cx="0" cy="0"/>
-          <a:chOff x="0" y="0"/>
-          <a:chExt cx="0" cy="0"/>
-        </a:xfrm>
-      </p:grpSpPr>
-      <p:sp>
-        <p:nvSpPr>
-          <p:cNvPr id="2" name="Title 1">
-            <a:extLst>
-              <a:ext uri="{FF2B5EF4-FFF2-40B4-BE49-F238E27FC236}">
                 <a16:creationId xmlns:a16="http://schemas.microsoft.com/office/drawing/2014/main" id="{1521CBB0-E3DB-4BFE-A667-346E6602D608}"/>
               </a:ext>
             </a:extLst>
@@ -18728,10 +20855,200 @@
   <p:clrMapOvr>
     <a:masterClrMapping/>
   </p:clrMapOvr>
+  <p:timing>
+    <p:tnLst>
+      <p:par>
+        <p:cTn id="1" dur="indefinite" restart="never" nodeType="tmRoot">
+          <p:childTnLst>
+            <p:seq concurrent="1" nextAc="seek">
+              <p:cTn id="2" dur="indefinite" nodeType="mainSeq">
+                <p:childTnLst>
+                  <p:par>
+                    <p:cTn id="3" fill="hold">
+                      <p:stCondLst>
+                        <p:cond delay="indefinite"/>
+                      </p:stCondLst>
+                      <p:childTnLst>
+                        <p:par>
+                          <p:cTn id="4" fill="hold">
+                            <p:stCondLst>
+                              <p:cond delay="0"/>
+                            </p:stCondLst>
+                            <p:childTnLst>
+                              <p:par>
+                                <p:cTn id="5" presetID="1" presetClass="entr" presetSubtype="0" fill="hold" grpId="0" nodeType="clickEffect">
+                                  <p:stCondLst>
+                                    <p:cond delay="0"/>
+                                  </p:stCondLst>
+                                  <p:childTnLst>
+                                    <p:set>
+                                      <p:cBhvr>
+                                        <p:cTn id="6" dur="1" fill="hold">
+                                          <p:stCondLst>
+                                            <p:cond delay="0"/>
+                                          </p:stCondLst>
+                                        </p:cTn>
+                                        <p:tgtEl>
+                                          <p:spTgt spid="7"/>
+                                        </p:tgtEl>
+                                        <p:attrNameLst>
+                                          <p:attrName>style.visibility</p:attrName>
+                                        </p:attrNameLst>
+                                      </p:cBhvr>
+                                      <p:to>
+                                        <p:strVal val="visible"/>
+                                      </p:to>
+                                    </p:set>
+                                  </p:childTnLst>
+                                </p:cTn>
+                              </p:par>
+                              <p:par>
+                                <p:cTn id="7" presetID="1" presetClass="entr" presetSubtype="0" fill="hold" grpId="0" nodeType="withEffect">
+                                  <p:stCondLst>
+                                    <p:cond delay="0"/>
+                                  </p:stCondLst>
+                                  <p:childTnLst>
+                                    <p:set>
+                                      <p:cBhvr>
+                                        <p:cTn id="8" dur="1" fill="hold">
+                                          <p:stCondLst>
+                                            <p:cond delay="0"/>
+                                          </p:stCondLst>
+                                        </p:cTn>
+                                        <p:tgtEl>
+                                          <p:spTgt spid="6"/>
+                                        </p:tgtEl>
+                                        <p:attrNameLst>
+                                          <p:attrName>style.visibility</p:attrName>
+                                        </p:attrNameLst>
+                                      </p:cBhvr>
+                                      <p:to>
+                                        <p:strVal val="visible"/>
+                                      </p:to>
+                                    </p:set>
+                                  </p:childTnLst>
+                                </p:cTn>
+                              </p:par>
+                              <p:par>
+                                <p:cTn id="9" presetID="1" presetClass="entr" presetSubtype="0" fill="hold" grpId="0" nodeType="withEffect">
+                                  <p:stCondLst>
+                                    <p:cond delay="0"/>
+                                  </p:stCondLst>
+                                  <p:childTnLst>
+                                    <p:set>
+                                      <p:cBhvr>
+                                        <p:cTn id="10" dur="1" fill="hold">
+                                          <p:stCondLst>
+                                            <p:cond delay="0"/>
+                                          </p:stCondLst>
+                                        </p:cTn>
+                                        <p:tgtEl>
+                                          <p:spTgt spid="8"/>
+                                        </p:tgtEl>
+                                        <p:attrNameLst>
+                                          <p:attrName>style.visibility</p:attrName>
+                                        </p:attrNameLst>
+                                      </p:cBhvr>
+                                      <p:to>
+                                        <p:strVal val="visible"/>
+                                      </p:to>
+                                    </p:set>
+                                  </p:childTnLst>
+                                </p:cTn>
+                              </p:par>
+                              <p:par>
+                                <p:cTn id="11" presetID="1" presetClass="entr" presetSubtype="0" fill="hold" grpId="0" nodeType="withEffect">
+                                  <p:stCondLst>
+                                    <p:cond delay="0"/>
+                                  </p:stCondLst>
+                                  <p:childTnLst>
+                                    <p:set>
+                                      <p:cBhvr>
+                                        <p:cTn id="12" dur="1" fill="hold">
+                                          <p:stCondLst>
+                                            <p:cond delay="0"/>
+                                          </p:stCondLst>
+                                        </p:cTn>
+                                        <p:tgtEl>
+                                          <p:spTgt spid="9"/>
+                                        </p:tgtEl>
+                                        <p:attrNameLst>
+                                          <p:attrName>style.visibility</p:attrName>
+                                        </p:attrNameLst>
+                                      </p:cBhvr>
+                                      <p:to>
+                                        <p:strVal val="visible"/>
+                                      </p:to>
+                                    </p:set>
+                                  </p:childTnLst>
+                                </p:cTn>
+                              </p:par>
+                              <p:par>
+                                <p:cTn id="13" presetID="1" presetClass="entr" presetSubtype="0" fill="hold" grpId="0" nodeType="withEffect">
+                                  <p:stCondLst>
+                                    <p:cond delay="0"/>
+                                  </p:stCondLst>
+                                  <p:childTnLst>
+                                    <p:set>
+                                      <p:cBhvr>
+                                        <p:cTn id="14" dur="1" fill="hold">
+                                          <p:stCondLst>
+                                            <p:cond delay="0"/>
+                                          </p:stCondLst>
+                                        </p:cTn>
+                                        <p:tgtEl>
+                                          <p:spTgt spid="5"/>
+                                        </p:tgtEl>
+                                        <p:attrNameLst>
+                                          <p:attrName>style.visibility</p:attrName>
+                                        </p:attrNameLst>
+                                      </p:cBhvr>
+                                      <p:to>
+                                        <p:strVal val="visible"/>
+                                      </p:to>
+                                    </p:set>
+                                  </p:childTnLst>
+                                </p:cTn>
+                              </p:par>
+                            </p:childTnLst>
+                          </p:cTn>
+                        </p:par>
+                      </p:childTnLst>
+                    </p:cTn>
+                  </p:par>
+                </p:childTnLst>
+              </p:cTn>
+              <p:prevCondLst>
+                <p:cond evt="onPrev" delay="0">
+                  <p:tgtEl>
+                    <p:sldTgt/>
+                  </p:tgtEl>
+                </p:cond>
+              </p:prevCondLst>
+              <p:nextCondLst>
+                <p:cond evt="onNext" delay="0">
+                  <p:tgtEl>
+                    <p:sldTgt/>
+                  </p:tgtEl>
+                </p:cond>
+              </p:nextCondLst>
+            </p:seq>
+          </p:childTnLst>
+        </p:cTn>
+      </p:par>
+    </p:tnLst>
+    <p:bldLst>
+      <p:bldP spid="5" grpId="0"/>
+      <p:bldP spid="6" grpId="0"/>
+      <p:bldP spid="7" grpId="0"/>
+      <p:bldP spid="8" grpId="0"/>
+      <p:bldP spid="9" grpId="0"/>
+    </p:bldLst>
+  </p:timing>
 </p:sld>
 </file>
 
-<file path=ppt/slides/slide38.xml><?xml version="1.0" encoding="utf-8"?>
+<file path=ppt/slides/slide37.xml><?xml version="1.0" encoding="utf-8"?>
 <p:sld xmlns:a="http://schemas.openxmlformats.org/drawingml/2006/main" xmlns:r="http://schemas.openxmlformats.org/officeDocument/2006/relationships" xmlns:p="http://schemas.openxmlformats.org/presentationml/2006/main">
   <p:cSld>
     <p:spTree>
@@ -20539,10 +22856,532 @@
   <p:clrMapOvr>
     <a:masterClrMapping/>
   </p:clrMapOvr>
+  <p:timing>
+    <p:tnLst>
+      <p:par>
+        <p:cTn id="1" dur="indefinite" restart="never" nodeType="tmRoot">
+          <p:childTnLst>
+            <p:seq concurrent="1" nextAc="seek">
+              <p:cTn id="2" dur="indefinite" nodeType="mainSeq">
+                <p:childTnLst>
+                  <p:par>
+                    <p:cTn id="3" fill="hold">
+                      <p:stCondLst>
+                        <p:cond delay="indefinite"/>
+                      </p:stCondLst>
+                      <p:childTnLst>
+                        <p:par>
+                          <p:cTn id="4" fill="hold">
+                            <p:stCondLst>
+                              <p:cond delay="0"/>
+                            </p:stCondLst>
+                            <p:childTnLst>
+                              <p:par>
+                                <p:cTn id="5" presetID="1" presetClass="entr" presetSubtype="0" fill="hold" grpId="0" nodeType="clickEffect">
+                                  <p:stCondLst>
+                                    <p:cond delay="0"/>
+                                  </p:stCondLst>
+                                  <p:childTnLst>
+                                    <p:set>
+                                      <p:cBhvr>
+                                        <p:cTn id="6" dur="1" fill="hold">
+                                          <p:stCondLst>
+                                            <p:cond delay="0"/>
+                                          </p:stCondLst>
+                                        </p:cTn>
+                                        <p:tgtEl>
+                                          <p:spTgt spid="14"/>
+                                        </p:tgtEl>
+                                        <p:attrNameLst>
+                                          <p:attrName>style.visibility</p:attrName>
+                                        </p:attrNameLst>
+                                      </p:cBhvr>
+                                      <p:to>
+                                        <p:strVal val="visible"/>
+                                      </p:to>
+                                    </p:set>
+                                  </p:childTnLst>
+                                </p:cTn>
+                              </p:par>
+                            </p:childTnLst>
+                          </p:cTn>
+                        </p:par>
+                      </p:childTnLst>
+                    </p:cTn>
+                  </p:par>
+                  <p:par>
+                    <p:cTn id="7" fill="hold">
+                      <p:stCondLst>
+                        <p:cond delay="indefinite"/>
+                      </p:stCondLst>
+                      <p:childTnLst>
+                        <p:par>
+                          <p:cTn id="8" fill="hold">
+                            <p:stCondLst>
+                              <p:cond delay="0"/>
+                            </p:stCondLst>
+                            <p:childTnLst>
+                              <p:par>
+                                <p:cTn id="9" presetID="1" presetClass="entr" presetSubtype="0" fill="hold" nodeType="clickEffect">
+                                  <p:stCondLst>
+                                    <p:cond delay="0"/>
+                                  </p:stCondLst>
+                                  <p:childTnLst>
+                                    <p:set>
+                                      <p:cBhvr>
+                                        <p:cTn id="10" dur="1" fill="hold">
+                                          <p:stCondLst>
+                                            <p:cond delay="0"/>
+                                          </p:stCondLst>
+                                        </p:cTn>
+                                        <p:tgtEl>
+                                          <p:spTgt spid="28"/>
+                                        </p:tgtEl>
+                                        <p:attrNameLst>
+                                          <p:attrName>style.visibility</p:attrName>
+                                        </p:attrNameLst>
+                                      </p:cBhvr>
+                                      <p:to>
+                                        <p:strVal val="visible"/>
+                                      </p:to>
+                                    </p:set>
+                                  </p:childTnLst>
+                                </p:cTn>
+                              </p:par>
+                              <p:par>
+                                <p:cTn id="11" presetID="1" presetClass="entr" presetSubtype="0" fill="hold" nodeType="withEffect">
+                                  <p:stCondLst>
+                                    <p:cond delay="0"/>
+                                  </p:stCondLst>
+                                  <p:childTnLst>
+                                    <p:set>
+                                      <p:cBhvr>
+                                        <p:cTn id="12" dur="1" fill="hold">
+                                          <p:stCondLst>
+                                            <p:cond delay="0"/>
+                                          </p:stCondLst>
+                                        </p:cTn>
+                                        <p:tgtEl>
+                                          <p:spTgt spid="29"/>
+                                        </p:tgtEl>
+                                        <p:attrNameLst>
+                                          <p:attrName>style.visibility</p:attrName>
+                                        </p:attrNameLst>
+                                      </p:cBhvr>
+                                      <p:to>
+                                        <p:strVal val="visible"/>
+                                      </p:to>
+                                    </p:set>
+                                  </p:childTnLst>
+                                </p:cTn>
+                              </p:par>
+                              <p:par>
+                                <p:cTn id="13" presetID="1" presetClass="entr" presetSubtype="0" fill="hold" nodeType="withEffect">
+                                  <p:stCondLst>
+                                    <p:cond delay="0"/>
+                                  </p:stCondLst>
+                                  <p:childTnLst>
+                                    <p:set>
+                                      <p:cBhvr>
+                                        <p:cTn id="14" dur="1" fill="hold">
+                                          <p:stCondLst>
+                                            <p:cond delay="0"/>
+                                          </p:stCondLst>
+                                        </p:cTn>
+                                        <p:tgtEl>
+                                          <p:spTgt spid="30"/>
+                                        </p:tgtEl>
+                                        <p:attrNameLst>
+                                          <p:attrName>style.visibility</p:attrName>
+                                        </p:attrNameLst>
+                                      </p:cBhvr>
+                                      <p:to>
+                                        <p:strVal val="visible"/>
+                                      </p:to>
+                                    </p:set>
+                                  </p:childTnLst>
+                                </p:cTn>
+                              </p:par>
+                              <p:par>
+                                <p:cTn id="15" presetID="1" presetClass="entr" presetSubtype="0" fill="hold" nodeType="withEffect">
+                                  <p:stCondLst>
+                                    <p:cond delay="0"/>
+                                  </p:stCondLst>
+                                  <p:childTnLst>
+                                    <p:set>
+                                      <p:cBhvr>
+                                        <p:cTn id="16" dur="1" fill="hold">
+                                          <p:stCondLst>
+                                            <p:cond delay="0"/>
+                                          </p:stCondLst>
+                                        </p:cTn>
+                                        <p:tgtEl>
+                                          <p:spTgt spid="31"/>
+                                        </p:tgtEl>
+                                        <p:attrNameLst>
+                                          <p:attrName>style.visibility</p:attrName>
+                                        </p:attrNameLst>
+                                      </p:cBhvr>
+                                      <p:to>
+                                        <p:strVal val="visible"/>
+                                      </p:to>
+                                    </p:set>
+                                  </p:childTnLst>
+                                </p:cTn>
+                              </p:par>
+                              <p:par>
+                                <p:cTn id="17" presetID="1" presetClass="entr" presetSubtype="0" fill="hold" nodeType="withEffect">
+                                  <p:stCondLst>
+                                    <p:cond delay="0"/>
+                                  </p:stCondLst>
+                                  <p:childTnLst>
+                                    <p:set>
+                                      <p:cBhvr>
+                                        <p:cTn id="18" dur="1" fill="hold">
+                                          <p:stCondLst>
+                                            <p:cond delay="0"/>
+                                          </p:stCondLst>
+                                        </p:cTn>
+                                        <p:tgtEl>
+                                          <p:spTgt spid="22"/>
+                                        </p:tgtEl>
+                                        <p:attrNameLst>
+                                          <p:attrName>style.visibility</p:attrName>
+                                        </p:attrNameLst>
+                                      </p:cBhvr>
+                                      <p:to>
+                                        <p:strVal val="visible"/>
+                                      </p:to>
+                                    </p:set>
+                                  </p:childTnLst>
+                                </p:cTn>
+                              </p:par>
+                              <p:par>
+                                <p:cTn id="19" presetID="1" presetClass="entr" presetSubtype="0" fill="hold" nodeType="withEffect">
+                                  <p:stCondLst>
+                                    <p:cond delay="0"/>
+                                  </p:stCondLst>
+                                  <p:childTnLst>
+                                    <p:set>
+                                      <p:cBhvr>
+                                        <p:cTn id="20" dur="1" fill="hold">
+                                          <p:stCondLst>
+                                            <p:cond delay="0"/>
+                                          </p:stCondLst>
+                                        </p:cTn>
+                                        <p:tgtEl>
+                                          <p:spTgt spid="23"/>
+                                        </p:tgtEl>
+                                        <p:attrNameLst>
+                                          <p:attrName>style.visibility</p:attrName>
+                                        </p:attrNameLst>
+                                      </p:cBhvr>
+                                      <p:to>
+                                        <p:strVal val="visible"/>
+                                      </p:to>
+                                    </p:set>
+                                  </p:childTnLst>
+                                </p:cTn>
+                              </p:par>
+                              <p:par>
+                                <p:cTn id="21" presetID="1" presetClass="entr" presetSubtype="0" fill="hold" nodeType="withEffect">
+                                  <p:stCondLst>
+                                    <p:cond delay="0"/>
+                                  </p:stCondLst>
+                                  <p:childTnLst>
+                                    <p:set>
+                                      <p:cBhvr>
+                                        <p:cTn id="22" dur="1" fill="hold">
+                                          <p:stCondLst>
+                                            <p:cond delay="0"/>
+                                          </p:stCondLst>
+                                        </p:cTn>
+                                        <p:tgtEl>
+                                          <p:spTgt spid="24"/>
+                                        </p:tgtEl>
+                                        <p:attrNameLst>
+                                          <p:attrName>style.visibility</p:attrName>
+                                        </p:attrNameLst>
+                                      </p:cBhvr>
+                                      <p:to>
+                                        <p:strVal val="visible"/>
+                                      </p:to>
+                                    </p:set>
+                                  </p:childTnLst>
+                                </p:cTn>
+                              </p:par>
+                              <p:par>
+                                <p:cTn id="23" presetID="1" presetClass="entr" presetSubtype="0" fill="hold" nodeType="withEffect">
+                                  <p:stCondLst>
+                                    <p:cond delay="0"/>
+                                  </p:stCondLst>
+                                  <p:childTnLst>
+                                    <p:set>
+                                      <p:cBhvr>
+                                        <p:cTn id="24" dur="1" fill="hold">
+                                          <p:stCondLst>
+                                            <p:cond delay="0"/>
+                                          </p:stCondLst>
+                                        </p:cTn>
+                                        <p:tgtEl>
+                                          <p:spTgt spid="25"/>
+                                        </p:tgtEl>
+                                        <p:attrNameLst>
+                                          <p:attrName>style.visibility</p:attrName>
+                                        </p:attrNameLst>
+                                      </p:cBhvr>
+                                      <p:to>
+                                        <p:strVal val="visible"/>
+                                      </p:to>
+                                    </p:set>
+                                  </p:childTnLst>
+                                </p:cTn>
+                              </p:par>
+                              <p:par>
+                                <p:cTn id="25" presetID="1" presetClass="entr" presetSubtype="0" fill="hold" nodeType="withEffect">
+                                  <p:stCondLst>
+                                    <p:cond delay="0"/>
+                                  </p:stCondLst>
+                                  <p:childTnLst>
+                                    <p:set>
+                                      <p:cBhvr>
+                                        <p:cTn id="26" dur="1" fill="hold">
+                                          <p:stCondLst>
+                                            <p:cond delay="0"/>
+                                          </p:stCondLst>
+                                        </p:cTn>
+                                        <p:tgtEl>
+                                          <p:spTgt spid="32"/>
+                                        </p:tgtEl>
+                                        <p:attrNameLst>
+                                          <p:attrName>style.visibility</p:attrName>
+                                        </p:attrNameLst>
+                                      </p:cBhvr>
+                                      <p:to>
+                                        <p:strVal val="visible"/>
+                                      </p:to>
+                                    </p:set>
+                                  </p:childTnLst>
+                                </p:cTn>
+                              </p:par>
+                              <p:par>
+                                <p:cTn id="27" presetID="1" presetClass="entr" presetSubtype="0" fill="hold" nodeType="withEffect">
+                                  <p:stCondLst>
+                                    <p:cond delay="0"/>
+                                  </p:stCondLst>
+                                  <p:childTnLst>
+                                    <p:set>
+                                      <p:cBhvr>
+                                        <p:cTn id="28" dur="1" fill="hold">
+                                          <p:stCondLst>
+                                            <p:cond delay="0"/>
+                                          </p:stCondLst>
+                                        </p:cTn>
+                                        <p:tgtEl>
+                                          <p:spTgt spid="33"/>
+                                        </p:tgtEl>
+                                        <p:attrNameLst>
+                                          <p:attrName>style.visibility</p:attrName>
+                                        </p:attrNameLst>
+                                      </p:cBhvr>
+                                      <p:to>
+                                        <p:strVal val="visible"/>
+                                      </p:to>
+                                    </p:set>
+                                  </p:childTnLst>
+                                </p:cTn>
+                              </p:par>
+                              <p:par>
+                                <p:cTn id="29" presetID="1" presetClass="entr" presetSubtype="0" fill="hold" nodeType="withEffect">
+                                  <p:stCondLst>
+                                    <p:cond delay="0"/>
+                                  </p:stCondLst>
+                                  <p:childTnLst>
+                                    <p:set>
+                                      <p:cBhvr>
+                                        <p:cTn id="30" dur="1" fill="hold">
+                                          <p:stCondLst>
+                                            <p:cond delay="0"/>
+                                          </p:stCondLst>
+                                        </p:cTn>
+                                        <p:tgtEl>
+                                          <p:spTgt spid="34"/>
+                                        </p:tgtEl>
+                                        <p:attrNameLst>
+                                          <p:attrName>style.visibility</p:attrName>
+                                        </p:attrNameLst>
+                                      </p:cBhvr>
+                                      <p:to>
+                                        <p:strVal val="visible"/>
+                                      </p:to>
+                                    </p:set>
+                                  </p:childTnLst>
+                                </p:cTn>
+                              </p:par>
+                              <p:par>
+                                <p:cTn id="31" presetID="1" presetClass="entr" presetSubtype="0" fill="hold" nodeType="withEffect">
+                                  <p:stCondLst>
+                                    <p:cond delay="0"/>
+                                  </p:stCondLst>
+                                  <p:childTnLst>
+                                    <p:set>
+                                      <p:cBhvr>
+                                        <p:cTn id="32" dur="1" fill="hold">
+                                          <p:stCondLst>
+                                            <p:cond delay="0"/>
+                                          </p:stCondLst>
+                                        </p:cTn>
+                                        <p:tgtEl>
+                                          <p:spTgt spid="35"/>
+                                        </p:tgtEl>
+                                        <p:attrNameLst>
+                                          <p:attrName>style.visibility</p:attrName>
+                                        </p:attrNameLst>
+                                      </p:cBhvr>
+                                      <p:to>
+                                        <p:strVal val="visible"/>
+                                      </p:to>
+                                    </p:set>
+                                  </p:childTnLst>
+                                </p:cTn>
+                              </p:par>
+                            </p:childTnLst>
+                          </p:cTn>
+                        </p:par>
+                      </p:childTnLst>
+                    </p:cTn>
+                  </p:par>
+                  <p:par>
+                    <p:cTn id="33" fill="hold">
+                      <p:stCondLst>
+                        <p:cond delay="indefinite"/>
+                      </p:stCondLst>
+                      <p:childTnLst>
+                        <p:par>
+                          <p:cTn id="34" fill="hold">
+                            <p:stCondLst>
+                              <p:cond delay="0"/>
+                            </p:stCondLst>
+                            <p:childTnLst>
+                              <p:par>
+                                <p:cTn id="35" presetID="1" presetClass="entr" presetSubtype="0" fill="hold" grpId="0" nodeType="clickEffect">
+                                  <p:stCondLst>
+                                    <p:cond delay="0"/>
+                                  </p:stCondLst>
+                                  <p:childTnLst>
+                                    <p:set>
+                                      <p:cBhvr>
+                                        <p:cTn id="36" dur="1" fill="hold">
+                                          <p:stCondLst>
+                                            <p:cond delay="0"/>
+                                          </p:stCondLst>
+                                        </p:cTn>
+                                        <p:tgtEl>
+                                          <p:spTgt spid="15"/>
+                                        </p:tgtEl>
+                                        <p:attrNameLst>
+                                          <p:attrName>style.visibility</p:attrName>
+                                        </p:attrNameLst>
+                                      </p:cBhvr>
+                                      <p:to>
+                                        <p:strVal val="visible"/>
+                                      </p:to>
+                                    </p:set>
+                                  </p:childTnLst>
+                                </p:cTn>
+                              </p:par>
+                              <p:par>
+                                <p:cTn id="37" presetID="1" presetClass="entr" presetSubtype="0" fill="hold" grpId="0" nodeType="withEffect">
+                                  <p:stCondLst>
+                                    <p:cond delay="0"/>
+                                  </p:stCondLst>
+                                  <p:childTnLst>
+                                    <p:set>
+                                      <p:cBhvr>
+                                        <p:cTn id="38" dur="1" fill="hold">
+                                          <p:stCondLst>
+                                            <p:cond delay="0"/>
+                                          </p:stCondLst>
+                                        </p:cTn>
+                                        <p:tgtEl>
+                                          <p:spTgt spid="16"/>
+                                        </p:tgtEl>
+                                        <p:attrNameLst>
+                                          <p:attrName>style.visibility</p:attrName>
+                                        </p:attrNameLst>
+                                      </p:cBhvr>
+                                      <p:to>
+                                        <p:strVal val="visible"/>
+                                      </p:to>
+                                    </p:set>
+                                  </p:childTnLst>
+                                </p:cTn>
+                              </p:par>
+                              <p:par>
+                                <p:cTn id="39" presetID="1" presetClass="entr" presetSubtype="0" fill="hold" grpId="0" nodeType="withEffect">
+                                  <p:stCondLst>
+                                    <p:cond delay="0"/>
+                                  </p:stCondLst>
+                                  <p:childTnLst>
+                                    <p:set>
+                                      <p:cBhvr>
+                                        <p:cTn id="40" dur="1" fill="hold">
+                                          <p:stCondLst>
+                                            <p:cond delay="0"/>
+                                          </p:stCondLst>
+                                        </p:cTn>
+                                        <p:tgtEl>
+                                          <p:spTgt spid="17"/>
+                                        </p:tgtEl>
+                                        <p:attrNameLst>
+                                          <p:attrName>style.visibility</p:attrName>
+                                        </p:attrNameLst>
+                                      </p:cBhvr>
+                                      <p:to>
+                                        <p:strVal val="visible"/>
+                                      </p:to>
+                                    </p:set>
+                                  </p:childTnLst>
+                                </p:cTn>
+                              </p:par>
+                            </p:childTnLst>
+                          </p:cTn>
+                        </p:par>
+                      </p:childTnLst>
+                    </p:cTn>
+                  </p:par>
+                </p:childTnLst>
+              </p:cTn>
+              <p:prevCondLst>
+                <p:cond evt="onPrev" delay="0">
+                  <p:tgtEl>
+                    <p:sldTgt/>
+                  </p:tgtEl>
+                </p:cond>
+              </p:prevCondLst>
+              <p:nextCondLst>
+                <p:cond evt="onNext" delay="0">
+                  <p:tgtEl>
+                    <p:sldTgt/>
+                  </p:tgtEl>
+                </p:cond>
+              </p:nextCondLst>
+            </p:seq>
+          </p:childTnLst>
+        </p:cTn>
+      </p:par>
+    </p:tnLst>
+    <p:bldLst>
+      <p:bldP spid="14" grpId="0"/>
+      <p:bldP spid="15" grpId="0" animBg="1"/>
+      <p:bldP spid="16" grpId="0" animBg="1"/>
+      <p:bldP spid="17" grpId="0" animBg="1"/>
+    </p:bldLst>
+  </p:timing>
 </p:sld>
 </file>
 
-<file path=ppt/slides/slide39.xml><?xml version="1.0" encoding="utf-8"?>
+<file path=ppt/slides/slide38.xml><?xml version="1.0" encoding="utf-8"?>
 <p:sld xmlns:a="http://schemas.openxmlformats.org/drawingml/2006/main" xmlns:r="http://schemas.openxmlformats.org/officeDocument/2006/relationships" xmlns:p="http://schemas.openxmlformats.org/presentationml/2006/main">
   <p:cSld>
     <p:spTree>
@@ -20596,28 +23435,40 @@
           <a:p>
             <a:r>
               <a:rPr lang="ru-RU" sz="2000" dirty="0"/>
-              <a:t>Путања 1: (0, 0, 0, 0, 0) </a:t>
+              <a:t>Путања 1: (0, 0, 0, 0) </a:t>
             </a:r>
             <a:endParaRPr lang="sr-Latn-RS" sz="2000" dirty="0"/>
           </a:p>
           <a:p>
             <a:r>
               <a:rPr lang="ru-RU" sz="2000" dirty="0"/>
-              <a:t>Путања 2: (0, 0, 0, 1, 2) </a:t>
+              <a:t>Путања 2: (0, 0, 1, 2) </a:t>
             </a:r>
             <a:endParaRPr lang="sr-Latn-RS" sz="2000" dirty="0"/>
           </a:p>
           <a:p>
             <a:r>
               <a:rPr lang="ru-RU" sz="2000" dirty="0"/>
-              <a:t>Путања 2: (0, 1, 2, 1, 0) </a:t>
+              <a:t>Путања 2: (0, 1, 2, 0) </a:t>
             </a:r>
             <a:endParaRPr lang="sr-Latn-RS" sz="2000" dirty="0"/>
           </a:p>
           <a:p>
             <a:r>
               <a:rPr lang="ru-RU" sz="2000" dirty="0"/>
-              <a:t>Путања 4: (1, 1, 1, 1, 1) </a:t>
+              <a:t>Путања 4: (1, 1, </a:t>
+            </a:r>
+            <a:r>
+              <a:rPr lang="sr-Latn-RS" sz="2000" dirty="0"/>
+              <a:t>2</a:t>
+            </a:r>
+            <a:r>
+              <a:rPr lang="ru-RU" sz="2000"/>
+              <a:t>, </a:t>
+            </a:r>
+            <a:r>
+              <a:rPr lang="ru-RU" sz="2000" dirty="0"/>
+              <a:t>1) </a:t>
             </a:r>
             <a:endParaRPr lang="en-US" sz="2000" dirty="0"/>
           </a:p>
@@ -22307,6 +25158,1031 @@
   <p:clrMapOvr>
     <a:masterClrMapping/>
   </p:clrMapOvr>
+  <p:timing>
+    <p:tnLst>
+      <p:par>
+        <p:cTn id="1" dur="indefinite" restart="never" nodeType="tmRoot">
+          <p:childTnLst>
+            <p:seq concurrent="1" nextAc="seek">
+              <p:cTn id="2" dur="indefinite" nodeType="mainSeq">
+                <p:childTnLst>
+                  <p:par>
+                    <p:cTn id="3" fill="hold">
+                      <p:stCondLst>
+                        <p:cond delay="indefinite"/>
+                      </p:stCondLst>
+                      <p:childTnLst>
+                        <p:par>
+                          <p:cTn id="4" fill="hold">
+                            <p:stCondLst>
+                              <p:cond delay="0"/>
+                            </p:stCondLst>
+                            <p:childTnLst>
+                              <p:par>
+                                <p:cTn id="5" presetID="1" presetClass="entr" presetSubtype="0" fill="hold" grpId="0" nodeType="clickEffect">
+                                  <p:stCondLst>
+                                    <p:cond delay="0"/>
+                                  </p:stCondLst>
+                                  <p:childTnLst>
+                                    <p:set>
+                                      <p:cBhvr>
+                                        <p:cTn id="6" dur="1" fill="hold">
+                                          <p:stCondLst>
+                                            <p:cond delay="0"/>
+                                          </p:stCondLst>
+                                        </p:cTn>
+                                        <p:tgtEl>
+                                          <p:spTgt spid="3"/>
+                                        </p:tgtEl>
+                                        <p:attrNameLst>
+                                          <p:attrName>style.visibility</p:attrName>
+                                        </p:attrNameLst>
+                                      </p:cBhvr>
+                                      <p:to>
+                                        <p:strVal val="visible"/>
+                                      </p:to>
+                                    </p:set>
+                                  </p:childTnLst>
+                                </p:cTn>
+                              </p:par>
+                              <p:par>
+                                <p:cTn id="7" presetID="1" presetClass="entr" presetSubtype="0" fill="hold" grpId="0" nodeType="withEffect">
+                                  <p:stCondLst>
+                                    <p:cond delay="0"/>
+                                  </p:stCondLst>
+                                  <p:childTnLst>
+                                    <p:set>
+                                      <p:cBhvr>
+                                        <p:cTn id="8" dur="1" fill="hold">
+                                          <p:stCondLst>
+                                            <p:cond delay="0"/>
+                                          </p:stCondLst>
+                                        </p:cTn>
+                                        <p:tgtEl>
+                                          <p:spTgt spid="4"/>
+                                        </p:tgtEl>
+                                        <p:attrNameLst>
+                                          <p:attrName>style.visibility</p:attrName>
+                                        </p:attrNameLst>
+                                      </p:cBhvr>
+                                      <p:to>
+                                        <p:strVal val="visible"/>
+                                      </p:to>
+                                    </p:set>
+                                  </p:childTnLst>
+                                </p:cTn>
+                              </p:par>
+                              <p:par>
+                                <p:cTn id="9" presetID="1" presetClass="entr" presetSubtype="0" fill="hold" grpId="0" nodeType="withEffect">
+                                  <p:stCondLst>
+                                    <p:cond delay="0"/>
+                                  </p:stCondLst>
+                                  <p:childTnLst>
+                                    <p:set>
+                                      <p:cBhvr>
+                                        <p:cTn id="10" dur="1" fill="hold">
+                                          <p:stCondLst>
+                                            <p:cond delay="0"/>
+                                          </p:stCondLst>
+                                        </p:cTn>
+                                        <p:tgtEl>
+                                          <p:spTgt spid="5"/>
+                                        </p:tgtEl>
+                                        <p:attrNameLst>
+                                          <p:attrName>style.visibility</p:attrName>
+                                        </p:attrNameLst>
+                                      </p:cBhvr>
+                                      <p:to>
+                                        <p:strVal val="visible"/>
+                                      </p:to>
+                                    </p:set>
+                                  </p:childTnLst>
+                                </p:cTn>
+                              </p:par>
+                              <p:par>
+                                <p:cTn id="11" presetID="1" presetClass="entr" presetSubtype="0" fill="hold" grpId="0" nodeType="withEffect">
+                                  <p:stCondLst>
+                                    <p:cond delay="0"/>
+                                  </p:stCondLst>
+                                  <p:childTnLst>
+                                    <p:set>
+                                      <p:cBhvr>
+                                        <p:cTn id="12" dur="1" fill="hold">
+                                          <p:stCondLst>
+                                            <p:cond delay="0"/>
+                                          </p:stCondLst>
+                                        </p:cTn>
+                                        <p:tgtEl>
+                                          <p:spTgt spid="6"/>
+                                        </p:tgtEl>
+                                        <p:attrNameLst>
+                                          <p:attrName>style.visibility</p:attrName>
+                                        </p:attrNameLst>
+                                      </p:cBhvr>
+                                      <p:to>
+                                        <p:strVal val="visible"/>
+                                      </p:to>
+                                    </p:set>
+                                  </p:childTnLst>
+                                </p:cTn>
+                              </p:par>
+                              <p:par>
+                                <p:cTn id="13" presetID="1" presetClass="entr" presetSubtype="0" fill="hold" grpId="0" nodeType="withEffect">
+                                  <p:stCondLst>
+                                    <p:cond delay="0"/>
+                                  </p:stCondLst>
+                                  <p:childTnLst>
+                                    <p:set>
+                                      <p:cBhvr>
+                                        <p:cTn id="14" dur="1" fill="hold">
+                                          <p:stCondLst>
+                                            <p:cond delay="0"/>
+                                          </p:stCondLst>
+                                        </p:cTn>
+                                        <p:tgtEl>
+                                          <p:spTgt spid="7"/>
+                                        </p:tgtEl>
+                                        <p:attrNameLst>
+                                          <p:attrName>style.visibility</p:attrName>
+                                        </p:attrNameLst>
+                                      </p:cBhvr>
+                                      <p:to>
+                                        <p:strVal val="visible"/>
+                                      </p:to>
+                                    </p:set>
+                                  </p:childTnLst>
+                                </p:cTn>
+                              </p:par>
+                              <p:par>
+                                <p:cTn id="15" presetID="1" presetClass="entr" presetSubtype="0" fill="hold" grpId="0" nodeType="withEffect">
+                                  <p:stCondLst>
+                                    <p:cond delay="0"/>
+                                  </p:stCondLst>
+                                  <p:childTnLst>
+                                    <p:set>
+                                      <p:cBhvr>
+                                        <p:cTn id="16" dur="1" fill="hold">
+                                          <p:stCondLst>
+                                            <p:cond delay="0"/>
+                                          </p:stCondLst>
+                                        </p:cTn>
+                                        <p:tgtEl>
+                                          <p:spTgt spid="8"/>
+                                        </p:tgtEl>
+                                        <p:attrNameLst>
+                                          <p:attrName>style.visibility</p:attrName>
+                                        </p:attrNameLst>
+                                      </p:cBhvr>
+                                      <p:to>
+                                        <p:strVal val="visible"/>
+                                      </p:to>
+                                    </p:set>
+                                  </p:childTnLst>
+                                </p:cTn>
+                              </p:par>
+                              <p:par>
+                                <p:cTn id="17" presetID="1" presetClass="entr" presetSubtype="0" fill="hold" grpId="0" nodeType="withEffect">
+                                  <p:stCondLst>
+                                    <p:cond delay="0"/>
+                                  </p:stCondLst>
+                                  <p:childTnLst>
+                                    <p:set>
+                                      <p:cBhvr>
+                                        <p:cTn id="18" dur="1" fill="hold">
+                                          <p:stCondLst>
+                                            <p:cond delay="0"/>
+                                          </p:stCondLst>
+                                        </p:cTn>
+                                        <p:tgtEl>
+                                          <p:spTgt spid="9"/>
+                                        </p:tgtEl>
+                                        <p:attrNameLst>
+                                          <p:attrName>style.visibility</p:attrName>
+                                        </p:attrNameLst>
+                                      </p:cBhvr>
+                                      <p:to>
+                                        <p:strVal val="visible"/>
+                                      </p:to>
+                                    </p:set>
+                                  </p:childTnLst>
+                                </p:cTn>
+                              </p:par>
+                              <p:par>
+                                <p:cTn id="19" presetID="1" presetClass="entr" presetSubtype="0" fill="hold" grpId="0" nodeType="withEffect">
+                                  <p:stCondLst>
+                                    <p:cond delay="0"/>
+                                  </p:stCondLst>
+                                  <p:childTnLst>
+                                    <p:set>
+                                      <p:cBhvr>
+                                        <p:cTn id="20" dur="1" fill="hold">
+                                          <p:stCondLst>
+                                            <p:cond delay="0"/>
+                                          </p:stCondLst>
+                                        </p:cTn>
+                                        <p:tgtEl>
+                                          <p:spTgt spid="10"/>
+                                        </p:tgtEl>
+                                        <p:attrNameLst>
+                                          <p:attrName>style.visibility</p:attrName>
+                                        </p:attrNameLst>
+                                      </p:cBhvr>
+                                      <p:to>
+                                        <p:strVal val="visible"/>
+                                      </p:to>
+                                    </p:set>
+                                  </p:childTnLst>
+                                </p:cTn>
+                              </p:par>
+                              <p:par>
+                                <p:cTn id="21" presetID="1" presetClass="entr" presetSubtype="0" fill="hold" grpId="0" nodeType="withEffect">
+                                  <p:stCondLst>
+                                    <p:cond delay="0"/>
+                                  </p:stCondLst>
+                                  <p:childTnLst>
+                                    <p:set>
+                                      <p:cBhvr>
+                                        <p:cTn id="22" dur="1" fill="hold">
+                                          <p:stCondLst>
+                                            <p:cond delay="0"/>
+                                          </p:stCondLst>
+                                        </p:cTn>
+                                        <p:tgtEl>
+                                          <p:spTgt spid="11"/>
+                                        </p:tgtEl>
+                                        <p:attrNameLst>
+                                          <p:attrName>style.visibility</p:attrName>
+                                        </p:attrNameLst>
+                                      </p:cBhvr>
+                                      <p:to>
+                                        <p:strVal val="visible"/>
+                                      </p:to>
+                                    </p:set>
+                                  </p:childTnLst>
+                                </p:cTn>
+                              </p:par>
+                              <p:par>
+                                <p:cTn id="23" presetID="1" presetClass="entr" presetSubtype="0" fill="hold" nodeType="withEffect">
+                                  <p:stCondLst>
+                                    <p:cond delay="0"/>
+                                  </p:stCondLst>
+                                  <p:childTnLst>
+                                    <p:set>
+                                      <p:cBhvr>
+                                        <p:cTn id="24" dur="1" fill="hold">
+                                          <p:stCondLst>
+                                            <p:cond delay="0"/>
+                                          </p:stCondLst>
+                                        </p:cTn>
+                                        <p:tgtEl>
+                                          <p:spTgt spid="13"/>
+                                        </p:tgtEl>
+                                        <p:attrNameLst>
+                                          <p:attrName>style.visibility</p:attrName>
+                                        </p:attrNameLst>
+                                      </p:cBhvr>
+                                      <p:to>
+                                        <p:strVal val="visible"/>
+                                      </p:to>
+                                    </p:set>
+                                  </p:childTnLst>
+                                </p:cTn>
+                              </p:par>
+                              <p:par>
+                                <p:cTn id="25" presetID="1" presetClass="entr" presetSubtype="0" fill="hold" nodeType="withEffect">
+                                  <p:stCondLst>
+                                    <p:cond delay="0"/>
+                                  </p:stCondLst>
+                                  <p:childTnLst>
+                                    <p:set>
+                                      <p:cBhvr>
+                                        <p:cTn id="26" dur="1" fill="hold">
+                                          <p:stCondLst>
+                                            <p:cond delay="0"/>
+                                          </p:stCondLst>
+                                        </p:cTn>
+                                        <p:tgtEl>
+                                          <p:spTgt spid="16"/>
+                                        </p:tgtEl>
+                                        <p:attrNameLst>
+                                          <p:attrName>style.visibility</p:attrName>
+                                        </p:attrNameLst>
+                                      </p:cBhvr>
+                                      <p:to>
+                                        <p:strVal val="visible"/>
+                                      </p:to>
+                                    </p:set>
+                                  </p:childTnLst>
+                                </p:cTn>
+                              </p:par>
+                              <p:par>
+                                <p:cTn id="27" presetID="1" presetClass="entr" presetSubtype="0" fill="hold" nodeType="withEffect">
+                                  <p:stCondLst>
+                                    <p:cond delay="0"/>
+                                  </p:stCondLst>
+                                  <p:childTnLst>
+                                    <p:set>
+                                      <p:cBhvr>
+                                        <p:cTn id="28" dur="1" fill="hold">
+                                          <p:stCondLst>
+                                            <p:cond delay="0"/>
+                                          </p:stCondLst>
+                                        </p:cTn>
+                                        <p:tgtEl>
+                                          <p:spTgt spid="18"/>
+                                        </p:tgtEl>
+                                        <p:attrNameLst>
+                                          <p:attrName>style.visibility</p:attrName>
+                                        </p:attrNameLst>
+                                      </p:cBhvr>
+                                      <p:to>
+                                        <p:strVal val="visible"/>
+                                      </p:to>
+                                    </p:set>
+                                  </p:childTnLst>
+                                </p:cTn>
+                              </p:par>
+                              <p:par>
+                                <p:cTn id="29" presetID="1" presetClass="entr" presetSubtype="0" fill="hold" nodeType="withEffect">
+                                  <p:stCondLst>
+                                    <p:cond delay="0"/>
+                                  </p:stCondLst>
+                                  <p:childTnLst>
+                                    <p:set>
+                                      <p:cBhvr>
+                                        <p:cTn id="30" dur="1" fill="hold">
+                                          <p:stCondLst>
+                                            <p:cond delay="0"/>
+                                          </p:stCondLst>
+                                        </p:cTn>
+                                        <p:tgtEl>
+                                          <p:spTgt spid="19"/>
+                                        </p:tgtEl>
+                                        <p:attrNameLst>
+                                          <p:attrName>style.visibility</p:attrName>
+                                        </p:attrNameLst>
+                                      </p:cBhvr>
+                                      <p:to>
+                                        <p:strVal val="visible"/>
+                                      </p:to>
+                                    </p:set>
+                                  </p:childTnLst>
+                                </p:cTn>
+                              </p:par>
+                              <p:par>
+                                <p:cTn id="31" presetID="1" presetClass="entr" presetSubtype="0" fill="hold" nodeType="withEffect">
+                                  <p:stCondLst>
+                                    <p:cond delay="0"/>
+                                  </p:stCondLst>
+                                  <p:childTnLst>
+                                    <p:set>
+                                      <p:cBhvr>
+                                        <p:cTn id="32" dur="1" fill="hold">
+                                          <p:stCondLst>
+                                            <p:cond delay="0"/>
+                                          </p:stCondLst>
+                                        </p:cTn>
+                                        <p:tgtEl>
+                                          <p:spTgt spid="22"/>
+                                        </p:tgtEl>
+                                        <p:attrNameLst>
+                                          <p:attrName>style.visibility</p:attrName>
+                                        </p:attrNameLst>
+                                      </p:cBhvr>
+                                      <p:to>
+                                        <p:strVal val="visible"/>
+                                      </p:to>
+                                    </p:set>
+                                  </p:childTnLst>
+                                </p:cTn>
+                              </p:par>
+                              <p:par>
+                                <p:cTn id="33" presetID="1" presetClass="entr" presetSubtype="0" fill="hold" nodeType="withEffect">
+                                  <p:stCondLst>
+                                    <p:cond delay="0"/>
+                                  </p:stCondLst>
+                                  <p:childTnLst>
+                                    <p:set>
+                                      <p:cBhvr>
+                                        <p:cTn id="34" dur="1" fill="hold">
+                                          <p:stCondLst>
+                                            <p:cond delay="0"/>
+                                          </p:stCondLst>
+                                        </p:cTn>
+                                        <p:tgtEl>
+                                          <p:spTgt spid="25"/>
+                                        </p:tgtEl>
+                                        <p:attrNameLst>
+                                          <p:attrName>style.visibility</p:attrName>
+                                        </p:attrNameLst>
+                                      </p:cBhvr>
+                                      <p:to>
+                                        <p:strVal val="visible"/>
+                                      </p:to>
+                                    </p:set>
+                                  </p:childTnLst>
+                                </p:cTn>
+                              </p:par>
+                              <p:par>
+                                <p:cTn id="35" presetID="1" presetClass="entr" presetSubtype="0" fill="hold" nodeType="withEffect">
+                                  <p:stCondLst>
+                                    <p:cond delay="0"/>
+                                  </p:stCondLst>
+                                  <p:childTnLst>
+                                    <p:set>
+                                      <p:cBhvr>
+                                        <p:cTn id="36" dur="1" fill="hold">
+                                          <p:stCondLst>
+                                            <p:cond delay="0"/>
+                                          </p:stCondLst>
+                                        </p:cTn>
+                                        <p:tgtEl>
+                                          <p:spTgt spid="28"/>
+                                        </p:tgtEl>
+                                        <p:attrNameLst>
+                                          <p:attrName>style.visibility</p:attrName>
+                                        </p:attrNameLst>
+                                      </p:cBhvr>
+                                      <p:to>
+                                        <p:strVal val="visible"/>
+                                      </p:to>
+                                    </p:set>
+                                  </p:childTnLst>
+                                </p:cTn>
+                              </p:par>
+                              <p:par>
+                                <p:cTn id="37" presetID="1" presetClass="entr" presetSubtype="0" fill="hold" nodeType="withEffect">
+                                  <p:stCondLst>
+                                    <p:cond delay="0"/>
+                                  </p:stCondLst>
+                                  <p:childTnLst>
+                                    <p:set>
+                                      <p:cBhvr>
+                                        <p:cTn id="38" dur="1" fill="hold">
+                                          <p:stCondLst>
+                                            <p:cond delay="0"/>
+                                          </p:stCondLst>
+                                        </p:cTn>
+                                        <p:tgtEl>
+                                          <p:spTgt spid="31"/>
+                                        </p:tgtEl>
+                                        <p:attrNameLst>
+                                          <p:attrName>style.visibility</p:attrName>
+                                        </p:attrNameLst>
+                                      </p:cBhvr>
+                                      <p:to>
+                                        <p:strVal val="visible"/>
+                                      </p:to>
+                                    </p:set>
+                                  </p:childTnLst>
+                                </p:cTn>
+                              </p:par>
+                              <p:par>
+                                <p:cTn id="39" presetID="1" presetClass="entr" presetSubtype="0" fill="hold" grpId="0" nodeType="withEffect">
+                                  <p:stCondLst>
+                                    <p:cond delay="0"/>
+                                  </p:stCondLst>
+                                  <p:childTnLst>
+                                    <p:set>
+                                      <p:cBhvr>
+                                        <p:cTn id="40" dur="1" fill="hold">
+                                          <p:stCondLst>
+                                            <p:cond delay="0"/>
+                                          </p:stCondLst>
+                                        </p:cTn>
+                                        <p:tgtEl>
+                                          <p:spTgt spid="39"/>
+                                        </p:tgtEl>
+                                        <p:attrNameLst>
+                                          <p:attrName>style.visibility</p:attrName>
+                                        </p:attrNameLst>
+                                      </p:cBhvr>
+                                      <p:to>
+                                        <p:strVal val="visible"/>
+                                      </p:to>
+                                    </p:set>
+                                  </p:childTnLst>
+                                </p:cTn>
+                              </p:par>
+                              <p:par>
+                                <p:cTn id="41" presetID="1" presetClass="entr" presetSubtype="0" fill="hold" grpId="0" nodeType="withEffect">
+                                  <p:stCondLst>
+                                    <p:cond delay="0"/>
+                                  </p:stCondLst>
+                                  <p:childTnLst>
+                                    <p:set>
+                                      <p:cBhvr>
+                                        <p:cTn id="42" dur="1" fill="hold">
+                                          <p:stCondLst>
+                                            <p:cond delay="0"/>
+                                          </p:stCondLst>
+                                        </p:cTn>
+                                        <p:tgtEl>
+                                          <p:spTgt spid="40"/>
+                                        </p:tgtEl>
+                                        <p:attrNameLst>
+                                          <p:attrName>style.visibility</p:attrName>
+                                        </p:attrNameLst>
+                                      </p:cBhvr>
+                                      <p:to>
+                                        <p:strVal val="visible"/>
+                                      </p:to>
+                                    </p:set>
+                                  </p:childTnLst>
+                                </p:cTn>
+                              </p:par>
+                              <p:par>
+                                <p:cTn id="43" presetID="1" presetClass="entr" presetSubtype="0" fill="hold" grpId="0" nodeType="withEffect">
+                                  <p:stCondLst>
+                                    <p:cond delay="0"/>
+                                  </p:stCondLst>
+                                  <p:childTnLst>
+                                    <p:set>
+                                      <p:cBhvr>
+                                        <p:cTn id="44" dur="1" fill="hold">
+                                          <p:stCondLst>
+                                            <p:cond delay="0"/>
+                                          </p:stCondLst>
+                                        </p:cTn>
+                                        <p:tgtEl>
+                                          <p:spTgt spid="41"/>
+                                        </p:tgtEl>
+                                        <p:attrNameLst>
+                                          <p:attrName>style.visibility</p:attrName>
+                                        </p:attrNameLst>
+                                      </p:cBhvr>
+                                      <p:to>
+                                        <p:strVal val="visible"/>
+                                      </p:to>
+                                    </p:set>
+                                  </p:childTnLst>
+                                </p:cTn>
+                              </p:par>
+                              <p:par>
+                                <p:cTn id="45" presetID="1" presetClass="entr" presetSubtype="0" fill="hold" grpId="0" nodeType="withEffect">
+                                  <p:stCondLst>
+                                    <p:cond delay="0"/>
+                                  </p:stCondLst>
+                                  <p:childTnLst>
+                                    <p:set>
+                                      <p:cBhvr>
+                                        <p:cTn id="46" dur="1" fill="hold">
+                                          <p:stCondLst>
+                                            <p:cond delay="0"/>
+                                          </p:stCondLst>
+                                        </p:cTn>
+                                        <p:tgtEl>
+                                          <p:spTgt spid="42"/>
+                                        </p:tgtEl>
+                                        <p:attrNameLst>
+                                          <p:attrName>style.visibility</p:attrName>
+                                        </p:attrNameLst>
+                                      </p:cBhvr>
+                                      <p:to>
+                                        <p:strVal val="visible"/>
+                                      </p:to>
+                                    </p:set>
+                                  </p:childTnLst>
+                                </p:cTn>
+                              </p:par>
+                              <p:par>
+                                <p:cTn id="47" presetID="1" presetClass="entr" presetSubtype="0" fill="hold" nodeType="withEffect">
+                                  <p:stCondLst>
+                                    <p:cond delay="0"/>
+                                  </p:stCondLst>
+                                  <p:childTnLst>
+                                    <p:set>
+                                      <p:cBhvr>
+                                        <p:cTn id="48" dur="1" fill="hold">
+                                          <p:stCondLst>
+                                            <p:cond delay="0"/>
+                                          </p:stCondLst>
+                                        </p:cTn>
+                                        <p:tgtEl>
+                                          <p:spTgt spid="43"/>
+                                        </p:tgtEl>
+                                        <p:attrNameLst>
+                                          <p:attrName>style.visibility</p:attrName>
+                                        </p:attrNameLst>
+                                      </p:cBhvr>
+                                      <p:to>
+                                        <p:strVal val="visible"/>
+                                      </p:to>
+                                    </p:set>
+                                  </p:childTnLst>
+                                </p:cTn>
+                              </p:par>
+                              <p:par>
+                                <p:cTn id="49" presetID="1" presetClass="entr" presetSubtype="0" fill="hold" nodeType="withEffect">
+                                  <p:stCondLst>
+                                    <p:cond delay="0"/>
+                                  </p:stCondLst>
+                                  <p:childTnLst>
+                                    <p:set>
+                                      <p:cBhvr>
+                                        <p:cTn id="50" dur="1" fill="hold">
+                                          <p:stCondLst>
+                                            <p:cond delay="0"/>
+                                          </p:stCondLst>
+                                        </p:cTn>
+                                        <p:tgtEl>
+                                          <p:spTgt spid="46"/>
+                                        </p:tgtEl>
+                                        <p:attrNameLst>
+                                          <p:attrName>style.visibility</p:attrName>
+                                        </p:attrNameLst>
+                                      </p:cBhvr>
+                                      <p:to>
+                                        <p:strVal val="visible"/>
+                                      </p:to>
+                                    </p:set>
+                                  </p:childTnLst>
+                                </p:cTn>
+                              </p:par>
+                              <p:par>
+                                <p:cTn id="51" presetID="1" presetClass="entr" presetSubtype="0" fill="hold" nodeType="withEffect">
+                                  <p:stCondLst>
+                                    <p:cond delay="0"/>
+                                  </p:stCondLst>
+                                  <p:childTnLst>
+                                    <p:set>
+                                      <p:cBhvr>
+                                        <p:cTn id="52" dur="1" fill="hold">
+                                          <p:stCondLst>
+                                            <p:cond delay="0"/>
+                                          </p:stCondLst>
+                                        </p:cTn>
+                                        <p:tgtEl>
+                                          <p:spTgt spid="50"/>
+                                        </p:tgtEl>
+                                        <p:attrNameLst>
+                                          <p:attrName>style.visibility</p:attrName>
+                                        </p:attrNameLst>
+                                      </p:cBhvr>
+                                      <p:to>
+                                        <p:strVal val="visible"/>
+                                      </p:to>
+                                    </p:set>
+                                  </p:childTnLst>
+                                </p:cTn>
+                              </p:par>
+                              <p:par>
+                                <p:cTn id="53" presetID="1" presetClass="entr" presetSubtype="0" fill="hold" grpId="0" nodeType="withEffect">
+                                  <p:stCondLst>
+                                    <p:cond delay="0"/>
+                                  </p:stCondLst>
+                                  <p:childTnLst>
+                                    <p:set>
+                                      <p:cBhvr>
+                                        <p:cTn id="54" dur="1" fill="hold">
+                                          <p:stCondLst>
+                                            <p:cond delay="0"/>
+                                          </p:stCondLst>
+                                        </p:cTn>
+                                        <p:tgtEl>
+                                          <p:spTgt spid="53"/>
+                                        </p:tgtEl>
+                                        <p:attrNameLst>
+                                          <p:attrName>style.visibility</p:attrName>
+                                        </p:attrNameLst>
+                                      </p:cBhvr>
+                                      <p:to>
+                                        <p:strVal val="visible"/>
+                                      </p:to>
+                                    </p:set>
+                                  </p:childTnLst>
+                                </p:cTn>
+                              </p:par>
+                              <p:par>
+                                <p:cTn id="55" presetID="1" presetClass="entr" presetSubtype="0" fill="hold" grpId="0" nodeType="withEffect">
+                                  <p:stCondLst>
+                                    <p:cond delay="0"/>
+                                  </p:stCondLst>
+                                  <p:childTnLst>
+                                    <p:set>
+                                      <p:cBhvr>
+                                        <p:cTn id="56" dur="1" fill="hold">
+                                          <p:stCondLst>
+                                            <p:cond delay="0"/>
+                                          </p:stCondLst>
+                                        </p:cTn>
+                                        <p:tgtEl>
+                                          <p:spTgt spid="55"/>
+                                        </p:tgtEl>
+                                        <p:attrNameLst>
+                                          <p:attrName>style.visibility</p:attrName>
+                                        </p:attrNameLst>
+                                      </p:cBhvr>
+                                      <p:to>
+                                        <p:strVal val="visible"/>
+                                      </p:to>
+                                    </p:set>
+                                  </p:childTnLst>
+                                </p:cTn>
+                              </p:par>
+                              <p:par>
+                                <p:cTn id="57" presetID="1" presetClass="entr" presetSubtype="0" fill="hold" grpId="0" nodeType="withEffect">
+                                  <p:stCondLst>
+                                    <p:cond delay="0"/>
+                                  </p:stCondLst>
+                                  <p:childTnLst>
+                                    <p:set>
+                                      <p:cBhvr>
+                                        <p:cTn id="58" dur="1" fill="hold">
+                                          <p:stCondLst>
+                                            <p:cond delay="0"/>
+                                          </p:stCondLst>
+                                        </p:cTn>
+                                        <p:tgtEl>
+                                          <p:spTgt spid="56"/>
+                                        </p:tgtEl>
+                                        <p:attrNameLst>
+                                          <p:attrName>style.visibility</p:attrName>
+                                        </p:attrNameLst>
+                                      </p:cBhvr>
+                                      <p:to>
+                                        <p:strVal val="visible"/>
+                                      </p:to>
+                                    </p:set>
+                                  </p:childTnLst>
+                                </p:cTn>
+                              </p:par>
+                              <p:par>
+                                <p:cTn id="59" presetID="1" presetClass="entr" presetSubtype="0" fill="hold" grpId="0" nodeType="withEffect">
+                                  <p:stCondLst>
+                                    <p:cond delay="0"/>
+                                  </p:stCondLst>
+                                  <p:childTnLst>
+                                    <p:set>
+                                      <p:cBhvr>
+                                        <p:cTn id="60" dur="1" fill="hold">
+                                          <p:stCondLst>
+                                            <p:cond delay="0"/>
+                                          </p:stCondLst>
+                                        </p:cTn>
+                                        <p:tgtEl>
+                                          <p:spTgt spid="57"/>
+                                        </p:tgtEl>
+                                        <p:attrNameLst>
+                                          <p:attrName>style.visibility</p:attrName>
+                                        </p:attrNameLst>
+                                      </p:cBhvr>
+                                      <p:to>
+                                        <p:strVal val="visible"/>
+                                      </p:to>
+                                    </p:set>
+                                  </p:childTnLst>
+                                </p:cTn>
+                              </p:par>
+                            </p:childTnLst>
+                          </p:cTn>
+                        </p:par>
+                      </p:childTnLst>
+                    </p:cTn>
+                  </p:par>
+                  <p:par>
+                    <p:cTn id="61" fill="hold">
+                      <p:stCondLst>
+                        <p:cond delay="indefinite"/>
+                      </p:stCondLst>
+                      <p:childTnLst>
+                        <p:par>
+                          <p:cTn id="62" fill="hold">
+                            <p:stCondLst>
+                              <p:cond delay="0"/>
+                            </p:stCondLst>
+                            <p:childTnLst>
+                              <p:par>
+                                <p:cTn id="63" presetID="1" presetClass="entr" presetSubtype="0" fill="hold" grpId="0" nodeType="clickEffect">
+                                  <p:stCondLst>
+                                    <p:cond delay="0"/>
+                                  </p:stCondLst>
+                                  <p:childTnLst>
+                                    <p:set>
+                                      <p:cBhvr>
+                                        <p:cTn id="64" dur="1" fill="hold">
+                                          <p:stCondLst>
+                                            <p:cond delay="0"/>
+                                          </p:stCondLst>
+                                        </p:cTn>
+                                        <p:tgtEl>
+                                          <p:spTgt spid="34"/>
+                                        </p:tgtEl>
+                                        <p:attrNameLst>
+                                          <p:attrName>style.visibility</p:attrName>
+                                        </p:attrNameLst>
+                                      </p:cBhvr>
+                                      <p:to>
+                                        <p:strVal val="visible"/>
+                                      </p:to>
+                                    </p:set>
+                                  </p:childTnLst>
+                                </p:cTn>
+                              </p:par>
+                              <p:par>
+                                <p:cTn id="65" presetID="1" presetClass="entr" presetSubtype="0" fill="hold" grpId="0" nodeType="withEffect">
+                                  <p:stCondLst>
+                                    <p:cond delay="0"/>
+                                  </p:stCondLst>
+                                  <p:childTnLst>
+                                    <p:set>
+                                      <p:cBhvr>
+                                        <p:cTn id="66" dur="1" fill="hold">
+                                          <p:stCondLst>
+                                            <p:cond delay="0"/>
+                                          </p:stCondLst>
+                                        </p:cTn>
+                                        <p:tgtEl>
+                                          <p:spTgt spid="32"/>
+                                        </p:tgtEl>
+                                        <p:attrNameLst>
+                                          <p:attrName>style.visibility</p:attrName>
+                                        </p:attrNameLst>
+                                      </p:cBhvr>
+                                      <p:to>
+                                        <p:strVal val="visible"/>
+                                      </p:to>
+                                    </p:set>
+                                  </p:childTnLst>
+                                </p:cTn>
+                              </p:par>
+                              <p:par>
+                                <p:cTn id="67" presetID="1" presetClass="entr" presetSubtype="0" fill="hold" grpId="0" nodeType="withEffect">
+                                  <p:stCondLst>
+                                    <p:cond delay="0"/>
+                                  </p:stCondLst>
+                                  <p:childTnLst>
+                                    <p:set>
+                                      <p:cBhvr>
+                                        <p:cTn id="68" dur="1" fill="hold">
+                                          <p:stCondLst>
+                                            <p:cond delay="0"/>
+                                          </p:stCondLst>
+                                        </p:cTn>
+                                        <p:tgtEl>
+                                          <p:spTgt spid="33"/>
+                                        </p:tgtEl>
+                                        <p:attrNameLst>
+                                          <p:attrName>style.visibility</p:attrName>
+                                        </p:attrNameLst>
+                                      </p:cBhvr>
+                                      <p:to>
+                                        <p:strVal val="visible"/>
+                                      </p:to>
+                                    </p:set>
+                                  </p:childTnLst>
+                                </p:cTn>
+                              </p:par>
+                            </p:childTnLst>
+                          </p:cTn>
+                        </p:par>
+                      </p:childTnLst>
+                    </p:cTn>
+                  </p:par>
+                </p:childTnLst>
+              </p:cTn>
+              <p:prevCondLst>
+                <p:cond evt="onPrev" delay="0">
+                  <p:tgtEl>
+                    <p:sldTgt/>
+                  </p:tgtEl>
+                </p:cond>
+              </p:prevCondLst>
+              <p:nextCondLst>
+                <p:cond evt="onNext" delay="0">
+                  <p:tgtEl>
+                    <p:sldTgt/>
+                  </p:tgtEl>
+                </p:cond>
+              </p:nextCondLst>
+            </p:seq>
+          </p:childTnLst>
+        </p:cTn>
+      </p:par>
+    </p:tnLst>
+    <p:bldLst>
+      <p:bldP spid="3" grpId="0" animBg="1"/>
+      <p:bldP spid="4" grpId="0" animBg="1"/>
+      <p:bldP spid="5" grpId="0" animBg="1"/>
+      <p:bldP spid="6" grpId="0" animBg="1"/>
+      <p:bldP spid="7" grpId="0" animBg="1"/>
+      <p:bldP spid="8" grpId="0" animBg="1"/>
+      <p:bldP spid="9" grpId="0" animBg="1"/>
+      <p:bldP spid="10" grpId="0" animBg="1"/>
+      <p:bldP spid="11" grpId="0" animBg="1"/>
+      <p:bldP spid="39" grpId="0" animBg="1"/>
+      <p:bldP spid="40" grpId="0" animBg="1"/>
+      <p:bldP spid="41" grpId="0" animBg="1"/>
+      <p:bldP spid="42" grpId="0" animBg="1"/>
+      <p:bldP spid="53" grpId="0"/>
+      <p:bldP spid="55" grpId="0"/>
+      <p:bldP spid="56" grpId="0"/>
+      <p:bldP spid="57" grpId="0"/>
+      <p:bldP spid="32" grpId="0"/>
+      <p:bldP spid="33" grpId="0"/>
+      <p:bldP spid="34" grpId="0"/>
+    </p:bldLst>
+  </p:timing>
+</p:sld>
+</file>
+
+<file path=ppt/slides/slide39.xml><?xml version="1.0" encoding="utf-8"?>
+<p:sld xmlns:a="http://schemas.openxmlformats.org/drawingml/2006/main" xmlns:r="http://schemas.openxmlformats.org/officeDocument/2006/relationships" xmlns:p="http://schemas.openxmlformats.org/presentationml/2006/main">
+  <p:cSld>
+    <p:spTree>
+      <p:nvGrpSpPr>
+        <p:cNvPr id="1" name=""/>
+        <p:cNvGrpSpPr/>
+        <p:nvPr/>
+      </p:nvGrpSpPr>
+      <p:grpSpPr>
+        <a:xfrm>
+          <a:off x="0" y="0"/>
+          <a:ext cx="0" cy="0"/>
+          <a:chOff x="0" y="0"/>
+          <a:chExt cx="0" cy="0"/>
+        </a:xfrm>
+      </p:grpSpPr>
+      <p:sp>
+        <p:nvSpPr>
+          <p:cNvPr id="2" name="Title 1">
+            <a:extLst>
+              <a:ext uri="{FF2B5EF4-FFF2-40B4-BE49-F238E27FC236}">
+                <a16:creationId xmlns:a16="http://schemas.microsoft.com/office/drawing/2014/main" id="{BD29575D-F43E-4C04-A585-618B35452E54}"/>
+              </a:ext>
+            </a:extLst>
+          </p:cNvPr>
+          <p:cNvSpPr txBox="1">
+            <a:spLocks/>
+          </p:cNvSpPr>
+          <p:nvPr/>
+        </p:nvSpPr>
+        <p:spPr>
+          <a:xfrm>
+            <a:off x="756407" y="2256569"/>
+            <a:ext cx="10679185" cy="3566160"/>
+          </a:xfrm>
+          <a:prstGeom prst="rect">
+            <a:avLst/>
+          </a:prstGeom>
+        </p:spPr>
+        <p:txBody>
+          <a:bodyPr>
+            <a:noAutofit/>
+          </a:bodyPr>
+          <a:lstStyle>
+            <a:lvl1pPr algn="l" defTabSz="914400" rtl="0" eaLnBrk="1" latinLnBrk="0" hangingPunct="1">
+              <a:lnSpc>
+                <a:spcPct val="85000"/>
+              </a:lnSpc>
+              <a:spcBef>
+                <a:spcPct val="0"/>
+              </a:spcBef>
+              <a:buNone/>
+              <a:defRPr sz="4800" kern="1200" spc="-50" baseline="0">
+                <a:solidFill>
+                  <a:schemeClr val="tx1">
+                    <a:lumMod val="75000"/>
+                    <a:lumOff val="25000"/>
+                  </a:schemeClr>
+                </a:solidFill>
+                <a:latin typeface="+mj-lt"/>
+                <a:ea typeface="+mj-ea"/>
+                <a:cs typeface="+mj-cs"/>
+              </a:defRPr>
+            </a:lvl1pPr>
+          </a:lstStyle>
+          <a:p>
+            <a:pPr algn="ctr"/>
+            <a:r>
+              <a:rPr lang="sr-Cyrl-RS" sz="8000" dirty="0"/>
+              <a:t>ХВАЛА НА ПАЖЊИ!</a:t>
+            </a:r>
+            <a:endParaRPr lang="sr-Latn-RS" sz="8000" dirty="0"/>
+          </a:p>
+          <a:p>
+            <a:pPr algn="ctr"/>
+            <a:r>
+              <a:rPr lang="sr-Cyrl-RS" sz="8000" dirty="0"/>
+              <a:t>🎓</a:t>
+            </a:r>
+          </a:p>
+          <a:p>
+            <a:pPr algn="ctr"/>
+            <a:endParaRPr lang="en-US" sz="8000" dirty="0"/>
+          </a:p>
+        </p:txBody>
+      </p:sp>
+    </p:spTree>
+    <p:extLst>
+      <p:ext uri="{BB962C8B-B14F-4D97-AF65-F5344CB8AC3E}">
+        <p14:creationId xmlns:p14="http://schemas.microsoft.com/office/powerpoint/2010/main" val="1980323143"/>
+      </p:ext>
+    </p:extLst>
+  </p:cSld>
+  <p:clrMapOvr>
+    <a:masterClrMapping/>
+  </p:clrMapOvr>
 </p:sld>
 </file>
 
@@ -22779,106 +26655,6 @@
 </p:sld>
 </file>
 
-<file path=ppt/slides/slide40.xml><?xml version="1.0" encoding="utf-8"?>
-<p:sld xmlns:a="http://schemas.openxmlformats.org/drawingml/2006/main" xmlns:r="http://schemas.openxmlformats.org/officeDocument/2006/relationships" xmlns:p="http://schemas.openxmlformats.org/presentationml/2006/main">
-  <p:cSld>
-    <p:spTree>
-      <p:nvGrpSpPr>
-        <p:cNvPr id="1" name=""/>
-        <p:cNvGrpSpPr/>
-        <p:nvPr/>
-      </p:nvGrpSpPr>
-      <p:grpSpPr>
-        <a:xfrm>
-          <a:off x="0" y="0"/>
-          <a:ext cx="0" cy="0"/>
-          <a:chOff x="0" y="0"/>
-          <a:chExt cx="0" cy="0"/>
-        </a:xfrm>
-      </p:grpSpPr>
-      <p:sp>
-        <p:nvSpPr>
-          <p:cNvPr id="2" name="Title 1">
-            <a:extLst>
-              <a:ext uri="{FF2B5EF4-FFF2-40B4-BE49-F238E27FC236}">
-                <a16:creationId xmlns:a16="http://schemas.microsoft.com/office/drawing/2014/main" id="{BD29575D-F43E-4C04-A585-618B35452E54}"/>
-              </a:ext>
-            </a:extLst>
-          </p:cNvPr>
-          <p:cNvSpPr txBox="1">
-            <a:spLocks/>
-          </p:cNvSpPr>
-          <p:nvPr/>
-        </p:nvSpPr>
-        <p:spPr>
-          <a:xfrm>
-            <a:off x="756407" y="2256569"/>
-            <a:ext cx="10679185" cy="3566160"/>
-          </a:xfrm>
-          <a:prstGeom prst="rect">
-            <a:avLst/>
-          </a:prstGeom>
-        </p:spPr>
-        <p:txBody>
-          <a:bodyPr>
-            <a:noAutofit/>
-          </a:bodyPr>
-          <a:lstStyle>
-            <a:lvl1pPr algn="l" defTabSz="914400" rtl="0" eaLnBrk="1" latinLnBrk="0" hangingPunct="1">
-              <a:lnSpc>
-                <a:spcPct val="85000"/>
-              </a:lnSpc>
-              <a:spcBef>
-                <a:spcPct val="0"/>
-              </a:spcBef>
-              <a:buNone/>
-              <a:defRPr sz="4800" kern="1200" spc="-50" baseline="0">
-                <a:solidFill>
-                  <a:schemeClr val="tx1">
-                    <a:lumMod val="75000"/>
-                    <a:lumOff val="25000"/>
-                  </a:schemeClr>
-                </a:solidFill>
-                <a:latin typeface="+mj-lt"/>
-                <a:ea typeface="+mj-ea"/>
-                <a:cs typeface="+mj-cs"/>
-              </a:defRPr>
-            </a:lvl1pPr>
-          </a:lstStyle>
-          <a:p>
-            <a:pPr algn="ctr"/>
-            <a:r>
-              <a:rPr lang="sr-Cyrl-RS" sz="8000" dirty="0"/>
-              <a:t>ХВАЛА НА ПАЖЉИ!</a:t>
-            </a:r>
-            <a:endParaRPr lang="sr-Latn-RS" sz="8000" dirty="0"/>
-          </a:p>
-          <a:p>
-            <a:pPr algn="ctr"/>
-            <a:r>
-              <a:rPr lang="sr-Cyrl-RS" sz="8000" dirty="0"/>
-              <a:t>🎓</a:t>
-            </a:r>
-          </a:p>
-          <a:p>
-            <a:pPr algn="ctr"/>
-            <a:endParaRPr lang="en-US" sz="8000" dirty="0"/>
-          </a:p>
-        </p:txBody>
-      </p:sp>
-    </p:spTree>
-    <p:extLst>
-      <p:ext uri="{BB962C8B-B14F-4D97-AF65-F5344CB8AC3E}">
-        <p14:creationId xmlns:p14="http://schemas.microsoft.com/office/powerpoint/2010/main" val="1980323143"/>
-      </p:ext>
-    </p:extLst>
-  </p:cSld>
-  <p:clrMapOvr>
-    <a:masterClrMapping/>
-  </p:clrMapOvr>
-</p:sld>
-</file>
-
 <file path=ppt/slides/slide5.xml><?xml version="1.0" encoding="utf-8"?>
 <p:sld xmlns:a="http://schemas.openxmlformats.org/drawingml/2006/main" xmlns:r="http://schemas.openxmlformats.org/officeDocument/2006/relationships" xmlns:p="http://schemas.openxmlformats.org/presentationml/2006/main">
   <p:cSld>
@@ -23452,7 +27228,7 @@
         <p:spPr>
           <a:xfrm>
             <a:off x="5368953" y="4792197"/>
-            <a:ext cx="365760" cy="1293275"/>
+            <a:ext cx="419028" cy="1293275"/>
           </a:xfrm>
           <a:prstGeom prst="rect">
             <a:avLst/>
@@ -24115,7 +27891,7 @@
         </p:nvSpPr>
         <p:spPr>
           <a:xfrm>
-            <a:off x="7923731" y="5362004"/>
+            <a:off x="7923731" y="5317239"/>
             <a:ext cx="276038" cy="307777"/>
           </a:xfrm>
           <a:prstGeom prst="rect">
@@ -24513,6 +28289,274 @@
   <p:clrMapOvr>
     <a:masterClrMapping/>
   </p:clrMapOvr>
+  <p:timing>
+    <p:tnLst>
+      <p:par>
+        <p:cTn id="1" dur="indefinite" restart="never" nodeType="tmRoot">
+          <p:childTnLst>
+            <p:seq concurrent="1" nextAc="seek">
+              <p:cTn id="2" dur="indefinite" nodeType="mainSeq">
+                <p:childTnLst>
+                  <p:par>
+                    <p:cTn id="3" fill="hold">
+                      <p:stCondLst>
+                        <p:cond delay="indefinite"/>
+                      </p:stCondLst>
+                      <p:childTnLst>
+                        <p:par>
+                          <p:cTn id="4" fill="hold">
+                            <p:stCondLst>
+                              <p:cond delay="0"/>
+                            </p:stCondLst>
+                            <p:childTnLst>
+                              <p:par>
+                                <p:cTn id="5" presetID="1" presetClass="entr" presetSubtype="0" fill="hold" grpId="0" nodeType="clickEffect">
+                                  <p:stCondLst>
+                                    <p:cond delay="0"/>
+                                  </p:stCondLst>
+                                  <p:childTnLst>
+                                    <p:set>
+                                      <p:cBhvr>
+                                        <p:cTn id="6" dur="1" fill="hold">
+                                          <p:stCondLst>
+                                            <p:cond delay="0"/>
+                                          </p:stCondLst>
+                                        </p:cTn>
+                                        <p:tgtEl>
+                                          <p:spTgt spid="11"/>
+                                        </p:tgtEl>
+                                        <p:attrNameLst>
+                                          <p:attrName>style.visibility</p:attrName>
+                                        </p:attrNameLst>
+                                      </p:cBhvr>
+                                      <p:to>
+                                        <p:strVal val="visible"/>
+                                      </p:to>
+                                    </p:set>
+                                  </p:childTnLst>
+                                </p:cTn>
+                              </p:par>
+                              <p:par>
+                                <p:cTn id="7" presetID="1" presetClass="entr" presetSubtype="0" fill="hold" grpId="0" nodeType="withEffect">
+                                  <p:stCondLst>
+                                    <p:cond delay="0"/>
+                                  </p:stCondLst>
+                                  <p:childTnLst>
+                                    <p:set>
+                                      <p:cBhvr>
+                                        <p:cTn id="8" dur="1" fill="hold">
+                                          <p:stCondLst>
+                                            <p:cond delay="0"/>
+                                          </p:stCondLst>
+                                        </p:cTn>
+                                        <p:tgtEl>
+                                          <p:spTgt spid="12"/>
+                                        </p:tgtEl>
+                                        <p:attrNameLst>
+                                          <p:attrName>style.visibility</p:attrName>
+                                        </p:attrNameLst>
+                                      </p:cBhvr>
+                                      <p:to>
+                                        <p:strVal val="visible"/>
+                                      </p:to>
+                                    </p:set>
+                                  </p:childTnLst>
+                                </p:cTn>
+                              </p:par>
+                              <p:par>
+                                <p:cTn id="9" presetID="1" presetClass="entr" presetSubtype="0" fill="hold" nodeType="withEffect">
+                                  <p:stCondLst>
+                                    <p:cond delay="0"/>
+                                  </p:stCondLst>
+                                  <p:childTnLst>
+                                    <p:set>
+                                      <p:cBhvr>
+                                        <p:cTn id="10" dur="1" fill="hold">
+                                          <p:stCondLst>
+                                            <p:cond delay="0"/>
+                                          </p:stCondLst>
+                                        </p:cTn>
+                                        <p:tgtEl>
+                                          <p:spTgt spid="37"/>
+                                        </p:tgtEl>
+                                        <p:attrNameLst>
+                                          <p:attrName>style.visibility</p:attrName>
+                                        </p:attrNameLst>
+                                      </p:cBhvr>
+                                      <p:to>
+                                        <p:strVal val="visible"/>
+                                      </p:to>
+                                    </p:set>
+                                  </p:childTnLst>
+                                </p:cTn>
+                              </p:par>
+                              <p:par>
+                                <p:cTn id="11" presetID="1" presetClass="entr" presetSubtype="0" fill="hold" nodeType="withEffect">
+                                  <p:stCondLst>
+                                    <p:cond delay="0"/>
+                                  </p:stCondLst>
+                                  <p:childTnLst>
+                                    <p:set>
+                                      <p:cBhvr>
+                                        <p:cTn id="12" dur="1" fill="hold">
+                                          <p:stCondLst>
+                                            <p:cond delay="0"/>
+                                          </p:stCondLst>
+                                        </p:cTn>
+                                        <p:tgtEl>
+                                          <p:spTgt spid="43"/>
+                                        </p:tgtEl>
+                                        <p:attrNameLst>
+                                          <p:attrName>style.visibility</p:attrName>
+                                        </p:attrNameLst>
+                                      </p:cBhvr>
+                                      <p:to>
+                                        <p:strVal val="visible"/>
+                                      </p:to>
+                                    </p:set>
+                                  </p:childTnLst>
+                                </p:cTn>
+                              </p:par>
+                              <p:par>
+                                <p:cTn id="13" presetID="1" presetClass="entr" presetSubtype="0" fill="hold" nodeType="withEffect">
+                                  <p:stCondLst>
+                                    <p:cond delay="0"/>
+                                  </p:stCondLst>
+                                  <p:childTnLst>
+                                    <p:set>
+                                      <p:cBhvr>
+                                        <p:cTn id="14" dur="1" fill="hold">
+                                          <p:stCondLst>
+                                            <p:cond delay="0"/>
+                                          </p:stCondLst>
+                                        </p:cTn>
+                                        <p:tgtEl>
+                                          <p:spTgt spid="47"/>
+                                        </p:tgtEl>
+                                        <p:attrNameLst>
+                                          <p:attrName>style.visibility</p:attrName>
+                                        </p:attrNameLst>
+                                      </p:cBhvr>
+                                      <p:to>
+                                        <p:strVal val="visible"/>
+                                      </p:to>
+                                    </p:set>
+                                  </p:childTnLst>
+                                </p:cTn>
+                              </p:par>
+                              <p:par>
+                                <p:cTn id="15" presetID="1" presetClass="entr" presetSubtype="0" fill="hold" nodeType="withEffect">
+                                  <p:stCondLst>
+                                    <p:cond delay="0"/>
+                                  </p:stCondLst>
+                                  <p:childTnLst>
+                                    <p:set>
+                                      <p:cBhvr>
+                                        <p:cTn id="16" dur="1" fill="hold">
+                                          <p:stCondLst>
+                                            <p:cond delay="0"/>
+                                          </p:stCondLst>
+                                        </p:cTn>
+                                        <p:tgtEl>
+                                          <p:spTgt spid="45"/>
+                                        </p:tgtEl>
+                                        <p:attrNameLst>
+                                          <p:attrName>style.visibility</p:attrName>
+                                        </p:attrNameLst>
+                                      </p:cBhvr>
+                                      <p:to>
+                                        <p:strVal val="visible"/>
+                                      </p:to>
+                                    </p:set>
+                                  </p:childTnLst>
+                                </p:cTn>
+                              </p:par>
+                              <p:par>
+                                <p:cTn id="17" presetID="1" presetClass="entr" presetSubtype="0" fill="hold" nodeType="withEffect">
+                                  <p:stCondLst>
+                                    <p:cond delay="0"/>
+                                  </p:stCondLst>
+                                  <p:childTnLst>
+                                    <p:set>
+                                      <p:cBhvr>
+                                        <p:cTn id="18" dur="1" fill="hold">
+                                          <p:stCondLst>
+                                            <p:cond delay="0"/>
+                                          </p:stCondLst>
+                                        </p:cTn>
+                                        <p:tgtEl>
+                                          <p:spTgt spid="39"/>
+                                        </p:tgtEl>
+                                        <p:attrNameLst>
+                                          <p:attrName>style.visibility</p:attrName>
+                                        </p:attrNameLst>
+                                      </p:cBhvr>
+                                      <p:to>
+                                        <p:strVal val="visible"/>
+                                      </p:to>
+                                    </p:set>
+                                  </p:childTnLst>
+                                </p:cTn>
+                              </p:par>
+                              <p:par>
+                                <p:cTn id="19" presetID="1" presetClass="entr" presetSubtype="0" fill="hold" nodeType="withEffect">
+                                  <p:stCondLst>
+                                    <p:cond delay="0"/>
+                                  </p:stCondLst>
+                                  <p:childTnLst>
+                                    <p:set>
+                                      <p:cBhvr>
+                                        <p:cTn id="20" dur="1" fill="hold">
+                                          <p:stCondLst>
+                                            <p:cond delay="0"/>
+                                          </p:stCondLst>
+                                        </p:cTn>
+                                        <p:tgtEl>
+                                          <p:spTgt spid="41"/>
+                                        </p:tgtEl>
+                                        <p:attrNameLst>
+                                          <p:attrName>style.visibility</p:attrName>
+                                        </p:attrNameLst>
+                                      </p:cBhvr>
+                                      <p:to>
+                                        <p:strVal val="visible"/>
+                                      </p:to>
+                                    </p:set>
+                                  </p:childTnLst>
+                                </p:cTn>
+                              </p:par>
+                            </p:childTnLst>
+                          </p:cTn>
+                        </p:par>
+                      </p:childTnLst>
+                    </p:cTn>
+                  </p:par>
+                </p:childTnLst>
+              </p:cTn>
+              <p:prevCondLst>
+                <p:cond evt="onPrev" delay="0">
+                  <p:tgtEl>
+                    <p:sldTgt/>
+                  </p:tgtEl>
+                </p:cond>
+              </p:prevCondLst>
+              <p:nextCondLst>
+                <p:cond evt="onNext" delay="0">
+                  <p:tgtEl>
+                    <p:sldTgt/>
+                  </p:tgtEl>
+                </p:cond>
+              </p:nextCondLst>
+            </p:seq>
+          </p:childTnLst>
+        </p:cTn>
+      </p:par>
+    </p:tnLst>
+    <p:bldLst>
+      <p:bldP spid="11" grpId="0" animBg="1"/>
+      <p:bldP spid="12" grpId="0" animBg="1"/>
+    </p:bldLst>
+  </p:timing>
 </p:sld>
 </file>
 
@@ -26050,6 +30094,268 @@
   <p:clrMapOvr>
     <a:masterClrMapping/>
   </p:clrMapOvr>
+  <p:timing>
+    <p:tnLst>
+      <p:par>
+        <p:cTn id="1" dur="indefinite" restart="never" nodeType="tmRoot">
+          <p:childTnLst>
+            <p:seq concurrent="1" nextAc="seek">
+              <p:cTn id="2" dur="indefinite" nodeType="mainSeq">
+                <p:childTnLst>
+                  <p:par>
+                    <p:cTn id="3" fill="hold">
+                      <p:stCondLst>
+                        <p:cond delay="indefinite"/>
+                      </p:stCondLst>
+                      <p:childTnLst>
+                        <p:par>
+                          <p:cTn id="4" fill="hold">
+                            <p:stCondLst>
+                              <p:cond delay="0"/>
+                            </p:stCondLst>
+                            <p:childTnLst>
+                              <p:par>
+                                <p:cTn id="5" presetID="1" presetClass="entr" presetSubtype="0" fill="hold" grpId="0" nodeType="clickEffect">
+                                  <p:stCondLst>
+                                    <p:cond delay="0"/>
+                                  </p:stCondLst>
+                                  <p:childTnLst>
+                                    <p:set>
+                                      <p:cBhvr>
+                                        <p:cTn id="6" dur="1" fill="hold">
+                                          <p:stCondLst>
+                                            <p:cond delay="0"/>
+                                          </p:stCondLst>
+                                        </p:cTn>
+                                        <p:tgtEl>
+                                          <p:spTgt spid="11"/>
+                                        </p:tgtEl>
+                                        <p:attrNameLst>
+                                          <p:attrName>style.visibility</p:attrName>
+                                        </p:attrNameLst>
+                                      </p:cBhvr>
+                                      <p:to>
+                                        <p:strVal val="visible"/>
+                                      </p:to>
+                                    </p:set>
+                                  </p:childTnLst>
+                                </p:cTn>
+                              </p:par>
+                              <p:par>
+                                <p:cTn id="7" presetID="1" presetClass="entr" presetSubtype="0" fill="hold" grpId="0" nodeType="withEffect">
+                                  <p:stCondLst>
+                                    <p:cond delay="0"/>
+                                  </p:stCondLst>
+                                  <p:childTnLst>
+                                    <p:set>
+                                      <p:cBhvr>
+                                        <p:cTn id="8" dur="1" fill="hold">
+                                          <p:stCondLst>
+                                            <p:cond delay="0"/>
+                                          </p:stCondLst>
+                                        </p:cTn>
+                                        <p:tgtEl>
+                                          <p:spTgt spid="13"/>
+                                        </p:tgtEl>
+                                        <p:attrNameLst>
+                                          <p:attrName>style.visibility</p:attrName>
+                                        </p:attrNameLst>
+                                      </p:cBhvr>
+                                      <p:to>
+                                        <p:strVal val="visible"/>
+                                      </p:to>
+                                    </p:set>
+                                  </p:childTnLst>
+                                </p:cTn>
+                              </p:par>
+                              <p:par>
+                                <p:cTn id="9" presetID="1" presetClass="entr" presetSubtype="0" fill="hold" grpId="0" nodeType="withEffect">
+                                  <p:stCondLst>
+                                    <p:cond delay="0"/>
+                                  </p:stCondLst>
+                                  <p:childTnLst>
+                                    <p:set>
+                                      <p:cBhvr>
+                                        <p:cTn id="10" dur="1" fill="hold">
+                                          <p:stCondLst>
+                                            <p:cond delay="0"/>
+                                          </p:stCondLst>
+                                        </p:cTn>
+                                        <p:tgtEl>
+                                          <p:spTgt spid="14"/>
+                                        </p:tgtEl>
+                                        <p:attrNameLst>
+                                          <p:attrName>style.visibility</p:attrName>
+                                        </p:attrNameLst>
+                                      </p:cBhvr>
+                                      <p:to>
+                                        <p:strVal val="visible"/>
+                                      </p:to>
+                                    </p:set>
+                                  </p:childTnLst>
+                                </p:cTn>
+                              </p:par>
+                            </p:childTnLst>
+                          </p:cTn>
+                        </p:par>
+                      </p:childTnLst>
+                    </p:cTn>
+                  </p:par>
+                  <p:par>
+                    <p:cTn id="11" fill="hold">
+                      <p:stCondLst>
+                        <p:cond delay="indefinite"/>
+                      </p:stCondLst>
+                      <p:childTnLst>
+                        <p:par>
+                          <p:cTn id="12" fill="hold">
+                            <p:stCondLst>
+                              <p:cond delay="0"/>
+                            </p:stCondLst>
+                            <p:childTnLst>
+                              <p:par>
+                                <p:cTn id="13" presetID="1" presetClass="entr" presetSubtype="0" fill="hold" nodeType="clickEffect">
+                                  <p:stCondLst>
+                                    <p:cond delay="0"/>
+                                  </p:stCondLst>
+                                  <p:childTnLst>
+                                    <p:set>
+                                      <p:cBhvr>
+                                        <p:cTn id="14" dur="1" fill="hold">
+                                          <p:stCondLst>
+                                            <p:cond delay="0"/>
+                                          </p:stCondLst>
+                                        </p:cTn>
+                                        <p:tgtEl>
+                                          <p:spTgt spid="17"/>
+                                        </p:tgtEl>
+                                        <p:attrNameLst>
+                                          <p:attrName>style.visibility</p:attrName>
+                                        </p:attrNameLst>
+                                      </p:cBhvr>
+                                      <p:to>
+                                        <p:strVal val="visible"/>
+                                      </p:to>
+                                    </p:set>
+                                  </p:childTnLst>
+                                </p:cTn>
+                              </p:par>
+                              <p:par>
+                                <p:cTn id="15" presetID="1" presetClass="entr" presetSubtype="0" fill="hold" grpId="0" nodeType="withEffect">
+                                  <p:stCondLst>
+                                    <p:cond delay="0"/>
+                                  </p:stCondLst>
+                                  <p:childTnLst>
+                                    <p:set>
+                                      <p:cBhvr>
+                                        <p:cTn id="16" dur="1" fill="hold">
+                                          <p:stCondLst>
+                                            <p:cond delay="0"/>
+                                          </p:stCondLst>
+                                        </p:cTn>
+                                        <p:tgtEl>
+                                          <p:spTgt spid="19"/>
+                                        </p:tgtEl>
+                                        <p:attrNameLst>
+                                          <p:attrName>style.visibility</p:attrName>
+                                        </p:attrNameLst>
+                                      </p:cBhvr>
+                                      <p:to>
+                                        <p:strVal val="visible"/>
+                                      </p:to>
+                                    </p:set>
+                                  </p:childTnLst>
+                                </p:cTn>
+                              </p:par>
+                              <p:par>
+                                <p:cTn id="17" presetID="1" presetClass="entr" presetSubtype="0" fill="hold" nodeType="withEffect">
+                                  <p:stCondLst>
+                                    <p:cond delay="0"/>
+                                  </p:stCondLst>
+                                  <p:childTnLst>
+                                    <p:set>
+                                      <p:cBhvr>
+                                        <p:cTn id="18" dur="1" fill="hold">
+                                          <p:stCondLst>
+                                            <p:cond delay="0"/>
+                                          </p:stCondLst>
+                                        </p:cTn>
+                                        <p:tgtEl>
+                                          <p:spTgt spid="20"/>
+                                        </p:tgtEl>
+                                        <p:attrNameLst>
+                                          <p:attrName>style.visibility</p:attrName>
+                                        </p:attrNameLst>
+                                      </p:cBhvr>
+                                      <p:to>
+                                        <p:strVal val="visible"/>
+                                      </p:to>
+                                    </p:set>
+                                  </p:childTnLst>
+                                </p:cTn>
+                              </p:par>
+                              <p:par>
+                                <p:cTn id="19" presetID="1" presetClass="entr" presetSubtype="0" fill="hold" grpId="0" nodeType="withEffect">
+                                  <p:stCondLst>
+                                    <p:cond delay="0"/>
+                                  </p:stCondLst>
+                                  <p:childTnLst>
+                                    <p:set>
+                                      <p:cBhvr>
+                                        <p:cTn id="20" dur="1" fill="hold">
+                                          <p:stCondLst>
+                                            <p:cond delay="0"/>
+                                          </p:stCondLst>
+                                        </p:cTn>
+                                        <p:tgtEl>
+                                          <p:spTgt spid="21"/>
+                                        </p:tgtEl>
+                                        <p:attrNameLst>
+                                          <p:attrName>style.visibility</p:attrName>
+                                        </p:attrNameLst>
+                                      </p:cBhvr>
+                                      <p:to>
+                                        <p:strVal val="visible"/>
+                                      </p:to>
+                                    </p:set>
+                                  </p:childTnLst>
+                                </p:cTn>
+                              </p:par>
+                            </p:childTnLst>
+                          </p:cTn>
+                        </p:par>
+                      </p:childTnLst>
+                    </p:cTn>
+                  </p:par>
+                </p:childTnLst>
+              </p:cTn>
+              <p:prevCondLst>
+                <p:cond evt="onPrev" delay="0">
+                  <p:tgtEl>
+                    <p:sldTgt/>
+                  </p:tgtEl>
+                </p:cond>
+              </p:prevCondLst>
+              <p:nextCondLst>
+                <p:cond evt="onNext" delay="0">
+                  <p:tgtEl>
+                    <p:sldTgt/>
+                  </p:tgtEl>
+                </p:cond>
+              </p:nextCondLst>
+            </p:seq>
+          </p:childTnLst>
+        </p:cTn>
+      </p:par>
+    </p:tnLst>
+    <p:bldLst>
+      <p:bldP spid="11" grpId="0" animBg="1"/>
+      <p:bldP spid="13" grpId="0" animBg="1"/>
+      <p:bldP spid="14" grpId="0" animBg="1"/>
+      <p:bldP spid="19" grpId="0"/>
+      <p:bldP spid="21" grpId="0"/>
+    </p:bldLst>
+  </p:timing>
 </p:sld>
 </file>
 
